--- a/public/fun/pack/pptx/family/가족소개_25_반려동물과함께_연꽃연못.pptx
+++ b/public/fun/pack/pptx/family/가족소개_25_반려동물과함께_연꽃연못.pptx
@@ -3286,14 +3286,6 @@
 <file path=ppt/slides/slide1.xml><?xml version="1.0" encoding="utf-8"?>
 <p:sld xmlns:a="http://schemas.openxmlformats.org/drawingml/2006/main" xmlns:p="http://schemas.openxmlformats.org/presentationml/2006/main" xmlns:r="http://schemas.openxmlformats.org/officeDocument/2006/relationships">
   <p:cSld>
-    <p:bg>
-      <p:bgPr>
-        <a:solidFill>
-          <a:srgbClr val="7B3759"/>
-        </a:solidFill>
-        <a:effectLst/>
-      </p:bgPr>
-    </p:bg>
     <p:spTree>
       <p:nvGrpSpPr>
         <p:cNvPr id="1" name=""/>
@@ -3301,559 +3293,30 @@
         <p:nvPr/>
       </p:nvGrpSpPr>
       <p:grpSpPr/>
-      <p:sp>
-        <p:nvSpPr>
-          <p:cNvPr id="3" name="장식"/>
-          <p:cNvSpPr/>
+      <p:pic>
+        <p:nvPicPr>
+          <p:cNvPr id="3" name="표지 그림" descr="family-25.jpg"/>
+          <p:cNvPicPr>
+            <a:picLocks noChangeAspect="1"/>
+          </p:cNvPicPr>
           <p:nvPr/>
-        </p:nvSpPr>
-        <p:spPr>
-          <a:xfrm>
-            <a:off x="457200" y="457200"/>
-            <a:ext cx="11277295" cy="5943600"/>
-          </a:xfrm>
-          <a:prstGeom prst="roundRect">
-            <a:avLst>
-              <a:gd name="adj" fmla="val 5000"/>
-            </a:avLst>
-          </a:prstGeom>
-          <a:solidFill>
-            <a:srgbClr val="FFFFFF"/>
-          </a:solidFill>
-          <a:ln>
-            <a:noFill/>
-          </a:ln>
-        </p:spPr>
-        <p:txBody>
-          <a:bodyPr rtlCol="0" anchor="ctr"/>
-          <a:lstStyle/>
-          <a:p>
-            <a:pPr algn="ctr"/>
-          </a:p>
-        </p:txBody>
-      </p:sp>
-      <p:sp>
-        <p:nvSpPr>
-          <p:cNvPr id="4" name="장식"/>
-          <p:cNvSpPr/>
-          <p:nvPr/>
-        </p:nvSpPr>
-        <p:spPr>
-          <a:xfrm>
-            <a:off x="5892165" y="662482"/>
-            <a:ext cx="407365" cy="633679"/>
-          </a:xfrm>
-          <a:prstGeom prst="ellipse">
+        </p:nvPicPr>
+        <p:blipFill>
+          <a:blip r:embed="rId2"/>
+          <a:stretch>
+            <a:fillRect/>
+          </a:stretch>
+        </p:blipFill>
+        <p:spPr>
+          <a:xfrm>
+            <a:off x="0" y="0"/>
+            <a:ext cx="12191695" cy="6858000"/>
+          </a:xfrm>
+          <a:prstGeom prst="rect">
             <a:avLst/>
           </a:prstGeom>
-          <a:solidFill>
-            <a:srgbClr val="B8618C"/>
-          </a:solidFill>
-          <a:ln>
-            <a:noFill/>
-          </a:ln>
-        </p:spPr>
-        <p:txBody>
-          <a:bodyPr rtlCol="0" anchor="ctr"/>
-          <a:lstStyle/>
-          <a:p>
-            <a:pPr algn="ctr"/>
-          </a:p>
-        </p:txBody>
-      </p:sp>
-      <p:sp>
-        <p:nvSpPr>
-          <p:cNvPr id="5" name="장식"/>
-          <p:cNvSpPr/>
-          <p:nvPr/>
-        </p:nvSpPr>
-        <p:spPr>
-          <a:xfrm rot="4320000">
-            <a:off x="6265243" y="933539"/>
-            <a:ext cx="407365" cy="633679"/>
-          </a:xfrm>
-          <a:prstGeom prst="ellipse">
-            <a:avLst/>
-          </a:prstGeom>
-          <a:solidFill>
-            <a:srgbClr val="EED3E0"/>
-          </a:solidFill>
-          <a:ln>
-            <a:noFill/>
-          </a:ln>
-        </p:spPr>
-        <p:txBody>
-          <a:bodyPr rtlCol="0" anchor="ctr"/>
-          <a:lstStyle/>
-          <a:p>
-            <a:pPr algn="ctr"/>
-          </a:p>
-        </p:txBody>
-      </p:sp>
-      <p:sp>
-        <p:nvSpPr>
-          <p:cNvPr id="6" name="장식"/>
-          <p:cNvSpPr/>
-          <p:nvPr/>
-        </p:nvSpPr>
-        <p:spPr>
-          <a:xfrm rot="8640000">
-            <a:off x="6122739" y="1372119"/>
-            <a:ext cx="407365" cy="633679"/>
-          </a:xfrm>
-          <a:prstGeom prst="ellipse">
-            <a:avLst/>
-          </a:prstGeom>
-          <a:solidFill>
-            <a:srgbClr val="B8618C"/>
-          </a:solidFill>
-          <a:ln>
-            <a:noFill/>
-          </a:ln>
-        </p:spPr>
-        <p:txBody>
-          <a:bodyPr rtlCol="0" anchor="ctr"/>
-          <a:lstStyle/>
-          <a:p>
-            <a:pPr algn="ctr"/>
-          </a:p>
-        </p:txBody>
-      </p:sp>
-      <p:sp>
-        <p:nvSpPr>
-          <p:cNvPr id="7" name="장식"/>
-          <p:cNvSpPr/>
-          <p:nvPr/>
-        </p:nvSpPr>
-        <p:spPr>
-          <a:xfrm rot="12960000">
-            <a:off x="5661590" y="1372119"/>
-            <a:ext cx="407365" cy="633679"/>
-          </a:xfrm>
-          <a:prstGeom prst="ellipse">
-            <a:avLst/>
-          </a:prstGeom>
-          <a:solidFill>
-            <a:srgbClr val="EED3E0"/>
-          </a:solidFill>
-          <a:ln>
-            <a:noFill/>
-          </a:ln>
-        </p:spPr>
-        <p:txBody>
-          <a:bodyPr rtlCol="0" anchor="ctr"/>
-          <a:lstStyle/>
-          <a:p>
-            <a:pPr algn="ctr"/>
-          </a:p>
-        </p:txBody>
-      </p:sp>
-      <p:sp>
-        <p:nvSpPr>
-          <p:cNvPr id="8" name="장식"/>
-          <p:cNvSpPr/>
-          <p:nvPr/>
-        </p:nvSpPr>
-        <p:spPr>
-          <a:xfrm rot="17280000">
-            <a:off x="5519086" y="933539"/>
-            <a:ext cx="407365" cy="633679"/>
-          </a:xfrm>
-          <a:prstGeom prst="ellipse">
-            <a:avLst/>
-          </a:prstGeom>
-          <a:solidFill>
-            <a:srgbClr val="B8618C"/>
-          </a:solidFill>
-          <a:ln>
-            <a:noFill/>
-          </a:ln>
-        </p:spPr>
-        <p:txBody>
-          <a:bodyPr rtlCol="0" anchor="ctr"/>
-          <a:lstStyle/>
-          <a:p>
-            <a:pPr algn="ctr"/>
-          </a:p>
-        </p:txBody>
-      </p:sp>
-      <p:sp>
-        <p:nvSpPr>
-          <p:cNvPr id="9" name="장식"/>
-          <p:cNvSpPr/>
-          <p:nvPr/>
-        </p:nvSpPr>
-        <p:spPr>
-          <a:xfrm>
-            <a:off x="5960059" y="1235811"/>
-            <a:ext cx="271576" cy="271576"/>
-          </a:xfrm>
-          <a:prstGeom prst="ellipse">
-            <a:avLst/>
-          </a:prstGeom>
-          <a:solidFill>
-            <a:srgbClr val="3F8D3F"/>
-          </a:solidFill>
-          <a:ln>
-            <a:noFill/>
-          </a:ln>
-        </p:spPr>
-        <p:txBody>
-          <a:bodyPr rtlCol="0" anchor="ctr"/>
-          <a:lstStyle/>
-          <a:p>
-            <a:pPr algn="ctr"/>
-          </a:p>
-        </p:txBody>
-      </p:sp>
-      <p:sp>
-        <p:nvSpPr>
-          <p:cNvPr id="10" name="장식"/>
-          <p:cNvSpPr/>
-          <p:nvPr/>
-        </p:nvSpPr>
-        <p:spPr>
-          <a:xfrm rot="1200000">
-            <a:off x="5231271" y="1707812"/>
-            <a:ext cx="203682" cy="316839"/>
-          </a:xfrm>
-          <a:prstGeom prst="ellipse">
-            <a:avLst/>
-          </a:prstGeom>
-          <a:solidFill>
-            <a:srgbClr val="B8618C"/>
-          </a:solidFill>
-          <a:ln>
-            <a:noFill/>
-          </a:ln>
-        </p:spPr>
-        <p:txBody>
-          <a:bodyPr rtlCol="0" anchor="ctr"/>
-          <a:lstStyle/>
-          <a:p>
-            <a:pPr algn="ctr"/>
-          </a:p>
-        </p:txBody>
-      </p:sp>
-      <p:sp>
-        <p:nvSpPr>
-          <p:cNvPr id="11" name="장식"/>
-          <p:cNvSpPr/>
-          <p:nvPr/>
-        </p:nvSpPr>
-        <p:spPr>
-          <a:xfrm rot="5520000">
-            <a:off x="5360207" y="1898967"/>
-            <a:ext cx="203682" cy="316839"/>
-          </a:xfrm>
-          <a:prstGeom prst="ellipse">
-            <a:avLst/>
-          </a:prstGeom>
-          <a:solidFill>
-            <a:srgbClr val="EED3E0"/>
-          </a:solidFill>
-          <a:ln>
-            <a:noFill/>
-          </a:ln>
-        </p:spPr>
-        <p:txBody>
-          <a:bodyPr rtlCol="0" anchor="ctr"/>
-          <a:lstStyle/>
-          <a:p>
-            <a:pPr algn="ctr"/>
-          </a:p>
-        </p:txBody>
-      </p:sp>
-      <p:sp>
-        <p:nvSpPr>
-          <p:cNvPr id="12" name="장식"/>
-          <p:cNvSpPr/>
-          <p:nvPr/>
-        </p:nvSpPr>
-        <p:spPr>
-          <a:xfrm rot="9840000">
-            <a:off x="5218251" y="2080662"/>
-            <a:ext cx="203682" cy="316839"/>
-          </a:xfrm>
-          <a:prstGeom prst="ellipse">
-            <a:avLst/>
-          </a:prstGeom>
-          <a:solidFill>
-            <a:srgbClr val="B8618C"/>
-          </a:solidFill>
-          <a:ln>
-            <a:noFill/>
-          </a:ln>
-        </p:spPr>
-        <p:txBody>
-          <a:bodyPr rtlCol="0" anchor="ctr"/>
-          <a:lstStyle/>
-          <a:p>
-            <a:pPr algn="ctr"/>
-          </a:p>
-        </p:txBody>
-      </p:sp>
-      <p:sp>
-        <p:nvSpPr>
-          <p:cNvPr id="13" name="장식"/>
-          <p:cNvSpPr/>
-          <p:nvPr/>
-        </p:nvSpPr>
-        <p:spPr>
-          <a:xfrm rot="14160000">
-            <a:off x="5001581" y="2001801"/>
-            <a:ext cx="203682" cy="316839"/>
-          </a:xfrm>
-          <a:prstGeom prst="ellipse">
-            <a:avLst/>
-          </a:prstGeom>
-          <a:solidFill>
-            <a:srgbClr val="EED3E0"/>
-          </a:solidFill>
-          <a:ln>
-            <a:noFill/>
-          </a:ln>
-        </p:spPr>
-        <p:txBody>
-          <a:bodyPr rtlCol="0" anchor="ctr"/>
-          <a:lstStyle/>
-          <a:p>
-            <a:pPr algn="ctr"/>
-          </a:p>
-        </p:txBody>
-      </p:sp>
-      <p:sp>
-        <p:nvSpPr>
-          <p:cNvPr id="14" name="장식"/>
-          <p:cNvSpPr/>
-          <p:nvPr/>
-        </p:nvSpPr>
-        <p:spPr>
-          <a:xfrm rot="18480000">
-            <a:off x="5009628" y="1771367"/>
-            <a:ext cx="203682" cy="316839"/>
-          </a:xfrm>
-          <a:prstGeom prst="ellipse">
-            <a:avLst/>
-          </a:prstGeom>
-          <a:solidFill>
-            <a:srgbClr val="B8618C"/>
-          </a:solidFill>
-          <a:ln>
-            <a:noFill/>
-          </a:ln>
-        </p:spPr>
-        <p:txBody>
-          <a:bodyPr rtlCol="0" anchor="ctr"/>
-          <a:lstStyle/>
-          <a:p>
-            <a:pPr algn="ctr"/>
-          </a:p>
-        </p:txBody>
-      </p:sp>
-      <p:sp>
-        <p:nvSpPr>
-          <p:cNvPr id="15" name="장식"/>
-          <p:cNvSpPr/>
-          <p:nvPr/>
-        </p:nvSpPr>
-        <p:spPr>
-          <a:xfrm>
-            <a:off x="5198135" y="1982647"/>
-            <a:ext cx="135788" cy="135788"/>
-          </a:xfrm>
-          <a:prstGeom prst="ellipse">
-            <a:avLst/>
-          </a:prstGeom>
-          <a:solidFill>
-            <a:srgbClr val="3F8D3F"/>
-          </a:solidFill>
-          <a:ln>
-            <a:noFill/>
-          </a:ln>
-        </p:spPr>
-        <p:txBody>
-          <a:bodyPr rtlCol="0" anchor="ctr"/>
-          <a:lstStyle/>
-          <a:p>
-            <a:pPr algn="ctr"/>
-          </a:p>
-        </p:txBody>
-      </p:sp>
-      <p:sp>
-        <p:nvSpPr>
-          <p:cNvPr id="16" name="장식"/>
-          <p:cNvSpPr/>
-          <p:nvPr/>
-        </p:nvSpPr>
-        <p:spPr>
-          <a:xfrm rot="2400000">
-            <a:off x="6946022" y="1866696"/>
-            <a:ext cx="171093" cy="266145"/>
-          </a:xfrm>
-          <a:prstGeom prst="ellipse">
-            <a:avLst/>
-          </a:prstGeom>
-          <a:solidFill>
-            <a:srgbClr val="B8618C"/>
-          </a:solidFill>
-          <a:ln>
-            <a:noFill/>
-          </a:ln>
-        </p:spPr>
-        <p:txBody>
-          <a:bodyPr rtlCol="0" anchor="ctr"/>
-          <a:lstStyle/>
-          <a:p>
-            <a:pPr algn="ctr"/>
-          </a:p>
-        </p:txBody>
-      </p:sp>
-      <p:sp>
-        <p:nvSpPr>
-          <p:cNvPr id="17" name="장식"/>
-          <p:cNvSpPr/>
-          <p:nvPr/>
-        </p:nvSpPr>
-        <p:spPr>
-          <a:xfrm rot="6720000">
-            <a:off x="6992878" y="2054626"/>
-            <a:ext cx="171093" cy="266145"/>
-          </a:xfrm>
-          <a:prstGeom prst="ellipse">
-            <a:avLst/>
-          </a:prstGeom>
-          <a:solidFill>
-            <a:srgbClr val="EED3E0"/>
-          </a:solidFill>
-          <a:ln>
-            <a:noFill/>
-          </a:ln>
-        </p:spPr>
-        <p:txBody>
-          <a:bodyPr rtlCol="0" anchor="ctr"/>
-          <a:lstStyle/>
-          <a:p>
-            <a:pPr algn="ctr"/>
-          </a:p>
-        </p:txBody>
-      </p:sp>
-      <p:sp>
-        <p:nvSpPr>
-          <p:cNvPr id="18" name="장식"/>
-          <p:cNvSpPr/>
-          <p:nvPr/>
-        </p:nvSpPr>
-        <p:spPr>
-          <a:xfrm rot="11040000">
-            <a:off x="6828626" y="2157262"/>
-            <a:ext cx="171093" cy="266145"/>
-          </a:xfrm>
-          <a:prstGeom prst="ellipse">
-            <a:avLst/>
-          </a:prstGeom>
-          <a:solidFill>
-            <a:srgbClr val="B8618C"/>
-          </a:solidFill>
-          <a:ln>
-            <a:noFill/>
-          </a:ln>
-        </p:spPr>
-        <p:txBody>
-          <a:bodyPr rtlCol="0" anchor="ctr"/>
-          <a:lstStyle/>
-          <a:p>
-            <a:pPr algn="ctr"/>
-          </a:p>
-        </p:txBody>
-      </p:sp>
-      <p:sp>
-        <p:nvSpPr>
-          <p:cNvPr id="19" name="장식"/>
-          <p:cNvSpPr/>
-          <p:nvPr/>
-        </p:nvSpPr>
-        <p:spPr>
-          <a:xfrm rot="15360000">
-            <a:off x="6680256" y="2032765"/>
-            <a:ext cx="171093" cy="266145"/>
-          </a:xfrm>
-          <a:prstGeom prst="ellipse">
-            <a:avLst/>
-          </a:prstGeom>
-          <a:solidFill>
-            <a:srgbClr val="EED3E0"/>
-          </a:solidFill>
-          <a:ln>
-            <a:noFill/>
-          </a:ln>
-        </p:spPr>
-        <p:txBody>
-          <a:bodyPr rtlCol="0" anchor="ctr"/>
-          <a:lstStyle/>
-          <a:p>
-            <a:pPr algn="ctr"/>
-          </a:p>
-        </p:txBody>
-      </p:sp>
-      <p:sp>
-        <p:nvSpPr>
-          <p:cNvPr id="20" name="장식"/>
-          <p:cNvSpPr/>
-          <p:nvPr/>
-        </p:nvSpPr>
-        <p:spPr>
-          <a:xfrm rot="19680000">
-            <a:off x="6752811" y="1853185"/>
-            <a:ext cx="171093" cy="266145"/>
-          </a:xfrm>
-          <a:prstGeom prst="ellipse">
-            <a:avLst/>
-          </a:prstGeom>
-          <a:solidFill>
-            <a:srgbClr val="B8618C"/>
-          </a:solidFill>
-          <a:ln>
-            <a:noFill/>
-          </a:ln>
-        </p:spPr>
-        <p:txBody>
-          <a:bodyPr rtlCol="0" anchor="ctr"/>
-          <a:lstStyle/>
-          <a:p>
-            <a:pPr algn="ctr"/>
-          </a:p>
-        </p:txBody>
-      </p:sp>
-      <p:sp>
-        <p:nvSpPr>
-          <p:cNvPr id="21" name="장식"/>
-          <p:cNvSpPr/>
-          <p:nvPr/>
-        </p:nvSpPr>
-        <p:spPr>
-          <a:xfrm>
-            <a:off x="6868634" y="2068948"/>
-            <a:ext cx="114062" cy="114062"/>
-          </a:xfrm>
-          <a:prstGeom prst="ellipse">
-            <a:avLst/>
-          </a:prstGeom>
-          <a:solidFill>
-            <a:srgbClr val="3F8D3F"/>
-          </a:solidFill>
-          <a:ln>
-            <a:noFill/>
-          </a:ln>
-        </p:spPr>
-        <p:txBody>
-          <a:bodyPr rtlCol="0" anchor="ctr"/>
-          <a:lstStyle/>
-          <a:p>
-            <a:pPr algn="ctr"/>
-          </a:p>
-        </p:txBody>
-      </p:sp>
+        </p:spPr>
+      </p:pic>
       <p:sp>
         <p:nvSpPr>
           <p:cNvPr id="2" name="Title 1"/>
@@ -3866,8 +3329,8 @@
         </p:nvSpPr>
         <p:spPr>
           <a:xfrm>
-            <a:off x="1463003" y="2263140"/>
-            <a:ext cx="9265688" cy="1371600"/>
+            <a:off x="853418" y="2057400"/>
+            <a:ext cx="6095847" cy="1554480"/>
           </a:xfrm>
         </p:spPr>
         <p:txBody>
@@ -3876,7 +3339,7 @@
           </a:bodyPr>
           <a:lstStyle/>
           <a:p>
-            <a:pPr algn="ctr">
+            <a:pPr algn="l">
               <a:lnSpc>
                 <a:spcPct val="105000"/>
               </a:lnSpc>
@@ -3894,14 +3357,14 @@
       </p:sp>
       <p:sp>
         <p:nvSpPr>
-          <p:cNvPr id="22" name="한 줄 문구"/>
+          <p:cNvPr id="4" name="한 줄 문구"/>
           <p:cNvSpPr txBox="1"/>
           <p:nvPr/>
         </p:nvSpPr>
         <p:spPr>
           <a:xfrm>
-            <a:off x="1463003" y="3726180"/>
-            <a:ext cx="9265688" cy="822960"/>
+            <a:off x="853418" y="3749039"/>
+            <a:ext cx="6095847" cy="822960"/>
           </a:xfrm>
           <a:prstGeom prst="rect">
             <a:avLst/>
@@ -3914,7 +3377,7 @@
           </a:bodyPr>
           <a:lstStyle/>
           <a:p>
-            <a:pPr algn="ctr">
+            <a:pPr algn="l">
               <a:lnSpc>
                 <a:spcPct val="115000"/>
               </a:lnSpc>
@@ -3925,21 +3388,21 @@
                   <a:srgbClr val="7B3759"/>
                 </a:solidFill>
               </a:rPr>
-              <a:t>연못 위에 핀 연꽃 같은 우리 가족</a:t>
-            </a:r>
-          </a:p>
-        </p:txBody>
-      </p:sp>
-      <p:sp>
-        <p:nvSpPr>
-          <p:cNvPr id="23" name="안내 문구"/>
+              <a:t>연꽃 연못 앞에서 멈춰 선 모습</a:t>
+            </a:r>
+          </a:p>
+        </p:txBody>
+      </p:sp>
+      <p:sp>
+        <p:nvSpPr>
+          <p:cNvPr id="5" name="안내 문구"/>
           <p:cNvSpPr txBox="1"/>
           <p:nvPr/>
         </p:nvSpPr>
         <p:spPr>
           <a:xfrm>
-            <a:off x="1463003" y="4594860"/>
-            <a:ext cx="9265688" cy="914400"/>
+            <a:off x="853418" y="4617720"/>
+            <a:ext cx="6095847" cy="914400"/>
           </a:xfrm>
           <a:prstGeom prst="rect">
             <a:avLst/>
@@ -3952,7 +3415,7 @@
           </a:bodyPr>
           <a:lstStyle/>
           <a:p>
-            <a:pPr algn="ctr">
+            <a:pPr algn="l">
               <a:lnSpc>
                 <a:spcPct val="115000"/>
               </a:lnSpc>
@@ -3963,7 +3426,7 @@
                   <a:srgbClr val="666666"/>
                 </a:solidFill>
               </a:rPr>
-              <a:t>반려동물과 함께 · 2026. 00. 00</a:t>
+              <a:t>반려동물과 함께 · 2027. 00. 00</a:t>
             </a:r>
           </a:p>
         </p:txBody>
@@ -4027,528 +3490,6 @@
       </p:sp>
       <p:sp>
         <p:nvSpPr>
-          <p:cNvPr id="4" name="장식"/>
-          <p:cNvSpPr/>
-          <p:nvPr/>
-        </p:nvSpPr>
-        <p:spPr>
-          <a:xfrm>
-            <a:off x="10879531" y="530352"/>
-            <a:ext cx="246888" cy="384048"/>
-          </a:xfrm>
-          <a:prstGeom prst="ellipse">
-            <a:avLst/>
-          </a:prstGeom>
-          <a:solidFill>
-            <a:srgbClr val="B8618C"/>
-          </a:solidFill>
-          <a:ln>
-            <a:noFill/>
-          </a:ln>
-        </p:spPr>
-        <p:txBody>
-          <a:bodyPr rtlCol="0" anchor="ctr"/>
-          <a:lstStyle/>
-          <a:p>
-            <a:pPr algn="ctr"/>
-          </a:p>
-        </p:txBody>
-      </p:sp>
-      <p:sp>
-        <p:nvSpPr>
-          <p:cNvPr id="5" name="장식"/>
-          <p:cNvSpPr/>
-          <p:nvPr/>
-        </p:nvSpPr>
-        <p:spPr>
-          <a:xfrm rot="4320000">
-            <a:off x="11105639" y="694629"/>
-            <a:ext cx="246888" cy="384048"/>
-          </a:xfrm>
-          <a:prstGeom prst="ellipse">
-            <a:avLst/>
-          </a:prstGeom>
-          <a:solidFill>
-            <a:srgbClr val="EED3E0"/>
-          </a:solidFill>
-          <a:ln>
-            <a:noFill/>
-          </a:ln>
-        </p:spPr>
-        <p:txBody>
-          <a:bodyPr rtlCol="0" anchor="ctr"/>
-          <a:lstStyle/>
-          <a:p>
-            <a:pPr algn="ctr"/>
-          </a:p>
-        </p:txBody>
-      </p:sp>
-      <p:sp>
-        <p:nvSpPr>
-          <p:cNvPr id="6" name="장식"/>
-          <p:cNvSpPr/>
-          <p:nvPr/>
-        </p:nvSpPr>
-        <p:spPr>
-          <a:xfrm rot="8640000">
-            <a:off x="11019273" y="960434"/>
-            <a:ext cx="246888" cy="384048"/>
-          </a:xfrm>
-          <a:prstGeom prst="ellipse">
-            <a:avLst/>
-          </a:prstGeom>
-          <a:solidFill>
-            <a:srgbClr val="B8618C"/>
-          </a:solidFill>
-          <a:ln>
-            <a:noFill/>
-          </a:ln>
-        </p:spPr>
-        <p:txBody>
-          <a:bodyPr rtlCol="0" anchor="ctr"/>
-          <a:lstStyle/>
-          <a:p>
-            <a:pPr algn="ctr"/>
-          </a:p>
-        </p:txBody>
-      </p:sp>
-      <p:sp>
-        <p:nvSpPr>
-          <p:cNvPr id="7" name="장식"/>
-          <p:cNvSpPr/>
-          <p:nvPr/>
-        </p:nvSpPr>
-        <p:spPr>
-          <a:xfrm rot="12960000">
-            <a:off x="10739788" y="960434"/>
-            <a:ext cx="246888" cy="384048"/>
-          </a:xfrm>
-          <a:prstGeom prst="ellipse">
-            <a:avLst/>
-          </a:prstGeom>
-          <a:solidFill>
-            <a:srgbClr val="EED3E0"/>
-          </a:solidFill>
-          <a:ln>
-            <a:noFill/>
-          </a:ln>
-        </p:spPr>
-        <p:txBody>
-          <a:bodyPr rtlCol="0" anchor="ctr"/>
-          <a:lstStyle/>
-          <a:p>
-            <a:pPr algn="ctr"/>
-          </a:p>
-        </p:txBody>
-      </p:sp>
-      <p:sp>
-        <p:nvSpPr>
-          <p:cNvPr id="8" name="장식"/>
-          <p:cNvSpPr/>
-          <p:nvPr/>
-        </p:nvSpPr>
-        <p:spPr>
-          <a:xfrm rot="17280000">
-            <a:off x="10653423" y="694629"/>
-            <a:ext cx="246888" cy="384048"/>
-          </a:xfrm>
-          <a:prstGeom prst="ellipse">
-            <a:avLst/>
-          </a:prstGeom>
-          <a:solidFill>
-            <a:srgbClr val="B8618C"/>
-          </a:solidFill>
-          <a:ln>
-            <a:noFill/>
-          </a:ln>
-        </p:spPr>
-        <p:txBody>
-          <a:bodyPr rtlCol="0" anchor="ctr"/>
-          <a:lstStyle/>
-          <a:p>
-            <a:pPr algn="ctr"/>
-          </a:p>
-        </p:txBody>
-      </p:sp>
-      <p:sp>
-        <p:nvSpPr>
-          <p:cNvPr id="9" name="장식"/>
-          <p:cNvSpPr/>
-          <p:nvPr/>
-        </p:nvSpPr>
-        <p:spPr>
-          <a:xfrm>
-            <a:off x="10920679" y="877824"/>
-            <a:ext cx="164592" cy="164592"/>
-          </a:xfrm>
-          <a:prstGeom prst="ellipse">
-            <a:avLst/>
-          </a:prstGeom>
-          <a:solidFill>
-            <a:srgbClr val="3F8D3F"/>
-          </a:solidFill>
-          <a:ln>
-            <a:noFill/>
-          </a:ln>
-        </p:spPr>
-        <p:txBody>
-          <a:bodyPr rtlCol="0" anchor="ctr"/>
-          <a:lstStyle/>
-          <a:p>
-            <a:pPr algn="ctr"/>
-          </a:p>
-        </p:txBody>
-      </p:sp>
-      <p:sp>
-        <p:nvSpPr>
-          <p:cNvPr id="10" name="장식"/>
-          <p:cNvSpPr/>
-          <p:nvPr/>
-        </p:nvSpPr>
-        <p:spPr>
-          <a:xfrm rot="1200000">
-            <a:off x="10478989" y="1163884"/>
-            <a:ext cx="123444" cy="192024"/>
-          </a:xfrm>
-          <a:prstGeom prst="ellipse">
-            <a:avLst/>
-          </a:prstGeom>
-          <a:solidFill>
-            <a:srgbClr val="B8618C"/>
-          </a:solidFill>
-          <a:ln>
-            <a:noFill/>
-          </a:ln>
-        </p:spPr>
-        <p:txBody>
-          <a:bodyPr rtlCol="0" anchor="ctr"/>
-          <a:lstStyle/>
-          <a:p>
-            <a:pPr algn="ctr"/>
-          </a:p>
-        </p:txBody>
-      </p:sp>
-      <p:sp>
-        <p:nvSpPr>
-          <p:cNvPr id="11" name="장식"/>
-          <p:cNvSpPr/>
-          <p:nvPr/>
-        </p:nvSpPr>
-        <p:spPr>
-          <a:xfrm rot="5520000">
-            <a:off x="10557132" y="1279736"/>
-            <a:ext cx="123444" cy="192024"/>
-          </a:xfrm>
-          <a:prstGeom prst="ellipse">
-            <a:avLst/>
-          </a:prstGeom>
-          <a:solidFill>
-            <a:srgbClr val="EED3E0"/>
-          </a:solidFill>
-          <a:ln>
-            <a:noFill/>
-          </a:ln>
-        </p:spPr>
-        <p:txBody>
-          <a:bodyPr rtlCol="0" anchor="ctr"/>
-          <a:lstStyle/>
-          <a:p>
-            <a:pPr algn="ctr"/>
-          </a:p>
-        </p:txBody>
-      </p:sp>
-      <p:sp>
-        <p:nvSpPr>
-          <p:cNvPr id="12" name="장식"/>
-          <p:cNvSpPr/>
-          <p:nvPr/>
-        </p:nvSpPr>
-        <p:spPr>
-          <a:xfrm rot="9840000">
-            <a:off x="10471098" y="1389855"/>
-            <a:ext cx="123444" cy="192024"/>
-          </a:xfrm>
-          <a:prstGeom prst="ellipse">
-            <a:avLst/>
-          </a:prstGeom>
-          <a:solidFill>
-            <a:srgbClr val="B8618C"/>
-          </a:solidFill>
-          <a:ln>
-            <a:noFill/>
-          </a:ln>
-        </p:spPr>
-        <p:txBody>
-          <a:bodyPr rtlCol="0" anchor="ctr"/>
-          <a:lstStyle/>
-          <a:p>
-            <a:pPr algn="ctr"/>
-          </a:p>
-        </p:txBody>
-      </p:sp>
-      <p:sp>
-        <p:nvSpPr>
-          <p:cNvPr id="13" name="장식"/>
-          <p:cNvSpPr/>
-          <p:nvPr/>
-        </p:nvSpPr>
-        <p:spPr>
-          <a:xfrm rot="14160000">
-            <a:off x="10339783" y="1342060"/>
-            <a:ext cx="123444" cy="192024"/>
-          </a:xfrm>
-          <a:prstGeom prst="ellipse">
-            <a:avLst/>
-          </a:prstGeom>
-          <a:solidFill>
-            <a:srgbClr val="EED3E0"/>
-          </a:solidFill>
-          <a:ln>
-            <a:noFill/>
-          </a:ln>
-        </p:spPr>
-        <p:txBody>
-          <a:bodyPr rtlCol="0" anchor="ctr"/>
-          <a:lstStyle/>
-          <a:p>
-            <a:pPr algn="ctr"/>
-          </a:p>
-        </p:txBody>
-      </p:sp>
-      <p:sp>
-        <p:nvSpPr>
-          <p:cNvPr id="14" name="장식"/>
-          <p:cNvSpPr/>
-          <p:nvPr/>
-        </p:nvSpPr>
-        <p:spPr>
-          <a:xfrm rot="18480000">
-            <a:off x="10344660" y="1202403"/>
-            <a:ext cx="123444" cy="192024"/>
-          </a:xfrm>
-          <a:prstGeom prst="ellipse">
-            <a:avLst/>
-          </a:prstGeom>
-          <a:solidFill>
-            <a:srgbClr val="B8618C"/>
-          </a:solidFill>
-          <a:ln>
-            <a:noFill/>
-          </a:ln>
-        </p:spPr>
-        <p:txBody>
-          <a:bodyPr rtlCol="0" anchor="ctr"/>
-          <a:lstStyle/>
-          <a:p>
-            <a:pPr algn="ctr"/>
-          </a:p>
-        </p:txBody>
-      </p:sp>
-      <p:sp>
-        <p:nvSpPr>
-          <p:cNvPr id="15" name="장식"/>
-          <p:cNvSpPr/>
-          <p:nvPr/>
-        </p:nvSpPr>
-        <p:spPr>
-          <a:xfrm>
-            <a:off x="10458907" y="1330452"/>
-            <a:ext cx="82296" cy="82296"/>
-          </a:xfrm>
-          <a:prstGeom prst="ellipse">
-            <a:avLst/>
-          </a:prstGeom>
-          <a:solidFill>
-            <a:srgbClr val="3F8D3F"/>
-          </a:solidFill>
-          <a:ln>
-            <a:noFill/>
-          </a:ln>
-        </p:spPr>
-        <p:txBody>
-          <a:bodyPr rtlCol="0" anchor="ctr"/>
-          <a:lstStyle/>
-          <a:p>
-            <a:pPr algn="ctr"/>
-          </a:p>
-        </p:txBody>
-      </p:sp>
-      <p:sp>
-        <p:nvSpPr>
-          <p:cNvPr id="16" name="장식"/>
-          <p:cNvSpPr/>
-          <p:nvPr/>
-        </p:nvSpPr>
-        <p:spPr>
-          <a:xfrm rot="2400000">
-            <a:off x="11518232" y="1260178"/>
-            <a:ext cx="103692" cy="161300"/>
-          </a:xfrm>
-          <a:prstGeom prst="ellipse">
-            <a:avLst/>
-          </a:prstGeom>
-          <a:solidFill>
-            <a:srgbClr val="B8618C"/>
-          </a:solidFill>
-          <a:ln>
-            <a:noFill/>
-          </a:ln>
-        </p:spPr>
-        <p:txBody>
-          <a:bodyPr rtlCol="0" anchor="ctr"/>
-          <a:lstStyle/>
-          <a:p>
-            <a:pPr algn="ctr"/>
-          </a:p>
-        </p:txBody>
-      </p:sp>
-      <p:sp>
-        <p:nvSpPr>
-          <p:cNvPr id="17" name="장식"/>
-          <p:cNvSpPr/>
-          <p:nvPr/>
-        </p:nvSpPr>
-        <p:spPr>
-          <a:xfrm rot="6720000">
-            <a:off x="11546630" y="1374075"/>
-            <a:ext cx="103692" cy="161300"/>
-          </a:xfrm>
-          <a:prstGeom prst="ellipse">
-            <a:avLst/>
-          </a:prstGeom>
-          <a:solidFill>
-            <a:srgbClr val="EED3E0"/>
-          </a:solidFill>
-          <a:ln>
-            <a:noFill/>
-          </a:ln>
-        </p:spPr>
-        <p:txBody>
-          <a:bodyPr rtlCol="0" anchor="ctr"/>
-          <a:lstStyle/>
-          <a:p>
-            <a:pPr algn="ctr"/>
-          </a:p>
-        </p:txBody>
-      </p:sp>
-      <p:sp>
-        <p:nvSpPr>
-          <p:cNvPr id="18" name="장식"/>
-          <p:cNvSpPr/>
-          <p:nvPr/>
-        </p:nvSpPr>
-        <p:spPr>
-          <a:xfrm rot="11040000">
-            <a:off x="11447083" y="1436279"/>
-            <a:ext cx="103692" cy="161300"/>
-          </a:xfrm>
-          <a:prstGeom prst="ellipse">
-            <a:avLst/>
-          </a:prstGeom>
-          <a:solidFill>
-            <a:srgbClr val="B8618C"/>
-          </a:solidFill>
-          <a:ln>
-            <a:noFill/>
-          </a:ln>
-        </p:spPr>
-        <p:txBody>
-          <a:bodyPr rtlCol="0" anchor="ctr"/>
-          <a:lstStyle/>
-          <a:p>
-            <a:pPr algn="ctr"/>
-          </a:p>
-        </p:txBody>
-      </p:sp>
-      <p:sp>
-        <p:nvSpPr>
-          <p:cNvPr id="19" name="장식"/>
-          <p:cNvSpPr/>
-          <p:nvPr/>
-        </p:nvSpPr>
-        <p:spPr>
-          <a:xfrm rot="15360000">
-            <a:off x="11357162" y="1360826"/>
-            <a:ext cx="103692" cy="161300"/>
-          </a:xfrm>
-          <a:prstGeom prst="ellipse">
-            <a:avLst/>
-          </a:prstGeom>
-          <a:solidFill>
-            <a:srgbClr val="EED3E0"/>
-          </a:solidFill>
-          <a:ln>
-            <a:noFill/>
-          </a:ln>
-        </p:spPr>
-        <p:txBody>
-          <a:bodyPr rtlCol="0" anchor="ctr"/>
-          <a:lstStyle/>
-          <a:p>
-            <a:pPr algn="ctr"/>
-          </a:p>
-        </p:txBody>
-      </p:sp>
-      <p:sp>
-        <p:nvSpPr>
-          <p:cNvPr id="20" name="장식"/>
-          <p:cNvSpPr/>
-          <p:nvPr/>
-        </p:nvSpPr>
-        <p:spPr>
-          <a:xfrm rot="19680000">
-            <a:off x="11401134" y="1251990"/>
-            <a:ext cx="103692" cy="161300"/>
-          </a:xfrm>
-          <a:prstGeom prst="ellipse">
-            <a:avLst/>
-          </a:prstGeom>
-          <a:solidFill>
-            <a:srgbClr val="B8618C"/>
-          </a:solidFill>
-          <a:ln>
-            <a:noFill/>
-          </a:ln>
-        </p:spPr>
-        <p:txBody>
-          <a:bodyPr rtlCol="0" anchor="ctr"/>
-          <a:lstStyle/>
-          <a:p>
-            <a:pPr algn="ctr"/>
-          </a:p>
-        </p:txBody>
-      </p:sp>
-      <p:sp>
-        <p:nvSpPr>
-          <p:cNvPr id="21" name="장식"/>
-          <p:cNvSpPr/>
-          <p:nvPr/>
-        </p:nvSpPr>
-        <p:spPr>
-          <a:xfrm>
-            <a:off x="11471330" y="1382755"/>
-            <a:ext cx="69128" cy="69128"/>
-          </a:xfrm>
-          <a:prstGeom prst="ellipse">
-            <a:avLst/>
-          </a:prstGeom>
-          <a:solidFill>
-            <a:srgbClr val="3F8D3F"/>
-          </a:solidFill>
-          <a:ln>
-            <a:noFill/>
-          </a:ln>
-        </p:spPr>
-        <p:txBody>
-          <a:bodyPr rtlCol="0" anchor="ctr"/>
-          <a:lstStyle/>
-          <a:p>
-            <a:pPr algn="ctr"/>
-          </a:p>
-        </p:txBody>
-      </p:sp>
-      <p:sp>
-        <p:nvSpPr>
           <p:cNvPr id="2" name="Title 1"/>
           <p:cNvSpPr>
             <a:spLocks noGrp="1"/>
@@ -4587,7 +3528,7 @@
       </p:sp>
       <p:sp>
         <p:nvSpPr>
-          <p:cNvPr id="22" name="사진 자리"/>
+          <p:cNvPr id="4" name="사진 자리"/>
           <p:cNvSpPr/>
           <p:nvPr/>
         </p:nvSpPr>
@@ -4633,7 +3574,7 @@
       </p:sp>
       <p:sp>
         <p:nvSpPr>
-          <p:cNvPr id="23" name="TextBox 22"/>
+          <p:cNvPr id="5" name="TextBox 4"/>
           <p:cNvSpPr txBox="1"/>
           <p:nvPr/>
         </p:nvSpPr>
@@ -4671,7 +3612,7 @@
       </p:sp>
       <p:sp>
         <p:nvSpPr>
-          <p:cNvPr id="24" name="TextBox 23"/>
+          <p:cNvPr id="6" name="TextBox 5"/>
           <p:cNvSpPr txBox="1"/>
           <p:nvPr/>
         </p:nvSpPr>
@@ -4739,7 +3680,7 @@
       </p:sp>
       <p:sp>
         <p:nvSpPr>
-          <p:cNvPr id="25" name="사진 자리"/>
+          <p:cNvPr id="7" name="사진 자리"/>
           <p:cNvSpPr/>
           <p:nvPr/>
         </p:nvSpPr>
@@ -4785,7 +3726,7 @@
       </p:sp>
       <p:sp>
         <p:nvSpPr>
-          <p:cNvPr id="26" name="TextBox 25"/>
+          <p:cNvPr id="8" name="TextBox 7"/>
           <p:cNvSpPr txBox="1"/>
           <p:nvPr/>
         </p:nvSpPr>
@@ -4823,7 +3764,7 @@
       </p:sp>
       <p:sp>
         <p:nvSpPr>
-          <p:cNvPr id="27" name="TextBox 26"/>
+          <p:cNvPr id="9" name="TextBox 8"/>
           <p:cNvSpPr txBox="1"/>
           <p:nvPr/>
         </p:nvSpPr>
@@ -4891,7 +3832,7 @@
       </p:sp>
       <p:sp>
         <p:nvSpPr>
-          <p:cNvPr id="28" name="사진 자리"/>
+          <p:cNvPr id="10" name="사진 자리"/>
           <p:cNvSpPr/>
           <p:nvPr/>
         </p:nvSpPr>
@@ -4937,7 +3878,7 @@
       </p:sp>
       <p:sp>
         <p:nvSpPr>
-          <p:cNvPr id="29" name="TextBox 28"/>
+          <p:cNvPr id="11" name="TextBox 10"/>
           <p:cNvSpPr txBox="1"/>
           <p:nvPr/>
         </p:nvSpPr>
@@ -4975,7 +3916,7 @@
       </p:sp>
       <p:sp>
         <p:nvSpPr>
-          <p:cNvPr id="30" name="TextBox 29"/>
+          <p:cNvPr id="12" name="TextBox 11"/>
           <p:cNvSpPr txBox="1"/>
           <p:nvPr/>
         </p:nvSpPr>
@@ -5100,528 +4041,6 @@
       </p:sp>
       <p:sp>
         <p:nvSpPr>
-          <p:cNvPr id="4" name="장식"/>
-          <p:cNvSpPr/>
-          <p:nvPr/>
-        </p:nvSpPr>
-        <p:spPr>
-          <a:xfrm>
-            <a:off x="10879531" y="530352"/>
-            <a:ext cx="246888" cy="384048"/>
-          </a:xfrm>
-          <a:prstGeom prst="ellipse">
-            <a:avLst/>
-          </a:prstGeom>
-          <a:solidFill>
-            <a:srgbClr val="B8618C"/>
-          </a:solidFill>
-          <a:ln>
-            <a:noFill/>
-          </a:ln>
-        </p:spPr>
-        <p:txBody>
-          <a:bodyPr rtlCol="0" anchor="ctr"/>
-          <a:lstStyle/>
-          <a:p>
-            <a:pPr algn="ctr"/>
-          </a:p>
-        </p:txBody>
-      </p:sp>
-      <p:sp>
-        <p:nvSpPr>
-          <p:cNvPr id="5" name="장식"/>
-          <p:cNvSpPr/>
-          <p:nvPr/>
-        </p:nvSpPr>
-        <p:spPr>
-          <a:xfrm rot="4320000">
-            <a:off x="11105639" y="694629"/>
-            <a:ext cx="246888" cy="384048"/>
-          </a:xfrm>
-          <a:prstGeom prst="ellipse">
-            <a:avLst/>
-          </a:prstGeom>
-          <a:solidFill>
-            <a:srgbClr val="EED3E0"/>
-          </a:solidFill>
-          <a:ln>
-            <a:noFill/>
-          </a:ln>
-        </p:spPr>
-        <p:txBody>
-          <a:bodyPr rtlCol="0" anchor="ctr"/>
-          <a:lstStyle/>
-          <a:p>
-            <a:pPr algn="ctr"/>
-          </a:p>
-        </p:txBody>
-      </p:sp>
-      <p:sp>
-        <p:nvSpPr>
-          <p:cNvPr id="6" name="장식"/>
-          <p:cNvSpPr/>
-          <p:nvPr/>
-        </p:nvSpPr>
-        <p:spPr>
-          <a:xfrm rot="8640000">
-            <a:off x="11019273" y="960434"/>
-            <a:ext cx="246888" cy="384048"/>
-          </a:xfrm>
-          <a:prstGeom prst="ellipse">
-            <a:avLst/>
-          </a:prstGeom>
-          <a:solidFill>
-            <a:srgbClr val="B8618C"/>
-          </a:solidFill>
-          <a:ln>
-            <a:noFill/>
-          </a:ln>
-        </p:spPr>
-        <p:txBody>
-          <a:bodyPr rtlCol="0" anchor="ctr"/>
-          <a:lstStyle/>
-          <a:p>
-            <a:pPr algn="ctr"/>
-          </a:p>
-        </p:txBody>
-      </p:sp>
-      <p:sp>
-        <p:nvSpPr>
-          <p:cNvPr id="7" name="장식"/>
-          <p:cNvSpPr/>
-          <p:nvPr/>
-        </p:nvSpPr>
-        <p:spPr>
-          <a:xfrm rot="12960000">
-            <a:off x="10739788" y="960434"/>
-            <a:ext cx="246888" cy="384048"/>
-          </a:xfrm>
-          <a:prstGeom prst="ellipse">
-            <a:avLst/>
-          </a:prstGeom>
-          <a:solidFill>
-            <a:srgbClr val="EED3E0"/>
-          </a:solidFill>
-          <a:ln>
-            <a:noFill/>
-          </a:ln>
-        </p:spPr>
-        <p:txBody>
-          <a:bodyPr rtlCol="0" anchor="ctr"/>
-          <a:lstStyle/>
-          <a:p>
-            <a:pPr algn="ctr"/>
-          </a:p>
-        </p:txBody>
-      </p:sp>
-      <p:sp>
-        <p:nvSpPr>
-          <p:cNvPr id="8" name="장식"/>
-          <p:cNvSpPr/>
-          <p:nvPr/>
-        </p:nvSpPr>
-        <p:spPr>
-          <a:xfrm rot="17280000">
-            <a:off x="10653423" y="694629"/>
-            <a:ext cx="246888" cy="384048"/>
-          </a:xfrm>
-          <a:prstGeom prst="ellipse">
-            <a:avLst/>
-          </a:prstGeom>
-          <a:solidFill>
-            <a:srgbClr val="B8618C"/>
-          </a:solidFill>
-          <a:ln>
-            <a:noFill/>
-          </a:ln>
-        </p:spPr>
-        <p:txBody>
-          <a:bodyPr rtlCol="0" anchor="ctr"/>
-          <a:lstStyle/>
-          <a:p>
-            <a:pPr algn="ctr"/>
-          </a:p>
-        </p:txBody>
-      </p:sp>
-      <p:sp>
-        <p:nvSpPr>
-          <p:cNvPr id="9" name="장식"/>
-          <p:cNvSpPr/>
-          <p:nvPr/>
-        </p:nvSpPr>
-        <p:spPr>
-          <a:xfrm>
-            <a:off x="10920679" y="877824"/>
-            <a:ext cx="164592" cy="164592"/>
-          </a:xfrm>
-          <a:prstGeom prst="ellipse">
-            <a:avLst/>
-          </a:prstGeom>
-          <a:solidFill>
-            <a:srgbClr val="3F8D3F"/>
-          </a:solidFill>
-          <a:ln>
-            <a:noFill/>
-          </a:ln>
-        </p:spPr>
-        <p:txBody>
-          <a:bodyPr rtlCol="0" anchor="ctr"/>
-          <a:lstStyle/>
-          <a:p>
-            <a:pPr algn="ctr"/>
-          </a:p>
-        </p:txBody>
-      </p:sp>
-      <p:sp>
-        <p:nvSpPr>
-          <p:cNvPr id="10" name="장식"/>
-          <p:cNvSpPr/>
-          <p:nvPr/>
-        </p:nvSpPr>
-        <p:spPr>
-          <a:xfrm rot="1200000">
-            <a:off x="10478989" y="1163884"/>
-            <a:ext cx="123444" cy="192024"/>
-          </a:xfrm>
-          <a:prstGeom prst="ellipse">
-            <a:avLst/>
-          </a:prstGeom>
-          <a:solidFill>
-            <a:srgbClr val="B8618C"/>
-          </a:solidFill>
-          <a:ln>
-            <a:noFill/>
-          </a:ln>
-        </p:spPr>
-        <p:txBody>
-          <a:bodyPr rtlCol="0" anchor="ctr"/>
-          <a:lstStyle/>
-          <a:p>
-            <a:pPr algn="ctr"/>
-          </a:p>
-        </p:txBody>
-      </p:sp>
-      <p:sp>
-        <p:nvSpPr>
-          <p:cNvPr id="11" name="장식"/>
-          <p:cNvSpPr/>
-          <p:nvPr/>
-        </p:nvSpPr>
-        <p:spPr>
-          <a:xfrm rot="5520000">
-            <a:off x="10557132" y="1279736"/>
-            <a:ext cx="123444" cy="192024"/>
-          </a:xfrm>
-          <a:prstGeom prst="ellipse">
-            <a:avLst/>
-          </a:prstGeom>
-          <a:solidFill>
-            <a:srgbClr val="EED3E0"/>
-          </a:solidFill>
-          <a:ln>
-            <a:noFill/>
-          </a:ln>
-        </p:spPr>
-        <p:txBody>
-          <a:bodyPr rtlCol="0" anchor="ctr"/>
-          <a:lstStyle/>
-          <a:p>
-            <a:pPr algn="ctr"/>
-          </a:p>
-        </p:txBody>
-      </p:sp>
-      <p:sp>
-        <p:nvSpPr>
-          <p:cNvPr id="12" name="장식"/>
-          <p:cNvSpPr/>
-          <p:nvPr/>
-        </p:nvSpPr>
-        <p:spPr>
-          <a:xfrm rot="9840000">
-            <a:off x="10471098" y="1389855"/>
-            <a:ext cx="123444" cy="192024"/>
-          </a:xfrm>
-          <a:prstGeom prst="ellipse">
-            <a:avLst/>
-          </a:prstGeom>
-          <a:solidFill>
-            <a:srgbClr val="B8618C"/>
-          </a:solidFill>
-          <a:ln>
-            <a:noFill/>
-          </a:ln>
-        </p:spPr>
-        <p:txBody>
-          <a:bodyPr rtlCol="0" anchor="ctr"/>
-          <a:lstStyle/>
-          <a:p>
-            <a:pPr algn="ctr"/>
-          </a:p>
-        </p:txBody>
-      </p:sp>
-      <p:sp>
-        <p:nvSpPr>
-          <p:cNvPr id="13" name="장식"/>
-          <p:cNvSpPr/>
-          <p:nvPr/>
-        </p:nvSpPr>
-        <p:spPr>
-          <a:xfrm rot="14160000">
-            <a:off x="10339783" y="1342060"/>
-            <a:ext cx="123444" cy="192024"/>
-          </a:xfrm>
-          <a:prstGeom prst="ellipse">
-            <a:avLst/>
-          </a:prstGeom>
-          <a:solidFill>
-            <a:srgbClr val="EED3E0"/>
-          </a:solidFill>
-          <a:ln>
-            <a:noFill/>
-          </a:ln>
-        </p:spPr>
-        <p:txBody>
-          <a:bodyPr rtlCol="0" anchor="ctr"/>
-          <a:lstStyle/>
-          <a:p>
-            <a:pPr algn="ctr"/>
-          </a:p>
-        </p:txBody>
-      </p:sp>
-      <p:sp>
-        <p:nvSpPr>
-          <p:cNvPr id="14" name="장식"/>
-          <p:cNvSpPr/>
-          <p:nvPr/>
-        </p:nvSpPr>
-        <p:spPr>
-          <a:xfrm rot="18480000">
-            <a:off x="10344660" y="1202403"/>
-            <a:ext cx="123444" cy="192024"/>
-          </a:xfrm>
-          <a:prstGeom prst="ellipse">
-            <a:avLst/>
-          </a:prstGeom>
-          <a:solidFill>
-            <a:srgbClr val="B8618C"/>
-          </a:solidFill>
-          <a:ln>
-            <a:noFill/>
-          </a:ln>
-        </p:spPr>
-        <p:txBody>
-          <a:bodyPr rtlCol="0" anchor="ctr"/>
-          <a:lstStyle/>
-          <a:p>
-            <a:pPr algn="ctr"/>
-          </a:p>
-        </p:txBody>
-      </p:sp>
-      <p:sp>
-        <p:nvSpPr>
-          <p:cNvPr id="15" name="장식"/>
-          <p:cNvSpPr/>
-          <p:nvPr/>
-        </p:nvSpPr>
-        <p:spPr>
-          <a:xfrm>
-            <a:off x="10458907" y="1330452"/>
-            <a:ext cx="82296" cy="82296"/>
-          </a:xfrm>
-          <a:prstGeom prst="ellipse">
-            <a:avLst/>
-          </a:prstGeom>
-          <a:solidFill>
-            <a:srgbClr val="3F8D3F"/>
-          </a:solidFill>
-          <a:ln>
-            <a:noFill/>
-          </a:ln>
-        </p:spPr>
-        <p:txBody>
-          <a:bodyPr rtlCol="0" anchor="ctr"/>
-          <a:lstStyle/>
-          <a:p>
-            <a:pPr algn="ctr"/>
-          </a:p>
-        </p:txBody>
-      </p:sp>
-      <p:sp>
-        <p:nvSpPr>
-          <p:cNvPr id="16" name="장식"/>
-          <p:cNvSpPr/>
-          <p:nvPr/>
-        </p:nvSpPr>
-        <p:spPr>
-          <a:xfrm rot="2400000">
-            <a:off x="11518232" y="1260178"/>
-            <a:ext cx="103692" cy="161300"/>
-          </a:xfrm>
-          <a:prstGeom prst="ellipse">
-            <a:avLst/>
-          </a:prstGeom>
-          <a:solidFill>
-            <a:srgbClr val="B8618C"/>
-          </a:solidFill>
-          <a:ln>
-            <a:noFill/>
-          </a:ln>
-        </p:spPr>
-        <p:txBody>
-          <a:bodyPr rtlCol="0" anchor="ctr"/>
-          <a:lstStyle/>
-          <a:p>
-            <a:pPr algn="ctr"/>
-          </a:p>
-        </p:txBody>
-      </p:sp>
-      <p:sp>
-        <p:nvSpPr>
-          <p:cNvPr id="17" name="장식"/>
-          <p:cNvSpPr/>
-          <p:nvPr/>
-        </p:nvSpPr>
-        <p:spPr>
-          <a:xfrm rot="6720000">
-            <a:off x="11546630" y="1374075"/>
-            <a:ext cx="103692" cy="161300"/>
-          </a:xfrm>
-          <a:prstGeom prst="ellipse">
-            <a:avLst/>
-          </a:prstGeom>
-          <a:solidFill>
-            <a:srgbClr val="EED3E0"/>
-          </a:solidFill>
-          <a:ln>
-            <a:noFill/>
-          </a:ln>
-        </p:spPr>
-        <p:txBody>
-          <a:bodyPr rtlCol="0" anchor="ctr"/>
-          <a:lstStyle/>
-          <a:p>
-            <a:pPr algn="ctr"/>
-          </a:p>
-        </p:txBody>
-      </p:sp>
-      <p:sp>
-        <p:nvSpPr>
-          <p:cNvPr id="18" name="장식"/>
-          <p:cNvSpPr/>
-          <p:nvPr/>
-        </p:nvSpPr>
-        <p:spPr>
-          <a:xfrm rot="11040000">
-            <a:off x="11447083" y="1436279"/>
-            <a:ext cx="103692" cy="161300"/>
-          </a:xfrm>
-          <a:prstGeom prst="ellipse">
-            <a:avLst/>
-          </a:prstGeom>
-          <a:solidFill>
-            <a:srgbClr val="B8618C"/>
-          </a:solidFill>
-          <a:ln>
-            <a:noFill/>
-          </a:ln>
-        </p:spPr>
-        <p:txBody>
-          <a:bodyPr rtlCol="0" anchor="ctr"/>
-          <a:lstStyle/>
-          <a:p>
-            <a:pPr algn="ctr"/>
-          </a:p>
-        </p:txBody>
-      </p:sp>
-      <p:sp>
-        <p:nvSpPr>
-          <p:cNvPr id="19" name="장식"/>
-          <p:cNvSpPr/>
-          <p:nvPr/>
-        </p:nvSpPr>
-        <p:spPr>
-          <a:xfrm rot="15360000">
-            <a:off x="11357162" y="1360826"/>
-            <a:ext cx="103692" cy="161300"/>
-          </a:xfrm>
-          <a:prstGeom prst="ellipse">
-            <a:avLst/>
-          </a:prstGeom>
-          <a:solidFill>
-            <a:srgbClr val="EED3E0"/>
-          </a:solidFill>
-          <a:ln>
-            <a:noFill/>
-          </a:ln>
-        </p:spPr>
-        <p:txBody>
-          <a:bodyPr rtlCol="0" anchor="ctr"/>
-          <a:lstStyle/>
-          <a:p>
-            <a:pPr algn="ctr"/>
-          </a:p>
-        </p:txBody>
-      </p:sp>
-      <p:sp>
-        <p:nvSpPr>
-          <p:cNvPr id="20" name="장식"/>
-          <p:cNvSpPr/>
-          <p:nvPr/>
-        </p:nvSpPr>
-        <p:spPr>
-          <a:xfrm rot="19680000">
-            <a:off x="11401134" y="1251990"/>
-            <a:ext cx="103692" cy="161300"/>
-          </a:xfrm>
-          <a:prstGeom prst="ellipse">
-            <a:avLst/>
-          </a:prstGeom>
-          <a:solidFill>
-            <a:srgbClr val="B8618C"/>
-          </a:solidFill>
-          <a:ln>
-            <a:noFill/>
-          </a:ln>
-        </p:spPr>
-        <p:txBody>
-          <a:bodyPr rtlCol="0" anchor="ctr"/>
-          <a:lstStyle/>
-          <a:p>
-            <a:pPr algn="ctr"/>
-          </a:p>
-        </p:txBody>
-      </p:sp>
-      <p:sp>
-        <p:nvSpPr>
-          <p:cNvPr id="21" name="장식"/>
-          <p:cNvSpPr/>
-          <p:nvPr/>
-        </p:nvSpPr>
-        <p:spPr>
-          <a:xfrm>
-            <a:off x="11471330" y="1382755"/>
-            <a:ext cx="69128" cy="69128"/>
-          </a:xfrm>
-          <a:prstGeom prst="ellipse">
-            <a:avLst/>
-          </a:prstGeom>
-          <a:solidFill>
-            <a:srgbClr val="3F8D3F"/>
-          </a:solidFill>
-          <a:ln>
-            <a:noFill/>
-          </a:ln>
-        </p:spPr>
-        <p:txBody>
-          <a:bodyPr rtlCol="0" anchor="ctr"/>
-          <a:lstStyle/>
-          <a:p>
-            <a:pPr algn="ctr"/>
-          </a:p>
-        </p:txBody>
-      </p:sp>
-      <p:sp>
-        <p:nvSpPr>
           <p:cNvPr id="2" name="Title 1"/>
           <p:cNvSpPr>
             <a:spLocks noGrp="1"/>
@@ -5660,7 +4079,7 @@
       </p:sp>
       <p:sp>
         <p:nvSpPr>
-          <p:cNvPr id="22" name="타임라인 선"/>
+          <p:cNvPr id="4" name="타임라인 선"/>
           <p:cNvSpPr/>
           <p:nvPr/>
         </p:nvSpPr>
@@ -5689,7 +4108,7 @@
       </p:sp>
       <p:sp>
         <p:nvSpPr>
-          <p:cNvPr id="23" name="때 1"/>
+          <p:cNvPr id="5" name="때 1"/>
           <p:cNvSpPr/>
           <p:nvPr/>
         </p:nvSpPr>
@@ -5720,7 +4139,7 @@
       </p:sp>
       <p:sp>
         <p:nvSpPr>
-          <p:cNvPr id="24" name="TextBox 23"/>
+          <p:cNvPr id="6" name="TextBox 5"/>
           <p:cNvSpPr txBox="1"/>
           <p:nvPr/>
         </p:nvSpPr>
@@ -5758,7 +4177,7 @@
       </p:sp>
       <p:sp>
         <p:nvSpPr>
-          <p:cNvPr id="25" name="TextBox 24"/>
+          <p:cNvPr id="7" name="TextBox 6"/>
           <p:cNvSpPr txBox="1"/>
           <p:nvPr/>
         </p:nvSpPr>
@@ -5796,7 +4215,7 @@
       </p:sp>
       <p:sp>
         <p:nvSpPr>
-          <p:cNvPr id="26" name="TextBox 25"/>
+          <p:cNvPr id="8" name="TextBox 7"/>
           <p:cNvSpPr txBox="1"/>
           <p:nvPr/>
         </p:nvSpPr>
@@ -5834,7 +4253,7 @@
       </p:sp>
       <p:sp>
         <p:nvSpPr>
-          <p:cNvPr id="27" name="때 2"/>
+          <p:cNvPr id="9" name="때 2"/>
           <p:cNvSpPr/>
           <p:nvPr/>
         </p:nvSpPr>
@@ -5865,7 +4284,7 @@
       </p:sp>
       <p:sp>
         <p:nvSpPr>
-          <p:cNvPr id="28" name="TextBox 27"/>
+          <p:cNvPr id="10" name="TextBox 9"/>
           <p:cNvSpPr txBox="1"/>
           <p:nvPr/>
         </p:nvSpPr>
@@ -5903,7 +4322,7 @@
       </p:sp>
       <p:sp>
         <p:nvSpPr>
-          <p:cNvPr id="29" name="TextBox 28"/>
+          <p:cNvPr id="11" name="TextBox 10"/>
           <p:cNvSpPr txBox="1"/>
           <p:nvPr/>
         </p:nvSpPr>
@@ -5941,7 +4360,7 @@
       </p:sp>
       <p:sp>
         <p:nvSpPr>
-          <p:cNvPr id="30" name="TextBox 29"/>
+          <p:cNvPr id="12" name="TextBox 11"/>
           <p:cNvSpPr txBox="1"/>
           <p:nvPr/>
         </p:nvSpPr>
@@ -5979,7 +4398,7 @@
       </p:sp>
       <p:sp>
         <p:nvSpPr>
-          <p:cNvPr id="31" name="때 3"/>
+          <p:cNvPr id="13" name="때 3"/>
           <p:cNvSpPr/>
           <p:nvPr/>
         </p:nvSpPr>
@@ -6010,7 +4429,7 @@
       </p:sp>
       <p:sp>
         <p:nvSpPr>
-          <p:cNvPr id="32" name="TextBox 31"/>
+          <p:cNvPr id="14" name="TextBox 13"/>
           <p:cNvSpPr txBox="1"/>
           <p:nvPr/>
         </p:nvSpPr>
@@ -6048,7 +4467,7 @@
       </p:sp>
       <p:sp>
         <p:nvSpPr>
-          <p:cNvPr id="33" name="TextBox 32"/>
+          <p:cNvPr id="15" name="TextBox 14"/>
           <p:cNvSpPr txBox="1"/>
           <p:nvPr/>
         </p:nvSpPr>
@@ -6086,7 +4505,7 @@
       </p:sp>
       <p:sp>
         <p:nvSpPr>
-          <p:cNvPr id="34" name="TextBox 33"/>
+          <p:cNvPr id="16" name="TextBox 15"/>
           <p:cNvSpPr txBox="1"/>
           <p:nvPr/>
         </p:nvSpPr>
@@ -6124,7 +4543,7 @@
       </p:sp>
       <p:sp>
         <p:nvSpPr>
-          <p:cNvPr id="35" name="때 4"/>
+          <p:cNvPr id="17" name="때 4"/>
           <p:cNvSpPr/>
           <p:nvPr/>
         </p:nvSpPr>
@@ -6155,7 +4574,7 @@
       </p:sp>
       <p:sp>
         <p:nvSpPr>
-          <p:cNvPr id="36" name="TextBox 35"/>
+          <p:cNvPr id="18" name="TextBox 17"/>
           <p:cNvSpPr txBox="1"/>
           <p:nvPr/>
         </p:nvSpPr>
@@ -6193,7 +4612,7 @@
       </p:sp>
       <p:sp>
         <p:nvSpPr>
-          <p:cNvPr id="37" name="TextBox 36"/>
+          <p:cNvPr id="19" name="TextBox 18"/>
           <p:cNvSpPr txBox="1"/>
           <p:nvPr/>
         </p:nvSpPr>
@@ -6231,7 +4650,7 @@
       </p:sp>
       <p:sp>
         <p:nvSpPr>
-          <p:cNvPr id="38" name="TextBox 37"/>
+          <p:cNvPr id="20" name="TextBox 19"/>
           <p:cNvSpPr txBox="1"/>
           <p:nvPr/>
         </p:nvSpPr>
@@ -6326,528 +4745,6 @@
       </p:sp>
       <p:sp>
         <p:nvSpPr>
-          <p:cNvPr id="4" name="장식"/>
-          <p:cNvSpPr/>
-          <p:nvPr/>
-        </p:nvSpPr>
-        <p:spPr>
-          <a:xfrm>
-            <a:off x="10879531" y="530352"/>
-            <a:ext cx="246888" cy="384048"/>
-          </a:xfrm>
-          <a:prstGeom prst="ellipse">
-            <a:avLst/>
-          </a:prstGeom>
-          <a:solidFill>
-            <a:srgbClr val="B8618C"/>
-          </a:solidFill>
-          <a:ln>
-            <a:noFill/>
-          </a:ln>
-        </p:spPr>
-        <p:txBody>
-          <a:bodyPr rtlCol="0" anchor="ctr"/>
-          <a:lstStyle/>
-          <a:p>
-            <a:pPr algn="ctr"/>
-          </a:p>
-        </p:txBody>
-      </p:sp>
-      <p:sp>
-        <p:nvSpPr>
-          <p:cNvPr id="5" name="장식"/>
-          <p:cNvSpPr/>
-          <p:nvPr/>
-        </p:nvSpPr>
-        <p:spPr>
-          <a:xfrm rot="4320000">
-            <a:off x="11105639" y="694629"/>
-            <a:ext cx="246888" cy="384048"/>
-          </a:xfrm>
-          <a:prstGeom prst="ellipse">
-            <a:avLst/>
-          </a:prstGeom>
-          <a:solidFill>
-            <a:srgbClr val="EED3E0"/>
-          </a:solidFill>
-          <a:ln>
-            <a:noFill/>
-          </a:ln>
-        </p:spPr>
-        <p:txBody>
-          <a:bodyPr rtlCol="0" anchor="ctr"/>
-          <a:lstStyle/>
-          <a:p>
-            <a:pPr algn="ctr"/>
-          </a:p>
-        </p:txBody>
-      </p:sp>
-      <p:sp>
-        <p:nvSpPr>
-          <p:cNvPr id="6" name="장식"/>
-          <p:cNvSpPr/>
-          <p:nvPr/>
-        </p:nvSpPr>
-        <p:spPr>
-          <a:xfrm rot="8640000">
-            <a:off x="11019273" y="960434"/>
-            <a:ext cx="246888" cy="384048"/>
-          </a:xfrm>
-          <a:prstGeom prst="ellipse">
-            <a:avLst/>
-          </a:prstGeom>
-          <a:solidFill>
-            <a:srgbClr val="B8618C"/>
-          </a:solidFill>
-          <a:ln>
-            <a:noFill/>
-          </a:ln>
-        </p:spPr>
-        <p:txBody>
-          <a:bodyPr rtlCol="0" anchor="ctr"/>
-          <a:lstStyle/>
-          <a:p>
-            <a:pPr algn="ctr"/>
-          </a:p>
-        </p:txBody>
-      </p:sp>
-      <p:sp>
-        <p:nvSpPr>
-          <p:cNvPr id="7" name="장식"/>
-          <p:cNvSpPr/>
-          <p:nvPr/>
-        </p:nvSpPr>
-        <p:spPr>
-          <a:xfrm rot="12960000">
-            <a:off x="10739788" y="960434"/>
-            <a:ext cx="246888" cy="384048"/>
-          </a:xfrm>
-          <a:prstGeom prst="ellipse">
-            <a:avLst/>
-          </a:prstGeom>
-          <a:solidFill>
-            <a:srgbClr val="EED3E0"/>
-          </a:solidFill>
-          <a:ln>
-            <a:noFill/>
-          </a:ln>
-        </p:spPr>
-        <p:txBody>
-          <a:bodyPr rtlCol="0" anchor="ctr"/>
-          <a:lstStyle/>
-          <a:p>
-            <a:pPr algn="ctr"/>
-          </a:p>
-        </p:txBody>
-      </p:sp>
-      <p:sp>
-        <p:nvSpPr>
-          <p:cNvPr id="8" name="장식"/>
-          <p:cNvSpPr/>
-          <p:nvPr/>
-        </p:nvSpPr>
-        <p:spPr>
-          <a:xfrm rot="17280000">
-            <a:off x="10653423" y="694629"/>
-            <a:ext cx="246888" cy="384048"/>
-          </a:xfrm>
-          <a:prstGeom prst="ellipse">
-            <a:avLst/>
-          </a:prstGeom>
-          <a:solidFill>
-            <a:srgbClr val="B8618C"/>
-          </a:solidFill>
-          <a:ln>
-            <a:noFill/>
-          </a:ln>
-        </p:spPr>
-        <p:txBody>
-          <a:bodyPr rtlCol="0" anchor="ctr"/>
-          <a:lstStyle/>
-          <a:p>
-            <a:pPr algn="ctr"/>
-          </a:p>
-        </p:txBody>
-      </p:sp>
-      <p:sp>
-        <p:nvSpPr>
-          <p:cNvPr id="9" name="장식"/>
-          <p:cNvSpPr/>
-          <p:nvPr/>
-        </p:nvSpPr>
-        <p:spPr>
-          <a:xfrm>
-            <a:off x="10920679" y="877824"/>
-            <a:ext cx="164592" cy="164592"/>
-          </a:xfrm>
-          <a:prstGeom prst="ellipse">
-            <a:avLst/>
-          </a:prstGeom>
-          <a:solidFill>
-            <a:srgbClr val="3F8D3F"/>
-          </a:solidFill>
-          <a:ln>
-            <a:noFill/>
-          </a:ln>
-        </p:spPr>
-        <p:txBody>
-          <a:bodyPr rtlCol="0" anchor="ctr"/>
-          <a:lstStyle/>
-          <a:p>
-            <a:pPr algn="ctr"/>
-          </a:p>
-        </p:txBody>
-      </p:sp>
-      <p:sp>
-        <p:nvSpPr>
-          <p:cNvPr id="10" name="장식"/>
-          <p:cNvSpPr/>
-          <p:nvPr/>
-        </p:nvSpPr>
-        <p:spPr>
-          <a:xfrm rot="1200000">
-            <a:off x="10478989" y="1163884"/>
-            <a:ext cx="123444" cy="192024"/>
-          </a:xfrm>
-          <a:prstGeom prst="ellipse">
-            <a:avLst/>
-          </a:prstGeom>
-          <a:solidFill>
-            <a:srgbClr val="B8618C"/>
-          </a:solidFill>
-          <a:ln>
-            <a:noFill/>
-          </a:ln>
-        </p:spPr>
-        <p:txBody>
-          <a:bodyPr rtlCol="0" anchor="ctr"/>
-          <a:lstStyle/>
-          <a:p>
-            <a:pPr algn="ctr"/>
-          </a:p>
-        </p:txBody>
-      </p:sp>
-      <p:sp>
-        <p:nvSpPr>
-          <p:cNvPr id="11" name="장식"/>
-          <p:cNvSpPr/>
-          <p:nvPr/>
-        </p:nvSpPr>
-        <p:spPr>
-          <a:xfrm rot="5520000">
-            <a:off x="10557132" y="1279736"/>
-            <a:ext cx="123444" cy="192024"/>
-          </a:xfrm>
-          <a:prstGeom prst="ellipse">
-            <a:avLst/>
-          </a:prstGeom>
-          <a:solidFill>
-            <a:srgbClr val="EED3E0"/>
-          </a:solidFill>
-          <a:ln>
-            <a:noFill/>
-          </a:ln>
-        </p:spPr>
-        <p:txBody>
-          <a:bodyPr rtlCol="0" anchor="ctr"/>
-          <a:lstStyle/>
-          <a:p>
-            <a:pPr algn="ctr"/>
-          </a:p>
-        </p:txBody>
-      </p:sp>
-      <p:sp>
-        <p:nvSpPr>
-          <p:cNvPr id="12" name="장식"/>
-          <p:cNvSpPr/>
-          <p:nvPr/>
-        </p:nvSpPr>
-        <p:spPr>
-          <a:xfrm rot="9840000">
-            <a:off x="10471098" y="1389855"/>
-            <a:ext cx="123444" cy="192024"/>
-          </a:xfrm>
-          <a:prstGeom prst="ellipse">
-            <a:avLst/>
-          </a:prstGeom>
-          <a:solidFill>
-            <a:srgbClr val="B8618C"/>
-          </a:solidFill>
-          <a:ln>
-            <a:noFill/>
-          </a:ln>
-        </p:spPr>
-        <p:txBody>
-          <a:bodyPr rtlCol="0" anchor="ctr"/>
-          <a:lstStyle/>
-          <a:p>
-            <a:pPr algn="ctr"/>
-          </a:p>
-        </p:txBody>
-      </p:sp>
-      <p:sp>
-        <p:nvSpPr>
-          <p:cNvPr id="13" name="장식"/>
-          <p:cNvSpPr/>
-          <p:nvPr/>
-        </p:nvSpPr>
-        <p:spPr>
-          <a:xfrm rot="14160000">
-            <a:off x="10339783" y="1342060"/>
-            <a:ext cx="123444" cy="192024"/>
-          </a:xfrm>
-          <a:prstGeom prst="ellipse">
-            <a:avLst/>
-          </a:prstGeom>
-          <a:solidFill>
-            <a:srgbClr val="EED3E0"/>
-          </a:solidFill>
-          <a:ln>
-            <a:noFill/>
-          </a:ln>
-        </p:spPr>
-        <p:txBody>
-          <a:bodyPr rtlCol="0" anchor="ctr"/>
-          <a:lstStyle/>
-          <a:p>
-            <a:pPr algn="ctr"/>
-          </a:p>
-        </p:txBody>
-      </p:sp>
-      <p:sp>
-        <p:nvSpPr>
-          <p:cNvPr id="14" name="장식"/>
-          <p:cNvSpPr/>
-          <p:nvPr/>
-        </p:nvSpPr>
-        <p:spPr>
-          <a:xfrm rot="18480000">
-            <a:off x="10344660" y="1202403"/>
-            <a:ext cx="123444" cy="192024"/>
-          </a:xfrm>
-          <a:prstGeom prst="ellipse">
-            <a:avLst/>
-          </a:prstGeom>
-          <a:solidFill>
-            <a:srgbClr val="B8618C"/>
-          </a:solidFill>
-          <a:ln>
-            <a:noFill/>
-          </a:ln>
-        </p:spPr>
-        <p:txBody>
-          <a:bodyPr rtlCol="0" anchor="ctr"/>
-          <a:lstStyle/>
-          <a:p>
-            <a:pPr algn="ctr"/>
-          </a:p>
-        </p:txBody>
-      </p:sp>
-      <p:sp>
-        <p:nvSpPr>
-          <p:cNvPr id="15" name="장식"/>
-          <p:cNvSpPr/>
-          <p:nvPr/>
-        </p:nvSpPr>
-        <p:spPr>
-          <a:xfrm>
-            <a:off x="10458907" y="1330452"/>
-            <a:ext cx="82296" cy="82296"/>
-          </a:xfrm>
-          <a:prstGeom prst="ellipse">
-            <a:avLst/>
-          </a:prstGeom>
-          <a:solidFill>
-            <a:srgbClr val="3F8D3F"/>
-          </a:solidFill>
-          <a:ln>
-            <a:noFill/>
-          </a:ln>
-        </p:spPr>
-        <p:txBody>
-          <a:bodyPr rtlCol="0" anchor="ctr"/>
-          <a:lstStyle/>
-          <a:p>
-            <a:pPr algn="ctr"/>
-          </a:p>
-        </p:txBody>
-      </p:sp>
-      <p:sp>
-        <p:nvSpPr>
-          <p:cNvPr id="16" name="장식"/>
-          <p:cNvSpPr/>
-          <p:nvPr/>
-        </p:nvSpPr>
-        <p:spPr>
-          <a:xfrm rot="2400000">
-            <a:off x="11518232" y="1260178"/>
-            <a:ext cx="103692" cy="161300"/>
-          </a:xfrm>
-          <a:prstGeom prst="ellipse">
-            <a:avLst/>
-          </a:prstGeom>
-          <a:solidFill>
-            <a:srgbClr val="B8618C"/>
-          </a:solidFill>
-          <a:ln>
-            <a:noFill/>
-          </a:ln>
-        </p:spPr>
-        <p:txBody>
-          <a:bodyPr rtlCol="0" anchor="ctr"/>
-          <a:lstStyle/>
-          <a:p>
-            <a:pPr algn="ctr"/>
-          </a:p>
-        </p:txBody>
-      </p:sp>
-      <p:sp>
-        <p:nvSpPr>
-          <p:cNvPr id="17" name="장식"/>
-          <p:cNvSpPr/>
-          <p:nvPr/>
-        </p:nvSpPr>
-        <p:spPr>
-          <a:xfrm rot="6720000">
-            <a:off x="11546630" y="1374075"/>
-            <a:ext cx="103692" cy="161300"/>
-          </a:xfrm>
-          <a:prstGeom prst="ellipse">
-            <a:avLst/>
-          </a:prstGeom>
-          <a:solidFill>
-            <a:srgbClr val="EED3E0"/>
-          </a:solidFill>
-          <a:ln>
-            <a:noFill/>
-          </a:ln>
-        </p:spPr>
-        <p:txBody>
-          <a:bodyPr rtlCol="0" anchor="ctr"/>
-          <a:lstStyle/>
-          <a:p>
-            <a:pPr algn="ctr"/>
-          </a:p>
-        </p:txBody>
-      </p:sp>
-      <p:sp>
-        <p:nvSpPr>
-          <p:cNvPr id="18" name="장식"/>
-          <p:cNvSpPr/>
-          <p:nvPr/>
-        </p:nvSpPr>
-        <p:spPr>
-          <a:xfrm rot="11040000">
-            <a:off x="11447083" y="1436279"/>
-            <a:ext cx="103692" cy="161300"/>
-          </a:xfrm>
-          <a:prstGeom prst="ellipse">
-            <a:avLst/>
-          </a:prstGeom>
-          <a:solidFill>
-            <a:srgbClr val="B8618C"/>
-          </a:solidFill>
-          <a:ln>
-            <a:noFill/>
-          </a:ln>
-        </p:spPr>
-        <p:txBody>
-          <a:bodyPr rtlCol="0" anchor="ctr"/>
-          <a:lstStyle/>
-          <a:p>
-            <a:pPr algn="ctr"/>
-          </a:p>
-        </p:txBody>
-      </p:sp>
-      <p:sp>
-        <p:nvSpPr>
-          <p:cNvPr id="19" name="장식"/>
-          <p:cNvSpPr/>
-          <p:nvPr/>
-        </p:nvSpPr>
-        <p:spPr>
-          <a:xfrm rot="15360000">
-            <a:off x="11357162" y="1360826"/>
-            <a:ext cx="103692" cy="161300"/>
-          </a:xfrm>
-          <a:prstGeom prst="ellipse">
-            <a:avLst/>
-          </a:prstGeom>
-          <a:solidFill>
-            <a:srgbClr val="EED3E0"/>
-          </a:solidFill>
-          <a:ln>
-            <a:noFill/>
-          </a:ln>
-        </p:spPr>
-        <p:txBody>
-          <a:bodyPr rtlCol="0" anchor="ctr"/>
-          <a:lstStyle/>
-          <a:p>
-            <a:pPr algn="ctr"/>
-          </a:p>
-        </p:txBody>
-      </p:sp>
-      <p:sp>
-        <p:nvSpPr>
-          <p:cNvPr id="20" name="장식"/>
-          <p:cNvSpPr/>
-          <p:nvPr/>
-        </p:nvSpPr>
-        <p:spPr>
-          <a:xfrm rot="19680000">
-            <a:off x="11401134" y="1251990"/>
-            <a:ext cx="103692" cy="161300"/>
-          </a:xfrm>
-          <a:prstGeom prst="ellipse">
-            <a:avLst/>
-          </a:prstGeom>
-          <a:solidFill>
-            <a:srgbClr val="B8618C"/>
-          </a:solidFill>
-          <a:ln>
-            <a:noFill/>
-          </a:ln>
-        </p:spPr>
-        <p:txBody>
-          <a:bodyPr rtlCol="0" anchor="ctr"/>
-          <a:lstStyle/>
-          <a:p>
-            <a:pPr algn="ctr"/>
-          </a:p>
-        </p:txBody>
-      </p:sp>
-      <p:sp>
-        <p:nvSpPr>
-          <p:cNvPr id="21" name="장식"/>
-          <p:cNvSpPr/>
-          <p:nvPr/>
-        </p:nvSpPr>
-        <p:spPr>
-          <a:xfrm>
-            <a:off x="11471330" y="1382755"/>
-            <a:ext cx="69128" cy="69128"/>
-          </a:xfrm>
-          <a:prstGeom prst="ellipse">
-            <a:avLst/>
-          </a:prstGeom>
-          <a:solidFill>
-            <a:srgbClr val="3F8D3F"/>
-          </a:solidFill>
-          <a:ln>
-            <a:noFill/>
-          </a:ln>
-        </p:spPr>
-        <p:txBody>
-          <a:bodyPr rtlCol="0" anchor="ctr"/>
-          <a:lstStyle/>
-          <a:p>
-            <a:pPr algn="ctr"/>
-          </a:p>
-        </p:txBody>
-      </p:sp>
-      <p:sp>
-        <p:nvSpPr>
           <p:cNvPr id="2" name="Title 1"/>
           <p:cNvSpPr>
             <a:spLocks noGrp="1"/>
@@ -6886,7 +4783,7 @@
       </p:sp>
       <p:sp>
         <p:nvSpPr>
-          <p:cNvPr id="22" name="줄 1"/>
+          <p:cNvPr id="4" name="줄 1"/>
           <p:cNvSpPr/>
           <p:nvPr/>
         </p:nvSpPr>
@@ -6919,7 +4816,7 @@
       </p:sp>
       <p:sp>
         <p:nvSpPr>
-          <p:cNvPr id="23" name="번호 1"/>
+          <p:cNvPr id="5" name="번호 1"/>
           <p:cNvSpPr/>
           <p:nvPr/>
         </p:nvSpPr>
@@ -6962,7 +4859,7 @@
       </p:sp>
       <p:sp>
         <p:nvSpPr>
-          <p:cNvPr id="24" name="TextBox 23"/>
+          <p:cNvPr id="6" name="TextBox 5"/>
           <p:cNvSpPr txBox="1"/>
           <p:nvPr/>
         </p:nvSpPr>
@@ -7000,7 +4897,7 @@
       </p:sp>
       <p:sp>
         <p:nvSpPr>
-          <p:cNvPr id="25" name="TextBox 24"/>
+          <p:cNvPr id="7" name="TextBox 6"/>
           <p:cNvSpPr txBox="1"/>
           <p:nvPr/>
         </p:nvSpPr>
@@ -7038,7 +4935,7 @@
       </p:sp>
       <p:sp>
         <p:nvSpPr>
-          <p:cNvPr id="26" name="줄 2"/>
+          <p:cNvPr id="8" name="줄 2"/>
           <p:cNvSpPr/>
           <p:nvPr/>
         </p:nvSpPr>
@@ -7071,7 +4968,7 @@
       </p:sp>
       <p:sp>
         <p:nvSpPr>
-          <p:cNvPr id="27" name="번호 2"/>
+          <p:cNvPr id="9" name="번호 2"/>
           <p:cNvSpPr/>
           <p:nvPr/>
         </p:nvSpPr>
@@ -7114,7 +5011,7 @@
       </p:sp>
       <p:sp>
         <p:nvSpPr>
-          <p:cNvPr id="28" name="TextBox 27"/>
+          <p:cNvPr id="10" name="TextBox 9"/>
           <p:cNvSpPr txBox="1"/>
           <p:nvPr/>
         </p:nvSpPr>
@@ -7152,7 +5049,7 @@
       </p:sp>
       <p:sp>
         <p:nvSpPr>
-          <p:cNvPr id="29" name="TextBox 28"/>
+          <p:cNvPr id="11" name="TextBox 10"/>
           <p:cNvSpPr txBox="1"/>
           <p:nvPr/>
         </p:nvSpPr>
@@ -7190,7 +5087,7 @@
       </p:sp>
       <p:sp>
         <p:nvSpPr>
-          <p:cNvPr id="30" name="줄 3"/>
+          <p:cNvPr id="12" name="줄 3"/>
           <p:cNvSpPr/>
           <p:nvPr/>
         </p:nvSpPr>
@@ -7223,7 +5120,7 @@
       </p:sp>
       <p:sp>
         <p:nvSpPr>
-          <p:cNvPr id="31" name="번호 3"/>
+          <p:cNvPr id="13" name="번호 3"/>
           <p:cNvSpPr/>
           <p:nvPr/>
         </p:nvSpPr>
@@ -7266,7 +5163,7 @@
       </p:sp>
       <p:sp>
         <p:nvSpPr>
-          <p:cNvPr id="32" name="TextBox 31"/>
+          <p:cNvPr id="14" name="TextBox 13"/>
           <p:cNvSpPr txBox="1"/>
           <p:nvPr/>
         </p:nvSpPr>
@@ -7304,7 +5201,7 @@
       </p:sp>
       <p:sp>
         <p:nvSpPr>
-          <p:cNvPr id="33" name="TextBox 32"/>
+          <p:cNvPr id="15" name="TextBox 14"/>
           <p:cNvSpPr txBox="1"/>
           <p:nvPr/>
         </p:nvSpPr>
@@ -7399,528 +5296,6 @@
       </p:sp>
       <p:sp>
         <p:nvSpPr>
-          <p:cNvPr id="4" name="장식"/>
-          <p:cNvSpPr/>
-          <p:nvPr/>
-        </p:nvSpPr>
-        <p:spPr>
-          <a:xfrm>
-            <a:off x="10879531" y="530352"/>
-            <a:ext cx="246888" cy="384048"/>
-          </a:xfrm>
-          <a:prstGeom prst="ellipse">
-            <a:avLst/>
-          </a:prstGeom>
-          <a:solidFill>
-            <a:srgbClr val="B8618C"/>
-          </a:solidFill>
-          <a:ln>
-            <a:noFill/>
-          </a:ln>
-        </p:spPr>
-        <p:txBody>
-          <a:bodyPr rtlCol="0" anchor="ctr"/>
-          <a:lstStyle/>
-          <a:p>
-            <a:pPr algn="ctr"/>
-          </a:p>
-        </p:txBody>
-      </p:sp>
-      <p:sp>
-        <p:nvSpPr>
-          <p:cNvPr id="5" name="장식"/>
-          <p:cNvSpPr/>
-          <p:nvPr/>
-        </p:nvSpPr>
-        <p:spPr>
-          <a:xfrm rot="4320000">
-            <a:off x="11105639" y="694629"/>
-            <a:ext cx="246888" cy="384048"/>
-          </a:xfrm>
-          <a:prstGeom prst="ellipse">
-            <a:avLst/>
-          </a:prstGeom>
-          <a:solidFill>
-            <a:srgbClr val="EED3E0"/>
-          </a:solidFill>
-          <a:ln>
-            <a:noFill/>
-          </a:ln>
-        </p:spPr>
-        <p:txBody>
-          <a:bodyPr rtlCol="0" anchor="ctr"/>
-          <a:lstStyle/>
-          <a:p>
-            <a:pPr algn="ctr"/>
-          </a:p>
-        </p:txBody>
-      </p:sp>
-      <p:sp>
-        <p:nvSpPr>
-          <p:cNvPr id="6" name="장식"/>
-          <p:cNvSpPr/>
-          <p:nvPr/>
-        </p:nvSpPr>
-        <p:spPr>
-          <a:xfrm rot="8640000">
-            <a:off x="11019273" y="960434"/>
-            <a:ext cx="246888" cy="384048"/>
-          </a:xfrm>
-          <a:prstGeom prst="ellipse">
-            <a:avLst/>
-          </a:prstGeom>
-          <a:solidFill>
-            <a:srgbClr val="B8618C"/>
-          </a:solidFill>
-          <a:ln>
-            <a:noFill/>
-          </a:ln>
-        </p:spPr>
-        <p:txBody>
-          <a:bodyPr rtlCol="0" anchor="ctr"/>
-          <a:lstStyle/>
-          <a:p>
-            <a:pPr algn="ctr"/>
-          </a:p>
-        </p:txBody>
-      </p:sp>
-      <p:sp>
-        <p:nvSpPr>
-          <p:cNvPr id="7" name="장식"/>
-          <p:cNvSpPr/>
-          <p:nvPr/>
-        </p:nvSpPr>
-        <p:spPr>
-          <a:xfrm rot="12960000">
-            <a:off x="10739788" y="960434"/>
-            <a:ext cx="246888" cy="384048"/>
-          </a:xfrm>
-          <a:prstGeom prst="ellipse">
-            <a:avLst/>
-          </a:prstGeom>
-          <a:solidFill>
-            <a:srgbClr val="EED3E0"/>
-          </a:solidFill>
-          <a:ln>
-            <a:noFill/>
-          </a:ln>
-        </p:spPr>
-        <p:txBody>
-          <a:bodyPr rtlCol="0" anchor="ctr"/>
-          <a:lstStyle/>
-          <a:p>
-            <a:pPr algn="ctr"/>
-          </a:p>
-        </p:txBody>
-      </p:sp>
-      <p:sp>
-        <p:nvSpPr>
-          <p:cNvPr id="8" name="장식"/>
-          <p:cNvSpPr/>
-          <p:nvPr/>
-        </p:nvSpPr>
-        <p:spPr>
-          <a:xfrm rot="17280000">
-            <a:off x="10653423" y="694629"/>
-            <a:ext cx="246888" cy="384048"/>
-          </a:xfrm>
-          <a:prstGeom prst="ellipse">
-            <a:avLst/>
-          </a:prstGeom>
-          <a:solidFill>
-            <a:srgbClr val="B8618C"/>
-          </a:solidFill>
-          <a:ln>
-            <a:noFill/>
-          </a:ln>
-        </p:spPr>
-        <p:txBody>
-          <a:bodyPr rtlCol="0" anchor="ctr"/>
-          <a:lstStyle/>
-          <a:p>
-            <a:pPr algn="ctr"/>
-          </a:p>
-        </p:txBody>
-      </p:sp>
-      <p:sp>
-        <p:nvSpPr>
-          <p:cNvPr id="9" name="장식"/>
-          <p:cNvSpPr/>
-          <p:nvPr/>
-        </p:nvSpPr>
-        <p:spPr>
-          <a:xfrm>
-            <a:off x="10920679" y="877824"/>
-            <a:ext cx="164592" cy="164592"/>
-          </a:xfrm>
-          <a:prstGeom prst="ellipse">
-            <a:avLst/>
-          </a:prstGeom>
-          <a:solidFill>
-            <a:srgbClr val="3F8D3F"/>
-          </a:solidFill>
-          <a:ln>
-            <a:noFill/>
-          </a:ln>
-        </p:spPr>
-        <p:txBody>
-          <a:bodyPr rtlCol="0" anchor="ctr"/>
-          <a:lstStyle/>
-          <a:p>
-            <a:pPr algn="ctr"/>
-          </a:p>
-        </p:txBody>
-      </p:sp>
-      <p:sp>
-        <p:nvSpPr>
-          <p:cNvPr id="10" name="장식"/>
-          <p:cNvSpPr/>
-          <p:nvPr/>
-        </p:nvSpPr>
-        <p:spPr>
-          <a:xfrm rot="1200000">
-            <a:off x="10478989" y="1163884"/>
-            <a:ext cx="123444" cy="192024"/>
-          </a:xfrm>
-          <a:prstGeom prst="ellipse">
-            <a:avLst/>
-          </a:prstGeom>
-          <a:solidFill>
-            <a:srgbClr val="B8618C"/>
-          </a:solidFill>
-          <a:ln>
-            <a:noFill/>
-          </a:ln>
-        </p:spPr>
-        <p:txBody>
-          <a:bodyPr rtlCol="0" anchor="ctr"/>
-          <a:lstStyle/>
-          <a:p>
-            <a:pPr algn="ctr"/>
-          </a:p>
-        </p:txBody>
-      </p:sp>
-      <p:sp>
-        <p:nvSpPr>
-          <p:cNvPr id="11" name="장식"/>
-          <p:cNvSpPr/>
-          <p:nvPr/>
-        </p:nvSpPr>
-        <p:spPr>
-          <a:xfrm rot="5520000">
-            <a:off x="10557132" y="1279736"/>
-            <a:ext cx="123444" cy="192024"/>
-          </a:xfrm>
-          <a:prstGeom prst="ellipse">
-            <a:avLst/>
-          </a:prstGeom>
-          <a:solidFill>
-            <a:srgbClr val="EED3E0"/>
-          </a:solidFill>
-          <a:ln>
-            <a:noFill/>
-          </a:ln>
-        </p:spPr>
-        <p:txBody>
-          <a:bodyPr rtlCol="0" anchor="ctr"/>
-          <a:lstStyle/>
-          <a:p>
-            <a:pPr algn="ctr"/>
-          </a:p>
-        </p:txBody>
-      </p:sp>
-      <p:sp>
-        <p:nvSpPr>
-          <p:cNvPr id="12" name="장식"/>
-          <p:cNvSpPr/>
-          <p:nvPr/>
-        </p:nvSpPr>
-        <p:spPr>
-          <a:xfrm rot="9840000">
-            <a:off x="10471098" y="1389855"/>
-            <a:ext cx="123444" cy="192024"/>
-          </a:xfrm>
-          <a:prstGeom prst="ellipse">
-            <a:avLst/>
-          </a:prstGeom>
-          <a:solidFill>
-            <a:srgbClr val="B8618C"/>
-          </a:solidFill>
-          <a:ln>
-            <a:noFill/>
-          </a:ln>
-        </p:spPr>
-        <p:txBody>
-          <a:bodyPr rtlCol="0" anchor="ctr"/>
-          <a:lstStyle/>
-          <a:p>
-            <a:pPr algn="ctr"/>
-          </a:p>
-        </p:txBody>
-      </p:sp>
-      <p:sp>
-        <p:nvSpPr>
-          <p:cNvPr id="13" name="장식"/>
-          <p:cNvSpPr/>
-          <p:nvPr/>
-        </p:nvSpPr>
-        <p:spPr>
-          <a:xfrm rot="14160000">
-            <a:off x="10339783" y="1342060"/>
-            <a:ext cx="123444" cy="192024"/>
-          </a:xfrm>
-          <a:prstGeom prst="ellipse">
-            <a:avLst/>
-          </a:prstGeom>
-          <a:solidFill>
-            <a:srgbClr val="EED3E0"/>
-          </a:solidFill>
-          <a:ln>
-            <a:noFill/>
-          </a:ln>
-        </p:spPr>
-        <p:txBody>
-          <a:bodyPr rtlCol="0" anchor="ctr"/>
-          <a:lstStyle/>
-          <a:p>
-            <a:pPr algn="ctr"/>
-          </a:p>
-        </p:txBody>
-      </p:sp>
-      <p:sp>
-        <p:nvSpPr>
-          <p:cNvPr id="14" name="장식"/>
-          <p:cNvSpPr/>
-          <p:nvPr/>
-        </p:nvSpPr>
-        <p:spPr>
-          <a:xfrm rot="18480000">
-            <a:off x="10344660" y="1202403"/>
-            <a:ext cx="123444" cy="192024"/>
-          </a:xfrm>
-          <a:prstGeom prst="ellipse">
-            <a:avLst/>
-          </a:prstGeom>
-          <a:solidFill>
-            <a:srgbClr val="B8618C"/>
-          </a:solidFill>
-          <a:ln>
-            <a:noFill/>
-          </a:ln>
-        </p:spPr>
-        <p:txBody>
-          <a:bodyPr rtlCol="0" anchor="ctr"/>
-          <a:lstStyle/>
-          <a:p>
-            <a:pPr algn="ctr"/>
-          </a:p>
-        </p:txBody>
-      </p:sp>
-      <p:sp>
-        <p:nvSpPr>
-          <p:cNvPr id="15" name="장식"/>
-          <p:cNvSpPr/>
-          <p:nvPr/>
-        </p:nvSpPr>
-        <p:spPr>
-          <a:xfrm>
-            <a:off x="10458907" y="1330452"/>
-            <a:ext cx="82296" cy="82296"/>
-          </a:xfrm>
-          <a:prstGeom prst="ellipse">
-            <a:avLst/>
-          </a:prstGeom>
-          <a:solidFill>
-            <a:srgbClr val="3F8D3F"/>
-          </a:solidFill>
-          <a:ln>
-            <a:noFill/>
-          </a:ln>
-        </p:spPr>
-        <p:txBody>
-          <a:bodyPr rtlCol="0" anchor="ctr"/>
-          <a:lstStyle/>
-          <a:p>
-            <a:pPr algn="ctr"/>
-          </a:p>
-        </p:txBody>
-      </p:sp>
-      <p:sp>
-        <p:nvSpPr>
-          <p:cNvPr id="16" name="장식"/>
-          <p:cNvSpPr/>
-          <p:nvPr/>
-        </p:nvSpPr>
-        <p:spPr>
-          <a:xfrm rot="2400000">
-            <a:off x="11518232" y="1260178"/>
-            <a:ext cx="103692" cy="161300"/>
-          </a:xfrm>
-          <a:prstGeom prst="ellipse">
-            <a:avLst/>
-          </a:prstGeom>
-          <a:solidFill>
-            <a:srgbClr val="B8618C"/>
-          </a:solidFill>
-          <a:ln>
-            <a:noFill/>
-          </a:ln>
-        </p:spPr>
-        <p:txBody>
-          <a:bodyPr rtlCol="0" anchor="ctr"/>
-          <a:lstStyle/>
-          <a:p>
-            <a:pPr algn="ctr"/>
-          </a:p>
-        </p:txBody>
-      </p:sp>
-      <p:sp>
-        <p:nvSpPr>
-          <p:cNvPr id="17" name="장식"/>
-          <p:cNvSpPr/>
-          <p:nvPr/>
-        </p:nvSpPr>
-        <p:spPr>
-          <a:xfrm rot="6720000">
-            <a:off x="11546630" y="1374075"/>
-            <a:ext cx="103692" cy="161300"/>
-          </a:xfrm>
-          <a:prstGeom prst="ellipse">
-            <a:avLst/>
-          </a:prstGeom>
-          <a:solidFill>
-            <a:srgbClr val="EED3E0"/>
-          </a:solidFill>
-          <a:ln>
-            <a:noFill/>
-          </a:ln>
-        </p:spPr>
-        <p:txBody>
-          <a:bodyPr rtlCol="0" anchor="ctr"/>
-          <a:lstStyle/>
-          <a:p>
-            <a:pPr algn="ctr"/>
-          </a:p>
-        </p:txBody>
-      </p:sp>
-      <p:sp>
-        <p:nvSpPr>
-          <p:cNvPr id="18" name="장식"/>
-          <p:cNvSpPr/>
-          <p:nvPr/>
-        </p:nvSpPr>
-        <p:spPr>
-          <a:xfrm rot="11040000">
-            <a:off x="11447083" y="1436279"/>
-            <a:ext cx="103692" cy="161300"/>
-          </a:xfrm>
-          <a:prstGeom prst="ellipse">
-            <a:avLst/>
-          </a:prstGeom>
-          <a:solidFill>
-            <a:srgbClr val="B8618C"/>
-          </a:solidFill>
-          <a:ln>
-            <a:noFill/>
-          </a:ln>
-        </p:spPr>
-        <p:txBody>
-          <a:bodyPr rtlCol="0" anchor="ctr"/>
-          <a:lstStyle/>
-          <a:p>
-            <a:pPr algn="ctr"/>
-          </a:p>
-        </p:txBody>
-      </p:sp>
-      <p:sp>
-        <p:nvSpPr>
-          <p:cNvPr id="19" name="장식"/>
-          <p:cNvSpPr/>
-          <p:nvPr/>
-        </p:nvSpPr>
-        <p:spPr>
-          <a:xfrm rot="15360000">
-            <a:off x="11357162" y="1360826"/>
-            <a:ext cx="103692" cy="161300"/>
-          </a:xfrm>
-          <a:prstGeom prst="ellipse">
-            <a:avLst/>
-          </a:prstGeom>
-          <a:solidFill>
-            <a:srgbClr val="EED3E0"/>
-          </a:solidFill>
-          <a:ln>
-            <a:noFill/>
-          </a:ln>
-        </p:spPr>
-        <p:txBody>
-          <a:bodyPr rtlCol="0" anchor="ctr"/>
-          <a:lstStyle/>
-          <a:p>
-            <a:pPr algn="ctr"/>
-          </a:p>
-        </p:txBody>
-      </p:sp>
-      <p:sp>
-        <p:nvSpPr>
-          <p:cNvPr id="20" name="장식"/>
-          <p:cNvSpPr/>
-          <p:nvPr/>
-        </p:nvSpPr>
-        <p:spPr>
-          <a:xfrm rot="19680000">
-            <a:off x="11401134" y="1251990"/>
-            <a:ext cx="103692" cy="161300"/>
-          </a:xfrm>
-          <a:prstGeom prst="ellipse">
-            <a:avLst/>
-          </a:prstGeom>
-          <a:solidFill>
-            <a:srgbClr val="B8618C"/>
-          </a:solidFill>
-          <a:ln>
-            <a:noFill/>
-          </a:ln>
-        </p:spPr>
-        <p:txBody>
-          <a:bodyPr rtlCol="0" anchor="ctr"/>
-          <a:lstStyle/>
-          <a:p>
-            <a:pPr algn="ctr"/>
-          </a:p>
-        </p:txBody>
-      </p:sp>
-      <p:sp>
-        <p:nvSpPr>
-          <p:cNvPr id="21" name="장식"/>
-          <p:cNvSpPr/>
-          <p:nvPr/>
-        </p:nvSpPr>
-        <p:spPr>
-          <a:xfrm>
-            <a:off x="11471330" y="1382755"/>
-            <a:ext cx="69128" cy="69128"/>
-          </a:xfrm>
-          <a:prstGeom prst="ellipse">
-            <a:avLst/>
-          </a:prstGeom>
-          <a:solidFill>
-            <a:srgbClr val="3F8D3F"/>
-          </a:solidFill>
-          <a:ln>
-            <a:noFill/>
-          </a:ln>
-        </p:spPr>
-        <p:txBody>
-          <a:bodyPr rtlCol="0" anchor="ctr"/>
-          <a:lstStyle/>
-          <a:p>
-            <a:pPr algn="ctr"/>
-          </a:p>
-        </p:txBody>
-      </p:sp>
-      <p:sp>
-        <p:nvSpPr>
           <p:cNvPr id="2" name="Title 1"/>
           <p:cNvSpPr>
             <a:spLocks noGrp="1"/>
@@ -7959,7 +5334,7 @@
       </p:sp>
       <p:sp>
         <p:nvSpPr>
-          <p:cNvPr id="22" name="사진 자리"/>
+          <p:cNvPr id="4" name="사진 자리"/>
           <p:cNvSpPr/>
           <p:nvPr/>
         </p:nvSpPr>
@@ -8007,7 +5382,7 @@
       </p:sp>
       <p:sp>
         <p:nvSpPr>
-          <p:cNvPr id="23" name="사진 자리"/>
+          <p:cNvPr id="5" name="사진 자리"/>
           <p:cNvSpPr/>
           <p:nvPr/>
         </p:nvSpPr>
@@ -8055,7 +5430,7 @@
       </p:sp>
       <p:sp>
         <p:nvSpPr>
-          <p:cNvPr id="24" name="사진 자리"/>
+          <p:cNvPr id="6" name="사진 자리"/>
           <p:cNvSpPr/>
           <p:nvPr/>
         </p:nvSpPr>
@@ -8103,7 +5478,7 @@
       </p:sp>
       <p:sp>
         <p:nvSpPr>
-          <p:cNvPr id="25" name="사진 자리"/>
+          <p:cNvPr id="7" name="사진 자리"/>
           <p:cNvSpPr/>
           <p:nvPr/>
         </p:nvSpPr>
@@ -8151,7 +5526,7 @@
       </p:sp>
       <p:sp>
         <p:nvSpPr>
-          <p:cNvPr id="26" name="사진 자리"/>
+          <p:cNvPr id="8" name="사진 자리"/>
           <p:cNvSpPr/>
           <p:nvPr/>
         </p:nvSpPr>
@@ -8199,7 +5574,7 @@
       </p:sp>
       <p:sp>
         <p:nvSpPr>
-          <p:cNvPr id="27" name="사진 자리"/>
+          <p:cNvPr id="9" name="사진 자리"/>
           <p:cNvSpPr/>
           <p:nvPr/>
         </p:nvSpPr>
@@ -8256,14 +5631,6 @@
 <file path=ppt/slides/slide6.xml><?xml version="1.0" encoding="utf-8"?>
 <p:sld xmlns:a="http://schemas.openxmlformats.org/drawingml/2006/main" xmlns:p="http://schemas.openxmlformats.org/presentationml/2006/main" xmlns:r="http://schemas.openxmlformats.org/officeDocument/2006/relationships">
   <p:cSld>
-    <p:bg>
-      <p:bgPr>
-        <a:solidFill>
-          <a:srgbClr val="7B3759"/>
-        </a:solidFill>
-        <a:effectLst/>
-      </p:bgPr>
-    </p:bg>
     <p:spTree>
       <p:nvGrpSpPr>
         <p:cNvPr id="1" name=""/>
@@ -8271,559 +5638,30 @@
         <p:nvPr/>
       </p:nvGrpSpPr>
       <p:grpSpPr/>
-      <p:sp>
-        <p:nvSpPr>
-          <p:cNvPr id="3" name="장식"/>
-          <p:cNvSpPr/>
+      <p:pic>
+        <p:nvPicPr>
+          <p:cNvPr id="3" name="표지 그림" descr="family-25.jpg"/>
+          <p:cNvPicPr>
+            <a:picLocks noChangeAspect="1"/>
+          </p:cNvPicPr>
           <p:nvPr/>
-        </p:nvSpPr>
-        <p:spPr>
-          <a:xfrm>
-            <a:off x="457200" y="457200"/>
-            <a:ext cx="11277295" cy="5943600"/>
-          </a:xfrm>
-          <a:prstGeom prst="roundRect">
-            <a:avLst>
-              <a:gd name="adj" fmla="val 5000"/>
-            </a:avLst>
-          </a:prstGeom>
-          <a:solidFill>
-            <a:srgbClr val="FFFFFF"/>
-          </a:solidFill>
-          <a:ln>
-            <a:noFill/>
-          </a:ln>
-        </p:spPr>
-        <p:txBody>
-          <a:bodyPr rtlCol="0" anchor="ctr"/>
-          <a:lstStyle/>
-          <a:p>
-            <a:pPr algn="ctr"/>
-          </a:p>
-        </p:txBody>
-      </p:sp>
-      <p:sp>
-        <p:nvSpPr>
-          <p:cNvPr id="4" name="장식"/>
-          <p:cNvSpPr/>
-          <p:nvPr/>
-        </p:nvSpPr>
-        <p:spPr>
-          <a:xfrm>
-            <a:off x="5892165" y="662482"/>
-            <a:ext cx="407365" cy="633679"/>
-          </a:xfrm>
-          <a:prstGeom prst="ellipse">
+        </p:nvPicPr>
+        <p:blipFill>
+          <a:blip r:embed="rId2"/>
+          <a:stretch>
+            <a:fillRect/>
+          </a:stretch>
+        </p:blipFill>
+        <p:spPr>
+          <a:xfrm>
+            <a:off x="0" y="0"/>
+            <a:ext cx="12191695" cy="6858000"/>
+          </a:xfrm>
+          <a:prstGeom prst="rect">
             <a:avLst/>
           </a:prstGeom>
-          <a:solidFill>
-            <a:srgbClr val="B8618C"/>
-          </a:solidFill>
-          <a:ln>
-            <a:noFill/>
-          </a:ln>
-        </p:spPr>
-        <p:txBody>
-          <a:bodyPr rtlCol="0" anchor="ctr"/>
-          <a:lstStyle/>
-          <a:p>
-            <a:pPr algn="ctr"/>
-          </a:p>
-        </p:txBody>
-      </p:sp>
-      <p:sp>
-        <p:nvSpPr>
-          <p:cNvPr id="5" name="장식"/>
-          <p:cNvSpPr/>
-          <p:nvPr/>
-        </p:nvSpPr>
-        <p:spPr>
-          <a:xfrm rot="4320000">
-            <a:off x="6265243" y="933539"/>
-            <a:ext cx="407365" cy="633679"/>
-          </a:xfrm>
-          <a:prstGeom prst="ellipse">
-            <a:avLst/>
-          </a:prstGeom>
-          <a:solidFill>
-            <a:srgbClr val="EED3E0"/>
-          </a:solidFill>
-          <a:ln>
-            <a:noFill/>
-          </a:ln>
-        </p:spPr>
-        <p:txBody>
-          <a:bodyPr rtlCol="0" anchor="ctr"/>
-          <a:lstStyle/>
-          <a:p>
-            <a:pPr algn="ctr"/>
-          </a:p>
-        </p:txBody>
-      </p:sp>
-      <p:sp>
-        <p:nvSpPr>
-          <p:cNvPr id="6" name="장식"/>
-          <p:cNvSpPr/>
-          <p:nvPr/>
-        </p:nvSpPr>
-        <p:spPr>
-          <a:xfrm rot="8640000">
-            <a:off x="6122739" y="1372119"/>
-            <a:ext cx="407365" cy="633679"/>
-          </a:xfrm>
-          <a:prstGeom prst="ellipse">
-            <a:avLst/>
-          </a:prstGeom>
-          <a:solidFill>
-            <a:srgbClr val="B8618C"/>
-          </a:solidFill>
-          <a:ln>
-            <a:noFill/>
-          </a:ln>
-        </p:spPr>
-        <p:txBody>
-          <a:bodyPr rtlCol="0" anchor="ctr"/>
-          <a:lstStyle/>
-          <a:p>
-            <a:pPr algn="ctr"/>
-          </a:p>
-        </p:txBody>
-      </p:sp>
-      <p:sp>
-        <p:nvSpPr>
-          <p:cNvPr id="7" name="장식"/>
-          <p:cNvSpPr/>
-          <p:nvPr/>
-        </p:nvSpPr>
-        <p:spPr>
-          <a:xfrm rot="12960000">
-            <a:off x="5661590" y="1372119"/>
-            <a:ext cx="407365" cy="633679"/>
-          </a:xfrm>
-          <a:prstGeom prst="ellipse">
-            <a:avLst/>
-          </a:prstGeom>
-          <a:solidFill>
-            <a:srgbClr val="EED3E0"/>
-          </a:solidFill>
-          <a:ln>
-            <a:noFill/>
-          </a:ln>
-        </p:spPr>
-        <p:txBody>
-          <a:bodyPr rtlCol="0" anchor="ctr"/>
-          <a:lstStyle/>
-          <a:p>
-            <a:pPr algn="ctr"/>
-          </a:p>
-        </p:txBody>
-      </p:sp>
-      <p:sp>
-        <p:nvSpPr>
-          <p:cNvPr id="8" name="장식"/>
-          <p:cNvSpPr/>
-          <p:nvPr/>
-        </p:nvSpPr>
-        <p:spPr>
-          <a:xfrm rot="17280000">
-            <a:off x="5519086" y="933539"/>
-            <a:ext cx="407365" cy="633679"/>
-          </a:xfrm>
-          <a:prstGeom prst="ellipse">
-            <a:avLst/>
-          </a:prstGeom>
-          <a:solidFill>
-            <a:srgbClr val="B8618C"/>
-          </a:solidFill>
-          <a:ln>
-            <a:noFill/>
-          </a:ln>
-        </p:spPr>
-        <p:txBody>
-          <a:bodyPr rtlCol="0" anchor="ctr"/>
-          <a:lstStyle/>
-          <a:p>
-            <a:pPr algn="ctr"/>
-          </a:p>
-        </p:txBody>
-      </p:sp>
-      <p:sp>
-        <p:nvSpPr>
-          <p:cNvPr id="9" name="장식"/>
-          <p:cNvSpPr/>
-          <p:nvPr/>
-        </p:nvSpPr>
-        <p:spPr>
-          <a:xfrm>
-            <a:off x="5960059" y="1235811"/>
-            <a:ext cx="271576" cy="271576"/>
-          </a:xfrm>
-          <a:prstGeom prst="ellipse">
-            <a:avLst/>
-          </a:prstGeom>
-          <a:solidFill>
-            <a:srgbClr val="3F8D3F"/>
-          </a:solidFill>
-          <a:ln>
-            <a:noFill/>
-          </a:ln>
-        </p:spPr>
-        <p:txBody>
-          <a:bodyPr rtlCol="0" anchor="ctr"/>
-          <a:lstStyle/>
-          <a:p>
-            <a:pPr algn="ctr"/>
-          </a:p>
-        </p:txBody>
-      </p:sp>
-      <p:sp>
-        <p:nvSpPr>
-          <p:cNvPr id="10" name="장식"/>
-          <p:cNvSpPr/>
-          <p:nvPr/>
-        </p:nvSpPr>
-        <p:spPr>
-          <a:xfrm rot="1200000">
-            <a:off x="5231271" y="1707812"/>
-            <a:ext cx="203682" cy="316839"/>
-          </a:xfrm>
-          <a:prstGeom prst="ellipse">
-            <a:avLst/>
-          </a:prstGeom>
-          <a:solidFill>
-            <a:srgbClr val="B8618C"/>
-          </a:solidFill>
-          <a:ln>
-            <a:noFill/>
-          </a:ln>
-        </p:spPr>
-        <p:txBody>
-          <a:bodyPr rtlCol="0" anchor="ctr"/>
-          <a:lstStyle/>
-          <a:p>
-            <a:pPr algn="ctr"/>
-          </a:p>
-        </p:txBody>
-      </p:sp>
-      <p:sp>
-        <p:nvSpPr>
-          <p:cNvPr id="11" name="장식"/>
-          <p:cNvSpPr/>
-          <p:nvPr/>
-        </p:nvSpPr>
-        <p:spPr>
-          <a:xfrm rot="5520000">
-            <a:off x="5360207" y="1898967"/>
-            <a:ext cx="203682" cy="316839"/>
-          </a:xfrm>
-          <a:prstGeom prst="ellipse">
-            <a:avLst/>
-          </a:prstGeom>
-          <a:solidFill>
-            <a:srgbClr val="EED3E0"/>
-          </a:solidFill>
-          <a:ln>
-            <a:noFill/>
-          </a:ln>
-        </p:spPr>
-        <p:txBody>
-          <a:bodyPr rtlCol="0" anchor="ctr"/>
-          <a:lstStyle/>
-          <a:p>
-            <a:pPr algn="ctr"/>
-          </a:p>
-        </p:txBody>
-      </p:sp>
-      <p:sp>
-        <p:nvSpPr>
-          <p:cNvPr id="12" name="장식"/>
-          <p:cNvSpPr/>
-          <p:nvPr/>
-        </p:nvSpPr>
-        <p:spPr>
-          <a:xfrm rot="9840000">
-            <a:off x="5218251" y="2080662"/>
-            <a:ext cx="203682" cy="316839"/>
-          </a:xfrm>
-          <a:prstGeom prst="ellipse">
-            <a:avLst/>
-          </a:prstGeom>
-          <a:solidFill>
-            <a:srgbClr val="B8618C"/>
-          </a:solidFill>
-          <a:ln>
-            <a:noFill/>
-          </a:ln>
-        </p:spPr>
-        <p:txBody>
-          <a:bodyPr rtlCol="0" anchor="ctr"/>
-          <a:lstStyle/>
-          <a:p>
-            <a:pPr algn="ctr"/>
-          </a:p>
-        </p:txBody>
-      </p:sp>
-      <p:sp>
-        <p:nvSpPr>
-          <p:cNvPr id="13" name="장식"/>
-          <p:cNvSpPr/>
-          <p:nvPr/>
-        </p:nvSpPr>
-        <p:spPr>
-          <a:xfrm rot="14160000">
-            <a:off x="5001581" y="2001801"/>
-            <a:ext cx="203682" cy="316839"/>
-          </a:xfrm>
-          <a:prstGeom prst="ellipse">
-            <a:avLst/>
-          </a:prstGeom>
-          <a:solidFill>
-            <a:srgbClr val="EED3E0"/>
-          </a:solidFill>
-          <a:ln>
-            <a:noFill/>
-          </a:ln>
-        </p:spPr>
-        <p:txBody>
-          <a:bodyPr rtlCol="0" anchor="ctr"/>
-          <a:lstStyle/>
-          <a:p>
-            <a:pPr algn="ctr"/>
-          </a:p>
-        </p:txBody>
-      </p:sp>
-      <p:sp>
-        <p:nvSpPr>
-          <p:cNvPr id="14" name="장식"/>
-          <p:cNvSpPr/>
-          <p:nvPr/>
-        </p:nvSpPr>
-        <p:spPr>
-          <a:xfrm rot="18480000">
-            <a:off x="5009628" y="1771367"/>
-            <a:ext cx="203682" cy="316839"/>
-          </a:xfrm>
-          <a:prstGeom prst="ellipse">
-            <a:avLst/>
-          </a:prstGeom>
-          <a:solidFill>
-            <a:srgbClr val="B8618C"/>
-          </a:solidFill>
-          <a:ln>
-            <a:noFill/>
-          </a:ln>
-        </p:spPr>
-        <p:txBody>
-          <a:bodyPr rtlCol="0" anchor="ctr"/>
-          <a:lstStyle/>
-          <a:p>
-            <a:pPr algn="ctr"/>
-          </a:p>
-        </p:txBody>
-      </p:sp>
-      <p:sp>
-        <p:nvSpPr>
-          <p:cNvPr id="15" name="장식"/>
-          <p:cNvSpPr/>
-          <p:nvPr/>
-        </p:nvSpPr>
-        <p:spPr>
-          <a:xfrm>
-            <a:off x="5198135" y="1982647"/>
-            <a:ext cx="135788" cy="135788"/>
-          </a:xfrm>
-          <a:prstGeom prst="ellipse">
-            <a:avLst/>
-          </a:prstGeom>
-          <a:solidFill>
-            <a:srgbClr val="3F8D3F"/>
-          </a:solidFill>
-          <a:ln>
-            <a:noFill/>
-          </a:ln>
-        </p:spPr>
-        <p:txBody>
-          <a:bodyPr rtlCol="0" anchor="ctr"/>
-          <a:lstStyle/>
-          <a:p>
-            <a:pPr algn="ctr"/>
-          </a:p>
-        </p:txBody>
-      </p:sp>
-      <p:sp>
-        <p:nvSpPr>
-          <p:cNvPr id="16" name="장식"/>
-          <p:cNvSpPr/>
-          <p:nvPr/>
-        </p:nvSpPr>
-        <p:spPr>
-          <a:xfrm rot="2400000">
-            <a:off x="6946022" y="1866696"/>
-            <a:ext cx="171093" cy="266145"/>
-          </a:xfrm>
-          <a:prstGeom prst="ellipse">
-            <a:avLst/>
-          </a:prstGeom>
-          <a:solidFill>
-            <a:srgbClr val="B8618C"/>
-          </a:solidFill>
-          <a:ln>
-            <a:noFill/>
-          </a:ln>
-        </p:spPr>
-        <p:txBody>
-          <a:bodyPr rtlCol="0" anchor="ctr"/>
-          <a:lstStyle/>
-          <a:p>
-            <a:pPr algn="ctr"/>
-          </a:p>
-        </p:txBody>
-      </p:sp>
-      <p:sp>
-        <p:nvSpPr>
-          <p:cNvPr id="17" name="장식"/>
-          <p:cNvSpPr/>
-          <p:nvPr/>
-        </p:nvSpPr>
-        <p:spPr>
-          <a:xfrm rot="6720000">
-            <a:off x="6992878" y="2054626"/>
-            <a:ext cx="171093" cy="266145"/>
-          </a:xfrm>
-          <a:prstGeom prst="ellipse">
-            <a:avLst/>
-          </a:prstGeom>
-          <a:solidFill>
-            <a:srgbClr val="EED3E0"/>
-          </a:solidFill>
-          <a:ln>
-            <a:noFill/>
-          </a:ln>
-        </p:spPr>
-        <p:txBody>
-          <a:bodyPr rtlCol="0" anchor="ctr"/>
-          <a:lstStyle/>
-          <a:p>
-            <a:pPr algn="ctr"/>
-          </a:p>
-        </p:txBody>
-      </p:sp>
-      <p:sp>
-        <p:nvSpPr>
-          <p:cNvPr id="18" name="장식"/>
-          <p:cNvSpPr/>
-          <p:nvPr/>
-        </p:nvSpPr>
-        <p:spPr>
-          <a:xfrm rot="11040000">
-            <a:off x="6828626" y="2157262"/>
-            <a:ext cx="171093" cy="266145"/>
-          </a:xfrm>
-          <a:prstGeom prst="ellipse">
-            <a:avLst/>
-          </a:prstGeom>
-          <a:solidFill>
-            <a:srgbClr val="B8618C"/>
-          </a:solidFill>
-          <a:ln>
-            <a:noFill/>
-          </a:ln>
-        </p:spPr>
-        <p:txBody>
-          <a:bodyPr rtlCol="0" anchor="ctr"/>
-          <a:lstStyle/>
-          <a:p>
-            <a:pPr algn="ctr"/>
-          </a:p>
-        </p:txBody>
-      </p:sp>
-      <p:sp>
-        <p:nvSpPr>
-          <p:cNvPr id="19" name="장식"/>
-          <p:cNvSpPr/>
-          <p:nvPr/>
-        </p:nvSpPr>
-        <p:spPr>
-          <a:xfrm rot="15360000">
-            <a:off x="6680256" y="2032765"/>
-            <a:ext cx="171093" cy="266145"/>
-          </a:xfrm>
-          <a:prstGeom prst="ellipse">
-            <a:avLst/>
-          </a:prstGeom>
-          <a:solidFill>
-            <a:srgbClr val="EED3E0"/>
-          </a:solidFill>
-          <a:ln>
-            <a:noFill/>
-          </a:ln>
-        </p:spPr>
-        <p:txBody>
-          <a:bodyPr rtlCol="0" anchor="ctr"/>
-          <a:lstStyle/>
-          <a:p>
-            <a:pPr algn="ctr"/>
-          </a:p>
-        </p:txBody>
-      </p:sp>
-      <p:sp>
-        <p:nvSpPr>
-          <p:cNvPr id="20" name="장식"/>
-          <p:cNvSpPr/>
-          <p:nvPr/>
-        </p:nvSpPr>
-        <p:spPr>
-          <a:xfrm rot="19680000">
-            <a:off x="6752811" y="1853185"/>
-            <a:ext cx="171093" cy="266145"/>
-          </a:xfrm>
-          <a:prstGeom prst="ellipse">
-            <a:avLst/>
-          </a:prstGeom>
-          <a:solidFill>
-            <a:srgbClr val="B8618C"/>
-          </a:solidFill>
-          <a:ln>
-            <a:noFill/>
-          </a:ln>
-        </p:spPr>
-        <p:txBody>
-          <a:bodyPr rtlCol="0" anchor="ctr"/>
-          <a:lstStyle/>
-          <a:p>
-            <a:pPr algn="ctr"/>
-          </a:p>
-        </p:txBody>
-      </p:sp>
-      <p:sp>
-        <p:nvSpPr>
-          <p:cNvPr id="21" name="장식"/>
-          <p:cNvSpPr/>
-          <p:nvPr/>
-        </p:nvSpPr>
-        <p:spPr>
-          <a:xfrm>
-            <a:off x="6868634" y="2068948"/>
-            <a:ext cx="114062" cy="114062"/>
-          </a:xfrm>
-          <a:prstGeom prst="ellipse">
-            <a:avLst/>
-          </a:prstGeom>
-          <a:solidFill>
-            <a:srgbClr val="3F8D3F"/>
-          </a:solidFill>
-          <a:ln>
-            <a:noFill/>
-          </a:ln>
-        </p:spPr>
-        <p:txBody>
-          <a:bodyPr rtlCol="0" anchor="ctr"/>
-          <a:lstStyle/>
-          <a:p>
-            <a:pPr algn="ctr"/>
-          </a:p>
-        </p:txBody>
-      </p:sp>
+        </p:spPr>
+      </p:pic>
       <p:sp>
         <p:nvSpPr>
           <p:cNvPr id="2" name="Title 1"/>
@@ -8836,8 +5674,8 @@
         </p:nvSpPr>
         <p:spPr>
           <a:xfrm>
-            <a:off x="1463003" y="2263140"/>
-            <a:ext cx="9265688" cy="1371600"/>
+            <a:off x="853418" y="2057400"/>
+            <a:ext cx="6095847" cy="1554480"/>
           </a:xfrm>
         </p:spPr>
         <p:txBody>
@@ -8846,7 +5684,7 @@
           </a:bodyPr>
           <a:lstStyle/>
           <a:p>
-            <a:pPr algn="ctr">
+            <a:pPr algn="l">
               <a:lnSpc>
                 <a:spcPct val="105000"/>
               </a:lnSpc>
@@ -8857,21 +5695,21 @@
                   <a:srgbClr val="7B3759"/>
                 </a:solidFill>
               </a:rPr>
-              <a:t>우리 가족을 소개했어요</a:t>
-            </a:r>
-          </a:p>
-        </p:txBody>
-      </p:sp>
-      <p:sp>
-        <p:nvSpPr>
-          <p:cNvPr id="22" name="한 줄 문구"/>
+              <a:t>우리 가족 소개를 마칩니다</a:t>
+            </a:r>
+          </a:p>
+        </p:txBody>
+      </p:sp>
+      <p:sp>
+        <p:nvSpPr>
+          <p:cNvPr id="4" name="한 줄 문구"/>
           <p:cNvSpPr txBox="1"/>
           <p:nvPr/>
         </p:nvSpPr>
         <p:spPr>
           <a:xfrm>
-            <a:off x="1463003" y="3726180"/>
-            <a:ext cx="9265688" cy="822960"/>
+            <a:off x="853418" y="3749039"/>
+            <a:ext cx="6095847" cy="822960"/>
           </a:xfrm>
           <a:prstGeom prst="rect">
             <a:avLst/>
@@ -8884,7 +5722,7 @@
           </a:bodyPr>
           <a:lstStyle/>
           <a:p>
-            <a:pPr algn="ctr">
+            <a:pPr algn="l">
               <a:lnSpc>
                 <a:spcPct val="115000"/>
               </a:lnSpc>
@@ -8895,21 +5733,21 @@
                   <a:srgbClr val="7B3759"/>
                 </a:solidFill>
               </a:rPr>
-              <a:t>함께여서 늘 든든합니다</a:t>
-            </a:r>
-          </a:p>
-        </p:txBody>
-      </p:sp>
-      <p:sp>
-        <p:nvSpPr>
-          <p:cNvPr id="23" name="안내 문구"/>
+              <a:t>읽어 주셔서 고맙습니다</a:t>
+            </a:r>
+          </a:p>
+        </p:txBody>
+      </p:sp>
+      <p:sp>
+        <p:nvSpPr>
+          <p:cNvPr id="5" name="안내 문구"/>
           <p:cNvSpPr txBox="1"/>
           <p:nvPr/>
         </p:nvSpPr>
         <p:spPr>
           <a:xfrm>
-            <a:off x="1463003" y="4594860"/>
-            <a:ext cx="9265688" cy="914400"/>
+            <a:off x="853418" y="4617720"/>
+            <a:ext cx="6095847" cy="914400"/>
           </a:xfrm>
           <a:prstGeom prst="rect">
             <a:avLst/>
@@ -8922,7 +5760,7 @@
           </a:bodyPr>
           <a:lstStyle/>
           <a:p>
-            <a:pPr algn="ctr">
+            <a:pPr algn="l">
               <a:lnSpc>
                 <a:spcPct val="115000"/>
               </a:lnSpc>

--- a/public/fun/pack/pptx/family/가족소개_25_반려동물과함께_연꽃연못.pptx
+++ b/public/fun/pack/pptx/family/가족소개_25_반려동물과함께_연꽃연못.pptx
@@ -3347,7 +3347,7 @@
             <a:r>
               <a:rPr sz="3600" b="1" i="0">
                 <a:solidFill>
-                  <a:srgbClr val="7B3759"/>
+                  <a:srgbClr val="1D115F"/>
                 </a:solidFill>
               </a:rPr>
               <a:t>우리 가족을 소개합니다</a:t>
@@ -3385,7 +3385,7 @@
             <a:r>
               <a:rPr sz="1700" b="0" i="1">
                 <a:solidFill>
-                  <a:srgbClr val="7B3759"/>
+                  <a:srgbClr val="1D115F"/>
                 </a:solidFill>
               </a:rPr>
               <a:t>연꽃 연못 앞에서 멈춰 선 모습</a:t>
@@ -3445,7 +3445,7 @@
     <p:bg>
       <p:bgPr>
         <a:solidFill>
-          <a:srgbClr val="B8618C"/>
+          <a:srgbClr val="3D26C5"/>
         </a:solidFill>
         <a:effectLst/>
       </p:bgPr>
@@ -3518,7 +3518,7 @@
             <a:r>
               <a:rPr sz="3000" b="1" i="0">
                 <a:solidFill>
-                  <a:srgbClr val="7B3759"/>
+                  <a:srgbClr val="1D115F"/>
                 </a:solidFill>
               </a:rPr>
               <a:t>가족 구성원</a:t>
@@ -3541,11 +3541,11 @@
             <a:avLst/>
           </a:prstGeom>
           <a:solidFill>
-            <a:srgbClr val="EED3E0"/>
+            <a:srgbClr val="D7D1FA"/>
           </a:solidFill>
           <a:ln w="19050">
             <a:solidFill>
-              <a:srgbClr val="B8618C"/>
+              <a:srgbClr val="3D26C5"/>
             </a:solidFill>
             <a:prstDash val="dash"/>
           </a:ln>
@@ -3564,7 +3564,7 @@
             <a:r>
               <a:rPr sz="1200" b="0" i="0">
                 <a:solidFill>
-                  <a:srgbClr val="7B3759"/>
+                  <a:srgbClr val="1D115F"/>
                 </a:solidFill>
               </a:rPr>
               <a:t>사진</a:t>
@@ -3602,7 +3602,7 @@
             <a:r>
               <a:rPr sz="1600" b="1" i="0">
                 <a:solidFill>
-                  <a:srgbClr val="7B3759"/>
+                  <a:srgbClr val="1D115F"/>
                 </a:solidFill>
               </a:rPr>
               <a:t>보호자 1</a:t>
@@ -3693,11 +3693,11 @@
             <a:avLst/>
           </a:prstGeom>
           <a:solidFill>
-            <a:srgbClr val="EED3E0"/>
+            <a:srgbClr val="D7D1FA"/>
           </a:solidFill>
           <a:ln w="19050">
             <a:solidFill>
-              <a:srgbClr val="B8618C"/>
+              <a:srgbClr val="3D26C5"/>
             </a:solidFill>
             <a:prstDash val="dash"/>
           </a:ln>
@@ -3716,7 +3716,7 @@
             <a:r>
               <a:rPr sz="1200" b="0" i="0">
                 <a:solidFill>
-                  <a:srgbClr val="7B3759"/>
+                  <a:srgbClr val="1D115F"/>
                 </a:solidFill>
               </a:rPr>
               <a:t>사진</a:t>
@@ -3754,7 +3754,7 @@
             <a:r>
               <a:rPr sz="1600" b="1" i="0">
                 <a:solidFill>
-                  <a:srgbClr val="7B3759"/>
+                  <a:srgbClr val="1D115F"/>
                 </a:solidFill>
               </a:rPr>
               <a:t>보호자 2</a:t>
@@ -3845,11 +3845,11 @@
             <a:avLst/>
           </a:prstGeom>
           <a:solidFill>
-            <a:srgbClr val="EED3E0"/>
+            <a:srgbClr val="D7D1FA"/>
           </a:solidFill>
           <a:ln w="19050">
             <a:solidFill>
-              <a:srgbClr val="B8618C"/>
+              <a:srgbClr val="3D26C5"/>
             </a:solidFill>
             <a:prstDash val="dash"/>
           </a:ln>
@@ -3868,7 +3868,7 @@
             <a:r>
               <a:rPr sz="1200" b="0" i="0">
                 <a:solidFill>
-                  <a:srgbClr val="7B3759"/>
+                  <a:srgbClr val="1D115F"/>
                 </a:solidFill>
               </a:rPr>
               <a:t>사진</a:t>
@@ -3906,7 +3906,7 @@
             <a:r>
               <a:rPr sz="1600" b="1" i="0">
                 <a:solidFill>
-                  <a:srgbClr val="7B3759"/>
+                  <a:srgbClr val="1D115F"/>
                 </a:solidFill>
               </a:rPr>
               <a:t>우리 반려동물</a:t>
@@ -3996,7 +3996,7 @@
     <p:bg>
       <p:bgPr>
         <a:solidFill>
-          <a:srgbClr val="B8618C"/>
+          <a:srgbClr val="3D26C5"/>
         </a:solidFill>
         <a:effectLst/>
       </p:bgPr>
@@ -4069,7 +4069,7 @@
             <a:r>
               <a:rPr sz="3000" b="1" i="0">
                 <a:solidFill>
-                  <a:srgbClr val="7B3759"/>
+                  <a:srgbClr val="1D115F"/>
                 </a:solidFill>
               </a:rPr>
               <a:t>우리 가족 이야기</a:t>
@@ -4092,7 +4092,7 @@
             <a:avLst/>
           </a:prstGeom>
           <a:solidFill>
-            <a:srgbClr val="EED3E0"/>
+            <a:srgbClr val="D7D1FA"/>
           </a:solidFill>
           <a:ln>
             <a:noFill/>
@@ -4121,7 +4121,7 @@
             <a:avLst/>
           </a:prstGeom>
           <a:solidFill>
-            <a:srgbClr val="B8618C"/>
+            <a:srgbClr val="3D26C5"/>
           </a:solidFill>
           <a:ln w="38100">
             <a:solidFill>
@@ -4167,7 +4167,7 @@
             <a:r>
               <a:rPr sz="1600" b="1" i="0">
                 <a:solidFill>
-                  <a:srgbClr val="B8618C"/>
+                  <a:srgbClr val="3D26C5"/>
                 </a:solidFill>
               </a:rPr>
               <a:t>처음 만난 날</a:t>
@@ -4205,7 +4205,7 @@
             <a:r>
               <a:rPr sz="1800" b="1" i="0">
                 <a:solidFill>
-                  <a:srgbClr val="7B3759"/>
+                  <a:srgbClr val="1D115F"/>
                 </a:solidFill>
               </a:rPr>
               <a:t>우리의 인연</a:t>
@@ -4266,7 +4266,7 @@
             <a:avLst/>
           </a:prstGeom>
           <a:solidFill>
-            <a:srgbClr val="B8618C"/>
+            <a:srgbClr val="3D26C5"/>
           </a:solidFill>
           <a:ln w="38100">
             <a:solidFill>
@@ -4312,7 +4312,7 @@
             <a:r>
               <a:rPr sz="1600" b="1" i="0">
                 <a:solidFill>
-                  <a:srgbClr val="B8618C"/>
+                  <a:srgbClr val="3D26C5"/>
                 </a:solidFill>
               </a:rPr>
               <a:t>첫 산책</a:t>
@@ -4350,7 +4350,7 @@
             <a:r>
               <a:rPr sz="1800" b="1" i="0">
                 <a:solidFill>
-                  <a:srgbClr val="7B3759"/>
+                  <a:srgbClr val="1D115F"/>
                 </a:solidFill>
               </a:rPr>
               <a:t>함께한 첫 걸음</a:t>
@@ -4411,7 +4411,7 @@
             <a:avLst/>
           </a:prstGeom>
           <a:solidFill>
-            <a:srgbClr val="B8618C"/>
+            <a:srgbClr val="3D26C5"/>
           </a:solidFill>
           <a:ln w="38100">
             <a:solidFill>
@@ -4457,7 +4457,7 @@
             <a:r>
               <a:rPr sz="1600" b="1" i="0">
                 <a:solidFill>
-                  <a:srgbClr val="B8618C"/>
+                  <a:srgbClr val="3D26C5"/>
                 </a:solidFill>
               </a:rPr>
               <a:t>가장 웃었던 날</a:t>
@@ -4495,7 +4495,7 @@
             <a:r>
               <a:rPr sz="1800" b="1" i="0">
                 <a:solidFill>
-                  <a:srgbClr val="7B3759"/>
+                  <a:srgbClr val="1D115F"/>
                 </a:solidFill>
               </a:rPr>
               <a:t>잊지 못할 순간</a:t>
@@ -4556,7 +4556,7 @@
             <a:avLst/>
           </a:prstGeom>
           <a:solidFill>
-            <a:srgbClr val="B8618C"/>
+            <a:srgbClr val="3D26C5"/>
           </a:solidFill>
           <a:ln w="38100">
             <a:solidFill>
@@ -4602,7 +4602,7 @@
             <a:r>
               <a:rPr sz="1600" b="1" i="0">
                 <a:solidFill>
-                  <a:srgbClr val="B8618C"/>
+                  <a:srgbClr val="3D26C5"/>
                 </a:solidFill>
               </a:rPr>
               <a:t>지금</a:t>
@@ -4640,7 +4640,7 @@
             <a:r>
               <a:rPr sz="1800" b="1" i="0">
                 <a:solidFill>
-                  <a:srgbClr val="7B3759"/>
+                  <a:srgbClr val="1D115F"/>
                 </a:solidFill>
               </a:rPr>
               <a:t>오늘의 우리</a:t>
@@ -4700,7 +4700,7 @@
     <p:bg>
       <p:bgPr>
         <a:solidFill>
-          <a:srgbClr val="B8618C"/>
+          <a:srgbClr val="3D26C5"/>
         </a:solidFill>
         <a:effectLst/>
       </p:bgPr>
@@ -4773,7 +4773,7 @@
             <a:r>
               <a:rPr sz="3000" b="1" i="0">
                 <a:solidFill>
-                  <a:srgbClr val="7B3759"/>
+                  <a:srgbClr val="1D115F"/>
                 </a:solidFill>
               </a:rPr>
               <a:t>우리 가족의 약속</a:t>
@@ -4798,11 +4798,11 @@
             </a:avLst>
           </a:prstGeom>
           <a:solidFill>
-            <a:srgbClr val="F9F1F5"/>
+            <a:srgbClr val="F0EEFC"/>
           </a:solidFill>
           <a:ln w="12700">
             <a:solidFill>
-              <a:srgbClr val="EED3E0"/>
+              <a:srgbClr val="D7D1FA"/>
             </a:solidFill>
           </a:ln>
         </p:spPr>
@@ -4829,7 +4829,7 @@
             <a:avLst/>
           </a:prstGeom>
           <a:solidFill>
-            <a:srgbClr val="B8618C"/>
+            <a:srgbClr val="3D26C5"/>
           </a:solidFill>
           <a:ln>
             <a:noFill/>
@@ -4887,7 +4887,7 @@
             <a:r>
               <a:rPr sz="1800" b="1" i="0">
                 <a:solidFill>
-                  <a:srgbClr val="7B3759"/>
+                  <a:srgbClr val="1D115F"/>
                 </a:solidFill>
               </a:rPr>
               <a:t>약속 1</a:t>
@@ -4950,11 +4950,11 @@
             </a:avLst>
           </a:prstGeom>
           <a:solidFill>
-            <a:srgbClr val="F9F1F5"/>
+            <a:srgbClr val="F0EEFC"/>
           </a:solidFill>
           <a:ln w="12700">
             <a:solidFill>
-              <a:srgbClr val="EED3E0"/>
+              <a:srgbClr val="D7D1FA"/>
             </a:solidFill>
           </a:ln>
         </p:spPr>
@@ -4981,7 +4981,7 @@
             <a:avLst/>
           </a:prstGeom>
           <a:solidFill>
-            <a:srgbClr val="B8618C"/>
+            <a:srgbClr val="3D26C5"/>
           </a:solidFill>
           <a:ln>
             <a:noFill/>
@@ -5039,7 +5039,7 @@
             <a:r>
               <a:rPr sz="1800" b="1" i="0">
                 <a:solidFill>
-                  <a:srgbClr val="7B3759"/>
+                  <a:srgbClr val="1D115F"/>
                 </a:solidFill>
               </a:rPr>
               <a:t>약속 2</a:t>
@@ -5102,11 +5102,11 @@
             </a:avLst>
           </a:prstGeom>
           <a:solidFill>
-            <a:srgbClr val="F9F1F5"/>
+            <a:srgbClr val="F0EEFC"/>
           </a:solidFill>
           <a:ln w="12700">
             <a:solidFill>
-              <a:srgbClr val="EED3E0"/>
+              <a:srgbClr val="D7D1FA"/>
             </a:solidFill>
           </a:ln>
         </p:spPr>
@@ -5133,7 +5133,7 @@
             <a:avLst/>
           </a:prstGeom>
           <a:solidFill>
-            <a:srgbClr val="B8618C"/>
+            <a:srgbClr val="3D26C5"/>
           </a:solidFill>
           <a:ln>
             <a:noFill/>
@@ -5191,7 +5191,7 @@
             <a:r>
               <a:rPr sz="1800" b="1" i="0">
                 <a:solidFill>
-                  <a:srgbClr val="7B3759"/>
+                  <a:srgbClr val="1D115F"/>
                 </a:solidFill>
               </a:rPr>
               <a:t>약속 3</a:t>
@@ -5251,7 +5251,7 @@
     <p:bg>
       <p:bgPr>
         <a:solidFill>
-          <a:srgbClr val="B8618C"/>
+          <a:srgbClr val="3D26C5"/>
         </a:solidFill>
         <a:effectLst/>
       </p:bgPr>
@@ -5324,7 +5324,7 @@
             <a:r>
               <a:rPr sz="3000" b="1" i="0">
                 <a:solidFill>
-                  <a:srgbClr val="7B3759"/>
+                  <a:srgbClr val="1D115F"/>
                 </a:solidFill>
               </a:rPr>
               <a:t>가족 사진</a:t>
@@ -5349,11 +5349,11 @@
             </a:avLst>
           </a:prstGeom>
           <a:solidFill>
-            <a:srgbClr val="EED3E0"/>
+            <a:srgbClr val="D7D1FA"/>
           </a:solidFill>
           <a:ln w="19050">
             <a:solidFill>
-              <a:srgbClr val="B8618C"/>
+              <a:srgbClr val="3D26C5"/>
             </a:solidFill>
             <a:prstDash val="dash"/>
           </a:ln>
@@ -5372,7 +5372,7 @@
             <a:r>
               <a:rPr sz="1200" b="0" i="0">
                 <a:solidFill>
-                  <a:srgbClr val="7B3759"/>
+                  <a:srgbClr val="1D115F"/>
                 </a:solidFill>
               </a:rPr>
               <a:t>사진 1</a:t>
@@ -5397,11 +5397,11 @@
             </a:avLst>
           </a:prstGeom>
           <a:solidFill>
-            <a:srgbClr val="EED3E0"/>
+            <a:srgbClr val="D7D1FA"/>
           </a:solidFill>
           <a:ln w="19050">
             <a:solidFill>
-              <a:srgbClr val="B8618C"/>
+              <a:srgbClr val="3D26C5"/>
             </a:solidFill>
             <a:prstDash val="dash"/>
           </a:ln>
@@ -5420,7 +5420,7 @@
             <a:r>
               <a:rPr sz="1200" b="0" i="0">
                 <a:solidFill>
-                  <a:srgbClr val="7B3759"/>
+                  <a:srgbClr val="1D115F"/>
                 </a:solidFill>
               </a:rPr>
               <a:t>사진 2</a:t>
@@ -5445,11 +5445,11 @@
             </a:avLst>
           </a:prstGeom>
           <a:solidFill>
-            <a:srgbClr val="EED3E0"/>
+            <a:srgbClr val="D7D1FA"/>
           </a:solidFill>
           <a:ln w="19050">
             <a:solidFill>
-              <a:srgbClr val="B8618C"/>
+              <a:srgbClr val="3D26C5"/>
             </a:solidFill>
             <a:prstDash val="dash"/>
           </a:ln>
@@ -5468,7 +5468,7 @@
             <a:r>
               <a:rPr sz="1200" b="0" i="0">
                 <a:solidFill>
-                  <a:srgbClr val="7B3759"/>
+                  <a:srgbClr val="1D115F"/>
                 </a:solidFill>
               </a:rPr>
               <a:t>사진 3</a:t>
@@ -5493,11 +5493,11 @@
             </a:avLst>
           </a:prstGeom>
           <a:solidFill>
-            <a:srgbClr val="EED3E0"/>
+            <a:srgbClr val="D7D1FA"/>
           </a:solidFill>
           <a:ln w="19050">
             <a:solidFill>
-              <a:srgbClr val="B8618C"/>
+              <a:srgbClr val="3D26C5"/>
             </a:solidFill>
             <a:prstDash val="dash"/>
           </a:ln>
@@ -5516,7 +5516,7 @@
             <a:r>
               <a:rPr sz="1200" b="0" i="0">
                 <a:solidFill>
-                  <a:srgbClr val="7B3759"/>
+                  <a:srgbClr val="1D115F"/>
                 </a:solidFill>
               </a:rPr>
               <a:t>사진 4</a:t>
@@ -5541,11 +5541,11 @@
             </a:avLst>
           </a:prstGeom>
           <a:solidFill>
-            <a:srgbClr val="EED3E0"/>
+            <a:srgbClr val="D7D1FA"/>
           </a:solidFill>
           <a:ln w="19050">
             <a:solidFill>
-              <a:srgbClr val="B8618C"/>
+              <a:srgbClr val="3D26C5"/>
             </a:solidFill>
             <a:prstDash val="dash"/>
           </a:ln>
@@ -5564,7 +5564,7 @@
             <a:r>
               <a:rPr sz="1200" b="0" i="0">
                 <a:solidFill>
-                  <a:srgbClr val="7B3759"/>
+                  <a:srgbClr val="1D115F"/>
                 </a:solidFill>
               </a:rPr>
               <a:t>사진 5</a:t>
@@ -5589,11 +5589,11 @@
             </a:avLst>
           </a:prstGeom>
           <a:solidFill>
-            <a:srgbClr val="EED3E0"/>
+            <a:srgbClr val="D7D1FA"/>
           </a:solidFill>
           <a:ln w="19050">
             <a:solidFill>
-              <a:srgbClr val="B8618C"/>
+              <a:srgbClr val="3D26C5"/>
             </a:solidFill>
             <a:prstDash val="dash"/>
           </a:ln>
@@ -5612,7 +5612,7 @@
             <a:r>
               <a:rPr sz="1200" b="0" i="0">
                 <a:solidFill>
-                  <a:srgbClr val="7B3759"/>
+                  <a:srgbClr val="1D115F"/>
                 </a:solidFill>
               </a:rPr>
               <a:t>사진 6</a:t>
@@ -5692,7 +5692,7 @@
             <a:r>
               <a:rPr sz="3600" b="1" i="0">
                 <a:solidFill>
-                  <a:srgbClr val="7B3759"/>
+                  <a:srgbClr val="1D115F"/>
                 </a:solidFill>
               </a:rPr>
               <a:t>우리 가족 소개를 마칩니다</a:t>
@@ -5730,7 +5730,7 @@
             <a:r>
               <a:rPr sz="1700" b="0" i="1">
                 <a:solidFill>
-                  <a:srgbClr val="7B3759"/>
+                  <a:srgbClr val="1D115F"/>
                 </a:solidFill>
               </a:rPr>
               <a:t>읽어 주셔서 고맙습니다</a:t>
@@ -5795,34 +5795,34 @@
         <a:sysClr val="window" lastClr="FFFFFF"/>
       </a:lt1>
       <a:dk2>
-        <a:srgbClr val="7B3759"/>
+        <a:srgbClr val="1D115F"/>
       </a:dk2>
       <a:lt2>
-        <a:srgbClr val="F9F1F5"/>
+        <a:srgbClr val="F0EEFC"/>
       </a:lt2>
       <a:accent1>
-        <a:srgbClr val="B8618C"/>
+        <a:srgbClr val="3D26C5"/>
       </a:accent1>
       <a:accent2>
-        <a:srgbClr val="3F8D3F"/>
+        <a:srgbClr val="209DB6"/>
       </a:accent2>
       <a:accent3>
-        <a:srgbClr val="7B3759"/>
+        <a:srgbClr val="1D115F"/>
       </a:accent3>
       <a:accent4>
-        <a:srgbClr val="EED3E0"/>
+        <a:srgbClr val="D7D1FA"/>
       </a:accent4>
       <a:accent5>
-        <a:srgbClr val="7C7766"/>
+        <a:srgbClr val="2E62BE"/>
       </a:accent5>
       <a:accent6>
-        <a:srgbClr val="B0879B"/>
+        <a:srgbClr val="77709F"/>
       </a:accent6>
       <a:hlink>
-        <a:srgbClr val="B8618C"/>
+        <a:srgbClr val="3D26C5"/>
       </a:hlink>
       <a:folHlink>
-        <a:srgbClr val="7B3759"/>
+        <a:srgbClr val="1D115F"/>
       </a:folHlink>
     </a:clrScheme>
     <a:fontScheme name="Office">

--- a/public/fun/pack/pptx/family/가족소개_25_반려동물과함께_연꽃연못.pptx
+++ b/public/fun/pack/pptx/family/가족소개_25_반려동물과함께_연꽃연못.pptx
@@ -3286,6 +3286,14 @@
 <file path=ppt/slides/slide1.xml><?xml version="1.0" encoding="utf-8"?>
 <p:sld xmlns:a="http://schemas.openxmlformats.org/drawingml/2006/main" xmlns:p="http://schemas.openxmlformats.org/presentationml/2006/main" xmlns:r="http://schemas.openxmlformats.org/officeDocument/2006/relationships">
   <p:cSld>
+    <p:bg>
+      <p:bgPr>
+        <a:solidFill>
+          <a:srgbClr val="FDEAF4"/>
+        </a:solidFill>
+        <a:effectLst/>
+      </p:bgPr>
+    </p:bg>
     <p:spTree>
       <p:nvGrpSpPr>
         <p:cNvPr id="1" name=""/>
@@ -3293,30 +3301,116 @@
         <p:nvPr/>
       </p:nvGrpSpPr>
       <p:grpSpPr/>
-      <p:pic>
-        <p:nvPicPr>
-          <p:cNvPr id="3" name="표지 그림" descr="family-25.jpg"/>
-          <p:cNvPicPr>
-            <a:picLocks noChangeAspect="1"/>
-          </p:cNvPicPr>
-          <p:nvPr/>
-        </p:nvPicPr>
-        <p:blipFill>
-          <a:blip r:embed="rId2"/>
-          <a:stretch>
-            <a:fillRect/>
-          </a:stretch>
-        </p:blipFill>
-        <p:spPr>
-          <a:xfrm>
-            <a:off x="0" y="0"/>
-            <a:ext cx="12191695" cy="6858000"/>
+      <p:sp>
+        <p:nvSpPr>
+          <p:cNvPr id="3" name="사진 자리"/>
+          <p:cNvSpPr/>
+          <p:nvPr/>
+        </p:nvSpPr>
+        <p:spPr>
+          <a:xfrm>
+            <a:off x="7802684" y="0"/>
+            <a:ext cx="4389010" cy="6858000"/>
           </a:xfrm>
           <a:prstGeom prst="rect">
             <a:avLst/>
           </a:prstGeom>
-        </p:spPr>
-      </p:pic>
+          <a:solidFill>
+            <a:srgbClr val="F3A5CC"/>
+          </a:solidFill>
+          <a:ln>
+            <a:noFill/>
+          </a:ln>
+        </p:spPr>
+        <p:txBody>
+          <a:bodyPr rtlCol="0" anchor="ctr" wrap="square" lIns="54864" rIns="54864" tIns="27432" bIns="27432">
+            <a:noAutofit/>
+          </a:bodyPr>
+          <a:lstStyle/>
+          <a:p>
+            <a:pPr algn="ctr">
+              <a:lnSpc>
+                <a:spcPct val="100000"/>
+              </a:lnSpc>
+            </a:pPr>
+            <a:r>
+              <a:rPr sz="1400" b="0" i="0">
+                <a:solidFill>
+                  <a:srgbClr val="492738"/>
+                </a:solidFill>
+              </a:rPr>
+              <a:t>사진을 넣어 주세요</a:t>
+            </a:r>
+          </a:p>
+        </p:txBody>
+      </p:sp>
+      <p:sp>
+        <p:nvSpPr>
+          <p:cNvPr id="4" name="장식"/>
+          <p:cNvSpPr/>
+          <p:nvPr/>
+        </p:nvSpPr>
+        <p:spPr>
+          <a:xfrm>
+            <a:off x="8168435" y="365760"/>
+            <a:ext cx="3657508" cy="6126480"/>
+          </a:xfrm>
+          <a:prstGeom prst="rect">
+            <a:avLst/>
+          </a:prstGeom>
+          <a:noFill/>
+          <a:ln w="9525">
+            <a:solidFill>
+              <a:srgbClr val="26231F"/>
+            </a:solidFill>
+          </a:ln>
+        </p:spPr>
+        <p:txBody>
+          <a:bodyPr rtlCol="0" anchor="ctr"/>
+          <a:lstStyle/>
+          <a:p>
+            <a:pPr algn="ctr"/>
+          </a:p>
+        </p:txBody>
+      </p:sp>
+      <p:sp>
+        <p:nvSpPr>
+          <p:cNvPr id="5" name="라벨"/>
+          <p:cNvSpPr txBox="1"/>
+          <p:nvPr/>
+        </p:nvSpPr>
+        <p:spPr>
+          <a:xfrm>
+            <a:off x="822960" y="2148840"/>
+            <a:ext cx="5608179" cy="274320"/>
+          </a:xfrm>
+          <a:prstGeom prst="rect">
+            <a:avLst/>
+          </a:prstGeom>
+          <a:noFill/>
+        </p:spPr>
+        <p:txBody>
+          <a:bodyPr wrap="square" lIns="54864" rIns="54864" tIns="27432" bIns="27432" anchor="t">
+            <a:noAutofit/>
+          </a:bodyPr>
+          <a:lstStyle/>
+          <a:p>
+            <a:pPr algn="l">
+              <a:lnSpc>
+                <a:spcPct val="115000"/>
+              </a:lnSpc>
+            </a:pPr>
+            <a:r>
+              <a:rPr sz="1000" b="1" i="0" spc="250">
+                <a:solidFill>
+                  <a:srgbClr val="26231F"/>
+                </a:solidFill>
+              </a:rPr>
+              <a:t>FAMILY ALBUM</a:t>
+            </a:r>
+          </a:p>
+        </p:txBody>
+      </p:sp>
       <p:sp>
         <p:nvSpPr>
           <p:cNvPr id="2" name="Title 1"/>
@@ -3329,8 +3423,8 @@
         </p:nvSpPr>
         <p:spPr>
           <a:xfrm>
-            <a:off x="853418" y="2057400"/>
-            <a:ext cx="6095847" cy="1554480"/>
+            <a:off x="822960" y="2606040"/>
+            <a:ext cx="5608179" cy="1188720"/>
           </a:xfrm>
         </p:spPr>
         <p:txBody>
@@ -3345,9 +3439,9 @@
               </a:lnSpc>
             </a:pPr>
             <a:r>
-              <a:rPr sz="3600" b="1" i="0">
-                <a:solidFill>
-                  <a:srgbClr val="1D115F"/>
+              <a:rPr sz="4000" b="1" i="0">
+                <a:solidFill>
+                  <a:srgbClr val="26231F"/>
                 </a:solidFill>
               </a:rPr>
               <a:t>우리 가족을 소개합니다</a:t>
@@ -3357,14 +3451,14 @@
       </p:sp>
       <p:sp>
         <p:nvSpPr>
-          <p:cNvPr id="4" name="한 줄 문구"/>
+          <p:cNvPr id="6" name="한 줄 문구"/>
           <p:cNvSpPr txBox="1"/>
           <p:nvPr/>
         </p:nvSpPr>
         <p:spPr>
           <a:xfrm>
-            <a:off x="853418" y="3749039"/>
-            <a:ext cx="6095847" cy="822960"/>
+            <a:off x="822960" y="3886200"/>
+            <a:ext cx="5608179" cy="822960"/>
           </a:xfrm>
           <a:prstGeom prst="rect">
             <a:avLst/>
@@ -3383,9 +3477,9 @@
               </a:lnSpc>
             </a:pPr>
             <a:r>
-              <a:rPr sz="1700" b="0" i="1">
-                <a:solidFill>
-                  <a:srgbClr val="1D115F"/>
+              <a:rPr sz="1700" b="0" i="0">
+                <a:solidFill>
+                  <a:srgbClr val="26231F"/>
                 </a:solidFill>
               </a:rPr>
               <a:t>연꽃 연못 앞에서 멈춰 선 모습</a:t>
@@ -3395,14 +3489,14 @@
       </p:sp>
       <p:sp>
         <p:nvSpPr>
-          <p:cNvPr id="5" name="안내 문구"/>
+          <p:cNvPr id="7" name="안내 문구"/>
           <p:cNvSpPr txBox="1"/>
           <p:nvPr/>
         </p:nvSpPr>
         <p:spPr>
           <a:xfrm>
-            <a:off x="853418" y="4617720"/>
-            <a:ext cx="6095847" cy="914400"/>
+            <a:off x="822960" y="4754880"/>
+            <a:ext cx="5608179" cy="914400"/>
           </a:xfrm>
           <a:prstGeom prst="rect">
             <a:avLst/>
@@ -3423,10 +3517,10 @@
             <a:r>
               <a:rPr sz="1400" b="0" i="0">
                 <a:solidFill>
-                  <a:srgbClr val="666666"/>
+                  <a:srgbClr val="26231F"/>
                 </a:solidFill>
               </a:rPr>
-              <a:t>반려동물과 함께 · 2027. 00. 00</a:t>
+              <a:t>반려동물과 함께 · 날짜 입력</a:t>
             </a:r>
           </a:p>
         </p:txBody>
@@ -3445,7 +3539,7 @@
     <p:bg>
       <p:bgPr>
         <a:solidFill>
-          <a:srgbClr val="3D26C5"/>
+          <a:srgbClr val="FDEAF4"/>
         </a:solidFill>
         <a:effectLst/>
       </p:bgPr>
@@ -3465,13 +3559,78 @@
         </p:nvSpPr>
         <p:spPr>
           <a:xfrm>
-            <a:off x="274320" y="274320"/>
-            <a:ext cx="11643055" cy="6309360"/>
-          </a:xfrm>
-          <a:prstGeom prst="roundRect">
-            <a:avLst>
-              <a:gd name="adj" fmla="val 3500"/>
-            </a:avLst>
+            <a:off x="10180015" y="-1645920"/>
+            <a:ext cx="3474720" cy="3474720"/>
+          </a:xfrm>
+          <a:prstGeom prst="ellipse">
+            <a:avLst/>
+          </a:prstGeom>
+          <a:solidFill>
+            <a:srgbClr val="F3A5CC"/>
+          </a:solidFill>
+          <a:ln>
+            <a:noFill/>
+          </a:ln>
+        </p:spPr>
+        <p:txBody>
+          <a:bodyPr rtlCol="0" anchor="ctr"/>
+          <a:lstStyle/>
+          <a:p>
+            <a:pPr algn="ctr"/>
+          </a:p>
+        </p:txBody>
+      </p:sp>
+      <p:sp>
+        <p:nvSpPr>
+          <p:cNvPr id="4" name="상단 라벨"/>
+          <p:cNvSpPr txBox="1"/>
+          <p:nvPr/>
+        </p:nvSpPr>
+        <p:spPr>
+          <a:xfrm>
+            <a:off x="640080" y="274320"/>
+            <a:ext cx="5486400" cy="274320"/>
+          </a:xfrm>
+          <a:prstGeom prst="rect">
+            <a:avLst/>
+          </a:prstGeom>
+          <a:noFill/>
+        </p:spPr>
+        <p:txBody>
+          <a:bodyPr wrap="square" lIns="54864" rIns="54864" tIns="27432" bIns="27432" anchor="ctr">
+            <a:noAutofit/>
+          </a:bodyPr>
+          <a:lstStyle/>
+          <a:p>
+            <a:pPr algn="l">
+              <a:lnSpc>
+                <a:spcPct val="115000"/>
+              </a:lnSpc>
+            </a:pPr>
+            <a:r>
+              <a:rPr sz="900" b="1" i="0" spc="250">
+                <a:solidFill>
+                  <a:srgbClr val="26231F"/>
+                </a:solidFill>
+              </a:rPr>
+              <a:t>FAMILY ALBUM</a:t>
+            </a:r>
+          </a:p>
+        </p:txBody>
+      </p:sp>
+      <p:sp>
+        <p:nvSpPr>
+          <p:cNvPr id="5" name="포인트"/>
+          <p:cNvSpPr/>
+          <p:nvPr/>
+        </p:nvSpPr>
+        <p:spPr>
+          <a:xfrm>
+            <a:off x="11048695" y="502919"/>
+            <a:ext cx="274320" cy="274320"/>
+          </a:xfrm>
+          <a:prstGeom prst="heart">
+            <a:avLst/>
           </a:prstGeom>
           <a:solidFill>
             <a:srgbClr val="FFFFFF"/>
@@ -3500,8 +3659,8 @@
         </p:nvSpPr>
         <p:spPr>
           <a:xfrm>
-            <a:off x="731520" y="548640"/>
-            <a:ext cx="9448495" cy="868680"/>
+            <a:off x="640080" y="658368"/>
+            <a:ext cx="9082735" cy="868680"/>
           </a:xfrm>
         </p:spPr>
         <p:txBody>
@@ -3518,7 +3677,7 @@
             <a:r>
               <a:rPr sz="3000" b="1" i="0">
                 <a:solidFill>
-                  <a:srgbClr val="1D115F"/>
+                  <a:srgbClr val="26231F"/>
                 </a:solidFill>
               </a:rPr>
               <a:t>가족 구성원</a:t>
@@ -3528,25 +3687,23 @@
       </p:sp>
       <p:sp>
         <p:nvSpPr>
-          <p:cNvPr id="4" name="사진 자리"/>
+          <p:cNvPr id="6" name="사진 자리"/>
           <p:cNvSpPr/>
           <p:nvPr/>
         </p:nvSpPr>
         <p:spPr>
           <a:xfrm>
-            <a:off x="1288999" y="1600200"/>
-            <a:ext cx="2308860" cy="2308860"/>
+            <a:off x="1239469" y="1783080"/>
+            <a:ext cx="2286000" cy="2286000"/>
           </a:xfrm>
           <a:prstGeom prst="ellipse">
             <a:avLst/>
           </a:prstGeom>
           <a:solidFill>
-            <a:srgbClr val="D7D1FA"/>
+            <a:srgbClr val="FAD1E6"/>
           </a:solidFill>
           <a:ln w="19050">
-            <a:solidFill>
-              <a:srgbClr val="3D26C5"/>
-            </a:solidFill>
+            <a:noFill/>
             <a:prstDash val="dash"/>
           </a:ln>
         </p:spPr>
@@ -3564,7 +3721,7 @@
             <a:r>
               <a:rPr sz="1200" b="0" i="0">
                 <a:solidFill>
-                  <a:srgbClr val="1D115F"/>
+                  <a:srgbClr val="8E8780"/>
                 </a:solidFill>
               </a:rPr>
               <a:t>사진</a:t>
@@ -3574,14 +3731,14 @@
       </p:sp>
       <p:sp>
         <p:nvSpPr>
-          <p:cNvPr id="5" name="TextBox 4"/>
+          <p:cNvPr id="7" name="TextBox 6"/>
           <p:cNvSpPr txBox="1"/>
           <p:nvPr/>
         </p:nvSpPr>
         <p:spPr>
           <a:xfrm>
-            <a:off x="731520" y="4000500"/>
-            <a:ext cx="3423818" cy="411480"/>
+            <a:off x="640080" y="4160520"/>
+            <a:ext cx="3484778" cy="411480"/>
           </a:xfrm>
           <a:prstGeom prst="rect">
             <a:avLst/>
@@ -3602,7 +3759,7 @@
             <a:r>
               <a:rPr sz="1600" b="1" i="0">
                 <a:solidFill>
-                  <a:srgbClr val="1D115F"/>
+                  <a:srgbClr val="492738"/>
                 </a:solidFill>
               </a:rPr>
               <a:t>보호자 1</a:t>
@@ -3612,14 +3769,14 @@
       </p:sp>
       <p:sp>
         <p:nvSpPr>
-          <p:cNvPr id="6" name="TextBox 5"/>
+          <p:cNvPr id="8" name="TextBox 7"/>
           <p:cNvSpPr txBox="1"/>
           <p:nvPr/>
         </p:nvSpPr>
         <p:spPr>
           <a:xfrm>
-            <a:off x="822960" y="4457700"/>
-            <a:ext cx="3240938" cy="1760219"/>
+            <a:off x="731519" y="4617720"/>
+            <a:ext cx="3301898" cy="1737360"/>
           </a:xfrm>
           <a:prstGeom prst="rect">
             <a:avLst/>
@@ -3680,25 +3837,23 @@
       </p:sp>
       <p:sp>
         <p:nvSpPr>
-          <p:cNvPr id="7" name="사진 자리"/>
+          <p:cNvPr id="9" name="사진 자리"/>
           <p:cNvSpPr/>
           <p:nvPr/>
         </p:nvSpPr>
         <p:spPr>
           <a:xfrm>
-            <a:off x="4941417" y="1600200"/>
-            <a:ext cx="2308860" cy="2308860"/>
+            <a:off x="4952847" y="1783080"/>
+            <a:ext cx="2286000" cy="2286000"/>
           </a:xfrm>
           <a:prstGeom prst="ellipse">
             <a:avLst/>
           </a:prstGeom>
           <a:solidFill>
-            <a:srgbClr val="D7D1FA"/>
+            <a:srgbClr val="FAD1E6"/>
           </a:solidFill>
           <a:ln w="19050">
-            <a:solidFill>
-              <a:srgbClr val="3D26C5"/>
-            </a:solidFill>
+            <a:noFill/>
             <a:prstDash val="dash"/>
           </a:ln>
         </p:spPr>
@@ -3716,7 +3871,7 @@
             <a:r>
               <a:rPr sz="1200" b="0" i="0">
                 <a:solidFill>
-                  <a:srgbClr val="1D115F"/>
+                  <a:srgbClr val="8E8780"/>
                 </a:solidFill>
               </a:rPr>
               <a:t>사진</a:t>
@@ -3726,14 +3881,14 @@
       </p:sp>
       <p:sp>
         <p:nvSpPr>
-          <p:cNvPr id="8" name="TextBox 7"/>
+          <p:cNvPr id="10" name="TextBox 9"/>
           <p:cNvSpPr txBox="1"/>
           <p:nvPr/>
         </p:nvSpPr>
         <p:spPr>
           <a:xfrm>
-            <a:off x="4383938" y="4000500"/>
-            <a:ext cx="3423818" cy="411480"/>
+            <a:off x="4353458" y="4160520"/>
+            <a:ext cx="3484778" cy="411480"/>
           </a:xfrm>
           <a:prstGeom prst="rect">
             <a:avLst/>
@@ -3754,7 +3909,7 @@
             <a:r>
               <a:rPr sz="1600" b="1" i="0">
                 <a:solidFill>
-                  <a:srgbClr val="1D115F"/>
+                  <a:srgbClr val="492738"/>
                 </a:solidFill>
               </a:rPr>
               <a:t>보호자 2</a:t>
@@ -3764,14 +3919,14 @@
       </p:sp>
       <p:sp>
         <p:nvSpPr>
-          <p:cNvPr id="9" name="TextBox 8"/>
+          <p:cNvPr id="11" name="TextBox 10"/>
           <p:cNvSpPr txBox="1"/>
           <p:nvPr/>
         </p:nvSpPr>
         <p:spPr>
           <a:xfrm>
-            <a:off x="4475378" y="4457700"/>
-            <a:ext cx="3240938" cy="1760219"/>
+            <a:off x="4444898" y="4617720"/>
+            <a:ext cx="3301898" cy="1737360"/>
           </a:xfrm>
           <a:prstGeom prst="rect">
             <a:avLst/>
@@ -3832,25 +3987,23 @@
       </p:sp>
       <p:sp>
         <p:nvSpPr>
-          <p:cNvPr id="10" name="사진 자리"/>
+          <p:cNvPr id="12" name="사진 자리"/>
           <p:cNvSpPr/>
           <p:nvPr/>
         </p:nvSpPr>
         <p:spPr>
           <a:xfrm>
-            <a:off x="8593836" y="1600200"/>
-            <a:ext cx="2308860" cy="2308860"/>
+            <a:off x="8666226" y="1783080"/>
+            <a:ext cx="2286000" cy="2286000"/>
           </a:xfrm>
           <a:prstGeom prst="ellipse">
             <a:avLst/>
           </a:prstGeom>
           <a:solidFill>
-            <a:srgbClr val="D7D1FA"/>
+            <a:srgbClr val="FAD1E6"/>
           </a:solidFill>
           <a:ln w="19050">
-            <a:solidFill>
-              <a:srgbClr val="3D26C5"/>
-            </a:solidFill>
+            <a:noFill/>
             <a:prstDash val="dash"/>
           </a:ln>
         </p:spPr>
@@ -3868,7 +4021,7 @@
             <a:r>
               <a:rPr sz="1200" b="0" i="0">
                 <a:solidFill>
-                  <a:srgbClr val="1D115F"/>
+                  <a:srgbClr val="8E8780"/>
                 </a:solidFill>
               </a:rPr>
               <a:t>사진</a:t>
@@ -3878,14 +4031,14 @@
       </p:sp>
       <p:sp>
         <p:nvSpPr>
-          <p:cNvPr id="11" name="TextBox 10"/>
+          <p:cNvPr id="13" name="TextBox 12"/>
           <p:cNvSpPr txBox="1"/>
           <p:nvPr/>
         </p:nvSpPr>
         <p:spPr>
           <a:xfrm>
-            <a:off x="8036356" y="4000500"/>
-            <a:ext cx="3423818" cy="411480"/>
+            <a:off x="8066836" y="4160520"/>
+            <a:ext cx="3484778" cy="411480"/>
           </a:xfrm>
           <a:prstGeom prst="rect">
             <a:avLst/>
@@ -3906,7 +4059,7 @@
             <a:r>
               <a:rPr sz="1600" b="1" i="0">
                 <a:solidFill>
-                  <a:srgbClr val="1D115F"/>
+                  <a:srgbClr val="492738"/>
                 </a:solidFill>
               </a:rPr>
               <a:t>우리 반려동물</a:t>
@@ -3916,14 +4069,14 @@
       </p:sp>
       <p:sp>
         <p:nvSpPr>
-          <p:cNvPr id="12" name="TextBox 11"/>
+          <p:cNvPr id="14" name="TextBox 13"/>
           <p:cNvSpPr txBox="1"/>
           <p:nvPr/>
         </p:nvSpPr>
         <p:spPr>
           <a:xfrm>
-            <a:off x="8127796" y="4457700"/>
-            <a:ext cx="3240938" cy="1760219"/>
+            <a:off x="8158276" y="4617720"/>
+            <a:ext cx="3301898" cy="1737360"/>
           </a:xfrm>
           <a:prstGeom prst="rect">
             <a:avLst/>
@@ -3996,7 +4149,7 @@
     <p:bg>
       <p:bgPr>
         <a:solidFill>
-          <a:srgbClr val="3D26C5"/>
+          <a:srgbClr val="FDEAF4"/>
         </a:solidFill>
         <a:effectLst/>
       </p:bgPr>
@@ -4016,13 +4169,78 @@
         </p:nvSpPr>
         <p:spPr>
           <a:xfrm>
-            <a:off x="274320" y="274320"/>
-            <a:ext cx="11643055" cy="6309360"/>
-          </a:xfrm>
-          <a:prstGeom prst="roundRect">
-            <a:avLst>
-              <a:gd name="adj" fmla="val 3500"/>
-            </a:avLst>
+            <a:off x="10180015" y="-1645920"/>
+            <a:ext cx="3474720" cy="3474720"/>
+          </a:xfrm>
+          <a:prstGeom prst="ellipse">
+            <a:avLst/>
+          </a:prstGeom>
+          <a:solidFill>
+            <a:srgbClr val="F3A5CC"/>
+          </a:solidFill>
+          <a:ln>
+            <a:noFill/>
+          </a:ln>
+        </p:spPr>
+        <p:txBody>
+          <a:bodyPr rtlCol="0" anchor="ctr"/>
+          <a:lstStyle/>
+          <a:p>
+            <a:pPr algn="ctr"/>
+          </a:p>
+        </p:txBody>
+      </p:sp>
+      <p:sp>
+        <p:nvSpPr>
+          <p:cNvPr id="4" name="상단 라벨"/>
+          <p:cNvSpPr txBox="1"/>
+          <p:nvPr/>
+        </p:nvSpPr>
+        <p:spPr>
+          <a:xfrm>
+            <a:off x="640080" y="274320"/>
+            <a:ext cx="5486400" cy="274320"/>
+          </a:xfrm>
+          <a:prstGeom prst="rect">
+            <a:avLst/>
+          </a:prstGeom>
+          <a:noFill/>
+        </p:spPr>
+        <p:txBody>
+          <a:bodyPr wrap="square" lIns="54864" rIns="54864" tIns="27432" bIns="27432" anchor="ctr">
+            <a:noAutofit/>
+          </a:bodyPr>
+          <a:lstStyle/>
+          <a:p>
+            <a:pPr algn="l">
+              <a:lnSpc>
+                <a:spcPct val="115000"/>
+              </a:lnSpc>
+            </a:pPr>
+            <a:r>
+              <a:rPr sz="900" b="1" i="0" spc="250">
+                <a:solidFill>
+                  <a:srgbClr val="26231F"/>
+                </a:solidFill>
+              </a:rPr>
+              <a:t>FAMILY ALBUM</a:t>
+            </a:r>
+          </a:p>
+        </p:txBody>
+      </p:sp>
+      <p:sp>
+        <p:nvSpPr>
+          <p:cNvPr id="5" name="포인트"/>
+          <p:cNvSpPr/>
+          <p:nvPr/>
+        </p:nvSpPr>
+        <p:spPr>
+          <a:xfrm>
+            <a:off x="11048695" y="502919"/>
+            <a:ext cx="274320" cy="274320"/>
+          </a:xfrm>
+          <a:prstGeom prst="heart">
+            <a:avLst/>
           </a:prstGeom>
           <a:solidFill>
             <a:srgbClr val="FFFFFF"/>
@@ -4051,8 +4269,8 @@
         </p:nvSpPr>
         <p:spPr>
           <a:xfrm>
-            <a:off x="731520" y="548640"/>
-            <a:ext cx="9448495" cy="868680"/>
+            <a:off x="640080" y="658368"/>
+            <a:ext cx="9082735" cy="868680"/>
           </a:xfrm>
         </p:spPr>
         <p:txBody>
@@ -4069,7 +4287,7 @@
             <a:r>
               <a:rPr sz="3000" b="1" i="0">
                 <a:solidFill>
-                  <a:srgbClr val="1D115F"/>
+                  <a:srgbClr val="26231F"/>
                 </a:solidFill>
               </a:rPr>
               <a:t>우리 가족 이야기</a:t>
@@ -4079,20 +4297,20 @@
       </p:sp>
       <p:sp>
         <p:nvSpPr>
-          <p:cNvPr id="4" name="타임라인 선"/>
+          <p:cNvPr id="6" name="타임라인 선"/>
           <p:cNvSpPr/>
           <p:nvPr/>
         </p:nvSpPr>
         <p:spPr>
           <a:xfrm>
-            <a:off x="731520" y="3337560"/>
-            <a:ext cx="10728655" cy="54864"/>
+            <a:off x="640080" y="3520440"/>
+            <a:ext cx="10911535" cy="54864"/>
           </a:xfrm>
           <a:prstGeom prst="rect">
             <a:avLst/>
           </a:prstGeom>
           <a:solidFill>
-            <a:srgbClr val="D7D1FA"/>
+            <a:srgbClr val="FAD1E6"/>
           </a:solidFill>
           <a:ln>
             <a:noFill/>
@@ -4108,20 +4326,20 @@
       </p:sp>
       <p:sp>
         <p:nvSpPr>
-          <p:cNvPr id="5" name="때 1"/>
+          <p:cNvPr id="7" name="때 1"/>
           <p:cNvSpPr/>
           <p:nvPr/>
         </p:nvSpPr>
         <p:spPr>
           <a:xfrm>
-            <a:off x="1871433" y="3154680"/>
+            <a:off x="1802853" y="3337560"/>
             <a:ext cx="402336" cy="402336"/>
           </a:xfrm>
           <a:prstGeom prst="ellipse">
             <a:avLst/>
           </a:prstGeom>
           <a:solidFill>
-            <a:srgbClr val="3D26C5"/>
+            <a:srgbClr val="EA7BB3"/>
           </a:solidFill>
           <a:ln w="38100">
             <a:solidFill>
@@ -4139,14 +4357,14 @@
       </p:sp>
       <p:sp>
         <p:nvSpPr>
-          <p:cNvPr id="6" name="TextBox 5"/>
+          <p:cNvPr id="8" name="TextBox 7"/>
           <p:cNvSpPr txBox="1"/>
           <p:nvPr/>
         </p:nvSpPr>
         <p:spPr>
           <a:xfrm>
-            <a:off x="777240" y="2514600"/>
-            <a:ext cx="2590723" cy="457200"/>
+            <a:off x="685800" y="2697480"/>
+            <a:ext cx="2636443" cy="457200"/>
           </a:xfrm>
           <a:prstGeom prst="rect">
             <a:avLst/>
@@ -4167,7 +4385,7 @@
             <a:r>
               <a:rPr sz="1600" b="1" i="0">
                 <a:solidFill>
-                  <a:srgbClr val="3D26C5"/>
+                  <a:srgbClr val="EA7BB3"/>
                 </a:solidFill>
               </a:rPr>
               <a:t>처음 만난 날</a:t>
@@ -4177,14 +4395,14 @@
       </p:sp>
       <p:sp>
         <p:nvSpPr>
-          <p:cNvPr id="7" name="TextBox 6"/>
+          <p:cNvPr id="9" name="TextBox 8"/>
           <p:cNvSpPr txBox="1"/>
           <p:nvPr/>
         </p:nvSpPr>
         <p:spPr>
           <a:xfrm>
-            <a:off x="822960" y="3703320"/>
-            <a:ext cx="2499283" cy="457200"/>
+            <a:off x="731519" y="3886200"/>
+            <a:ext cx="2545003" cy="457200"/>
           </a:xfrm>
           <a:prstGeom prst="rect">
             <a:avLst/>
@@ -4205,7 +4423,7 @@
             <a:r>
               <a:rPr sz="1800" b="1" i="0">
                 <a:solidFill>
-                  <a:srgbClr val="1D115F"/>
+                  <a:srgbClr val="492738"/>
                 </a:solidFill>
               </a:rPr>
               <a:t>우리의 인연</a:t>
@@ -4215,14 +4433,14 @@
       </p:sp>
       <p:sp>
         <p:nvSpPr>
-          <p:cNvPr id="8" name="TextBox 7"/>
+          <p:cNvPr id="10" name="TextBox 9"/>
           <p:cNvSpPr txBox="1"/>
           <p:nvPr/>
         </p:nvSpPr>
         <p:spPr>
           <a:xfrm>
-            <a:off x="822960" y="4206240"/>
-            <a:ext cx="2499283" cy="1645920"/>
+            <a:off x="731519" y="4389120"/>
+            <a:ext cx="2545003" cy="1645920"/>
           </a:xfrm>
           <a:prstGeom prst="rect">
             <a:avLst/>
@@ -4243,7 +4461,7 @@
             <a:r>
               <a:rPr sz="1500" b="0" i="0">
                 <a:solidFill>
-                  <a:srgbClr val="2B2B2B"/>
+                  <a:srgbClr val="26231F"/>
                 </a:solidFill>
               </a:rPr>
               <a:t>입양하던 날의 이야기</a:t>
@@ -4253,20 +4471,20 @@
       </p:sp>
       <p:sp>
         <p:nvSpPr>
-          <p:cNvPr id="9" name="때 2"/>
+          <p:cNvPr id="11" name="때 2"/>
           <p:cNvSpPr/>
           <p:nvPr/>
         </p:nvSpPr>
         <p:spPr>
           <a:xfrm>
-            <a:off x="4553597" y="3154680"/>
+            <a:off x="4530737" y="3337560"/>
             <a:ext cx="402336" cy="402336"/>
           </a:xfrm>
           <a:prstGeom prst="ellipse">
             <a:avLst/>
           </a:prstGeom>
           <a:solidFill>
-            <a:srgbClr val="3D26C5"/>
+            <a:srgbClr val="EA7BB3"/>
           </a:solidFill>
           <a:ln w="38100">
             <a:solidFill>
@@ -4284,14 +4502,14 @@
       </p:sp>
       <p:sp>
         <p:nvSpPr>
-          <p:cNvPr id="10" name="TextBox 9"/>
+          <p:cNvPr id="12" name="TextBox 11"/>
           <p:cNvSpPr txBox="1"/>
           <p:nvPr/>
         </p:nvSpPr>
         <p:spPr>
           <a:xfrm>
-            <a:off x="3459403" y="2514600"/>
-            <a:ext cx="2590723" cy="457200"/>
+            <a:off x="3413683" y="2697480"/>
+            <a:ext cx="2636443" cy="457200"/>
           </a:xfrm>
           <a:prstGeom prst="rect">
             <a:avLst/>
@@ -4312,7 +4530,7 @@
             <a:r>
               <a:rPr sz="1600" b="1" i="0">
                 <a:solidFill>
-                  <a:srgbClr val="3D26C5"/>
+                  <a:srgbClr val="EA7BB3"/>
                 </a:solidFill>
               </a:rPr>
               <a:t>첫 산책</a:t>
@@ -4322,14 +4540,14 @@
       </p:sp>
       <p:sp>
         <p:nvSpPr>
-          <p:cNvPr id="11" name="TextBox 10"/>
+          <p:cNvPr id="13" name="TextBox 12"/>
           <p:cNvSpPr txBox="1"/>
           <p:nvPr/>
         </p:nvSpPr>
         <p:spPr>
           <a:xfrm>
-            <a:off x="3505123" y="3703320"/>
-            <a:ext cx="2499283" cy="457200"/>
+            <a:off x="3459403" y="3886200"/>
+            <a:ext cx="2545003" cy="457200"/>
           </a:xfrm>
           <a:prstGeom prst="rect">
             <a:avLst/>
@@ -4350,7 +4568,7 @@
             <a:r>
               <a:rPr sz="1800" b="1" i="0">
                 <a:solidFill>
-                  <a:srgbClr val="1D115F"/>
+                  <a:srgbClr val="492738"/>
                 </a:solidFill>
               </a:rPr>
               <a:t>함께한 첫 걸음</a:t>
@@ -4360,14 +4578,14 @@
       </p:sp>
       <p:sp>
         <p:nvSpPr>
-          <p:cNvPr id="12" name="TextBox 11"/>
+          <p:cNvPr id="14" name="TextBox 13"/>
           <p:cNvSpPr txBox="1"/>
           <p:nvPr/>
         </p:nvSpPr>
         <p:spPr>
           <a:xfrm>
-            <a:off x="3505123" y="4206240"/>
-            <a:ext cx="2499283" cy="1645920"/>
+            <a:off x="3459403" y="4389120"/>
+            <a:ext cx="2545003" cy="1645920"/>
           </a:xfrm>
           <a:prstGeom prst="rect">
             <a:avLst/>
@@ -4388,7 +4606,7 @@
             <a:r>
               <a:rPr sz="1500" b="0" i="0">
                 <a:solidFill>
-                  <a:srgbClr val="2B2B2B"/>
+                  <a:srgbClr val="26231F"/>
                 </a:solidFill>
               </a:rPr>
               <a:t>그날의 기억을 적어요</a:t>
@@ -4398,20 +4616,20 @@
       </p:sp>
       <p:sp>
         <p:nvSpPr>
-          <p:cNvPr id="13" name="때 3"/>
+          <p:cNvPr id="15" name="때 3"/>
           <p:cNvSpPr/>
           <p:nvPr/>
         </p:nvSpPr>
         <p:spPr>
           <a:xfrm>
-            <a:off x="7235761" y="3154680"/>
+            <a:off x="7258621" y="3337560"/>
             <a:ext cx="402336" cy="402336"/>
           </a:xfrm>
           <a:prstGeom prst="ellipse">
             <a:avLst/>
           </a:prstGeom>
           <a:solidFill>
-            <a:srgbClr val="3D26C5"/>
+            <a:srgbClr val="EA7BB3"/>
           </a:solidFill>
           <a:ln w="38100">
             <a:solidFill>
@@ -4429,14 +4647,14 @@
       </p:sp>
       <p:sp>
         <p:nvSpPr>
-          <p:cNvPr id="14" name="TextBox 13"/>
+          <p:cNvPr id="16" name="TextBox 15"/>
           <p:cNvSpPr txBox="1"/>
           <p:nvPr/>
         </p:nvSpPr>
         <p:spPr>
           <a:xfrm>
-            <a:off x="6141567" y="2514600"/>
-            <a:ext cx="2590723" cy="457200"/>
+            <a:off x="6141567" y="2697480"/>
+            <a:ext cx="2636443" cy="457200"/>
           </a:xfrm>
           <a:prstGeom prst="rect">
             <a:avLst/>
@@ -4457,7 +4675,7 @@
             <a:r>
               <a:rPr sz="1600" b="1" i="0">
                 <a:solidFill>
-                  <a:srgbClr val="3D26C5"/>
+                  <a:srgbClr val="EA7BB3"/>
                 </a:solidFill>
               </a:rPr>
               <a:t>가장 웃었던 날</a:t>
@@ -4467,14 +4685,14 @@
       </p:sp>
       <p:sp>
         <p:nvSpPr>
-          <p:cNvPr id="15" name="TextBox 14"/>
+          <p:cNvPr id="17" name="TextBox 16"/>
           <p:cNvSpPr txBox="1"/>
           <p:nvPr/>
         </p:nvSpPr>
         <p:spPr>
           <a:xfrm>
-            <a:off x="6187287" y="3703320"/>
-            <a:ext cx="2499283" cy="457200"/>
+            <a:off x="6187287" y="3886200"/>
+            <a:ext cx="2545003" cy="457200"/>
           </a:xfrm>
           <a:prstGeom prst="rect">
             <a:avLst/>
@@ -4495,7 +4713,7 @@
             <a:r>
               <a:rPr sz="1800" b="1" i="0">
                 <a:solidFill>
-                  <a:srgbClr val="1D115F"/>
+                  <a:srgbClr val="492738"/>
                 </a:solidFill>
               </a:rPr>
               <a:t>잊지 못할 순간</a:t>
@@ -4505,14 +4723,14 @@
       </p:sp>
       <p:sp>
         <p:nvSpPr>
-          <p:cNvPr id="16" name="TextBox 15"/>
+          <p:cNvPr id="18" name="TextBox 17"/>
           <p:cNvSpPr txBox="1"/>
           <p:nvPr/>
         </p:nvSpPr>
         <p:spPr>
           <a:xfrm>
-            <a:off x="6187287" y="4206240"/>
-            <a:ext cx="2499283" cy="1645920"/>
+            <a:off x="6187287" y="4389120"/>
+            <a:ext cx="2545003" cy="1645920"/>
           </a:xfrm>
           <a:prstGeom prst="rect">
             <a:avLst/>
@@ -4533,7 +4751,7 @@
             <a:r>
               <a:rPr sz="1500" b="0" i="0">
                 <a:solidFill>
-                  <a:srgbClr val="2B2B2B"/>
+                  <a:srgbClr val="26231F"/>
                 </a:solidFill>
               </a:rPr>
               <a:t>사진으로 남겨 두세요</a:t>
@@ -4543,20 +4761,20 @@
       </p:sp>
       <p:sp>
         <p:nvSpPr>
-          <p:cNvPr id="17" name="때 4"/>
+          <p:cNvPr id="19" name="때 4"/>
           <p:cNvSpPr/>
           <p:nvPr/>
         </p:nvSpPr>
         <p:spPr>
           <a:xfrm>
-            <a:off x="9917925" y="3154680"/>
+            <a:off x="9986505" y="3337560"/>
             <a:ext cx="402336" cy="402336"/>
           </a:xfrm>
           <a:prstGeom prst="ellipse">
             <a:avLst/>
           </a:prstGeom>
           <a:solidFill>
-            <a:srgbClr val="3D26C5"/>
+            <a:srgbClr val="EA7BB3"/>
           </a:solidFill>
           <a:ln w="38100">
             <a:solidFill>
@@ -4574,14 +4792,14 @@
       </p:sp>
       <p:sp>
         <p:nvSpPr>
-          <p:cNvPr id="18" name="TextBox 17"/>
+          <p:cNvPr id="20" name="TextBox 19"/>
           <p:cNvSpPr txBox="1"/>
           <p:nvPr/>
         </p:nvSpPr>
         <p:spPr>
           <a:xfrm>
-            <a:off x="8823731" y="2514600"/>
-            <a:ext cx="2590723" cy="457200"/>
+            <a:off x="8869451" y="2697480"/>
+            <a:ext cx="2636443" cy="457200"/>
           </a:xfrm>
           <a:prstGeom prst="rect">
             <a:avLst/>
@@ -4602,7 +4820,7 @@
             <a:r>
               <a:rPr sz="1600" b="1" i="0">
                 <a:solidFill>
-                  <a:srgbClr val="3D26C5"/>
+                  <a:srgbClr val="EA7BB3"/>
                 </a:solidFill>
               </a:rPr>
               <a:t>지금</a:t>
@@ -4612,14 +4830,14 @@
       </p:sp>
       <p:sp>
         <p:nvSpPr>
-          <p:cNvPr id="19" name="TextBox 18"/>
+          <p:cNvPr id="21" name="TextBox 20"/>
           <p:cNvSpPr txBox="1"/>
           <p:nvPr/>
         </p:nvSpPr>
         <p:spPr>
           <a:xfrm>
-            <a:off x="8869451" y="3703320"/>
-            <a:ext cx="2499283" cy="457200"/>
+            <a:off x="8915171" y="3886200"/>
+            <a:ext cx="2545003" cy="457200"/>
           </a:xfrm>
           <a:prstGeom prst="rect">
             <a:avLst/>
@@ -4640,7 +4858,7 @@
             <a:r>
               <a:rPr sz="1800" b="1" i="0">
                 <a:solidFill>
-                  <a:srgbClr val="1D115F"/>
+                  <a:srgbClr val="492738"/>
                 </a:solidFill>
               </a:rPr>
               <a:t>오늘의 우리</a:t>
@@ -4650,14 +4868,14 @@
       </p:sp>
       <p:sp>
         <p:nvSpPr>
-          <p:cNvPr id="20" name="TextBox 19"/>
+          <p:cNvPr id="22" name="TextBox 21"/>
           <p:cNvSpPr txBox="1"/>
           <p:nvPr/>
         </p:nvSpPr>
         <p:spPr>
           <a:xfrm>
-            <a:off x="8869451" y="4206240"/>
-            <a:ext cx="2499283" cy="1645920"/>
+            <a:off x="8915171" y="4389120"/>
+            <a:ext cx="2545003" cy="1645920"/>
           </a:xfrm>
           <a:prstGeom prst="rect">
             <a:avLst/>
@@ -4678,7 +4896,7 @@
             <a:r>
               <a:rPr sz="1500" b="0" i="0">
                 <a:solidFill>
-                  <a:srgbClr val="2B2B2B"/>
+                  <a:srgbClr val="26231F"/>
                 </a:solidFill>
               </a:rPr>
               <a:t>요즘 우리 이야기</a:t>
@@ -4700,7 +4918,7 @@
     <p:bg>
       <p:bgPr>
         <a:solidFill>
-          <a:srgbClr val="3D26C5"/>
+          <a:srgbClr val="FDEAF4"/>
         </a:solidFill>
         <a:effectLst/>
       </p:bgPr>
@@ -4720,13 +4938,78 @@
         </p:nvSpPr>
         <p:spPr>
           <a:xfrm>
-            <a:off x="274320" y="274320"/>
-            <a:ext cx="11643055" cy="6309360"/>
-          </a:xfrm>
-          <a:prstGeom prst="roundRect">
-            <a:avLst>
-              <a:gd name="adj" fmla="val 3500"/>
-            </a:avLst>
+            <a:off x="10180015" y="-1645920"/>
+            <a:ext cx="3474720" cy="3474720"/>
+          </a:xfrm>
+          <a:prstGeom prst="ellipse">
+            <a:avLst/>
+          </a:prstGeom>
+          <a:solidFill>
+            <a:srgbClr val="F3A5CC"/>
+          </a:solidFill>
+          <a:ln>
+            <a:noFill/>
+          </a:ln>
+        </p:spPr>
+        <p:txBody>
+          <a:bodyPr rtlCol="0" anchor="ctr"/>
+          <a:lstStyle/>
+          <a:p>
+            <a:pPr algn="ctr"/>
+          </a:p>
+        </p:txBody>
+      </p:sp>
+      <p:sp>
+        <p:nvSpPr>
+          <p:cNvPr id="4" name="상단 라벨"/>
+          <p:cNvSpPr txBox="1"/>
+          <p:nvPr/>
+        </p:nvSpPr>
+        <p:spPr>
+          <a:xfrm>
+            <a:off x="640080" y="274320"/>
+            <a:ext cx="5486400" cy="274320"/>
+          </a:xfrm>
+          <a:prstGeom prst="rect">
+            <a:avLst/>
+          </a:prstGeom>
+          <a:noFill/>
+        </p:spPr>
+        <p:txBody>
+          <a:bodyPr wrap="square" lIns="54864" rIns="54864" tIns="27432" bIns="27432" anchor="ctr">
+            <a:noAutofit/>
+          </a:bodyPr>
+          <a:lstStyle/>
+          <a:p>
+            <a:pPr algn="l">
+              <a:lnSpc>
+                <a:spcPct val="115000"/>
+              </a:lnSpc>
+            </a:pPr>
+            <a:r>
+              <a:rPr sz="900" b="1" i="0" spc="250">
+                <a:solidFill>
+                  <a:srgbClr val="26231F"/>
+                </a:solidFill>
+              </a:rPr>
+              <a:t>FAMILY ALBUM</a:t>
+            </a:r>
+          </a:p>
+        </p:txBody>
+      </p:sp>
+      <p:sp>
+        <p:nvSpPr>
+          <p:cNvPr id="5" name="포인트"/>
+          <p:cNvSpPr/>
+          <p:nvPr/>
+        </p:nvSpPr>
+        <p:spPr>
+          <a:xfrm>
+            <a:off x="11048695" y="502919"/>
+            <a:ext cx="274320" cy="274320"/>
+          </a:xfrm>
+          <a:prstGeom prst="heart">
+            <a:avLst/>
           </a:prstGeom>
           <a:solidFill>
             <a:srgbClr val="FFFFFF"/>
@@ -4755,8 +5038,8 @@
         </p:nvSpPr>
         <p:spPr>
           <a:xfrm>
-            <a:off x="731520" y="548640"/>
-            <a:ext cx="9448495" cy="868680"/>
+            <a:off x="640080" y="658368"/>
+            <a:ext cx="9082735" cy="868680"/>
           </a:xfrm>
         </p:spPr>
         <p:txBody>
@@ -4773,7 +5056,7 @@
             <a:r>
               <a:rPr sz="3000" b="1" i="0">
                 <a:solidFill>
-                  <a:srgbClr val="1D115F"/>
+                  <a:srgbClr val="26231F"/>
                 </a:solidFill>
               </a:rPr>
               <a:t>우리 가족의 약속</a:t>
@@ -4783,26 +5066,26 @@
       </p:sp>
       <p:sp>
         <p:nvSpPr>
-          <p:cNvPr id="4" name="줄 1"/>
+          <p:cNvPr id="6" name="줄 1"/>
           <p:cNvSpPr/>
           <p:nvPr/>
         </p:nvSpPr>
         <p:spPr>
           <a:xfrm>
-            <a:off x="731520" y="1600200"/>
-            <a:ext cx="10728655" cy="1005840"/>
+            <a:off x="640080" y="1783080"/>
+            <a:ext cx="10911535" cy="1005840"/>
           </a:xfrm>
           <a:prstGeom prst="roundRect">
             <a:avLst>
-              <a:gd name="adj" fmla="val 8000"/>
+              <a:gd name="adj" fmla="val 3000"/>
             </a:avLst>
           </a:prstGeom>
           <a:solidFill>
-            <a:srgbClr val="F0EEFC"/>
+            <a:srgbClr val="FFFFFF"/>
           </a:solidFill>
-          <a:ln w="12700">
+          <a:ln w="9525">
             <a:solidFill>
-              <a:srgbClr val="D7D1FA"/>
+              <a:srgbClr val="FAD1E6"/>
             </a:solidFill>
           </a:ln>
         </p:spPr>
@@ -4816,20 +5099,49 @@
       </p:sp>
       <p:sp>
         <p:nvSpPr>
-          <p:cNvPr id="5" name="번호 1"/>
+          <p:cNvPr id="7" name="위쪽 띠"/>
           <p:cNvSpPr/>
           <p:nvPr/>
         </p:nvSpPr>
         <p:spPr>
           <a:xfrm>
-            <a:off x="914400" y="1874519"/>
+            <a:off x="649224" y="1792224"/>
+            <a:ext cx="10893247" cy="82296"/>
+          </a:xfrm>
+          <a:prstGeom prst="rect">
+            <a:avLst/>
+          </a:prstGeom>
+          <a:solidFill>
+            <a:srgbClr val="EA7BB3"/>
+          </a:solidFill>
+          <a:ln>
+            <a:noFill/>
+          </a:ln>
+        </p:spPr>
+        <p:txBody>
+          <a:bodyPr rtlCol="0" anchor="ctr"/>
+          <a:lstStyle/>
+          <a:p>
+            <a:pPr algn="ctr"/>
+          </a:p>
+        </p:txBody>
+      </p:sp>
+      <p:sp>
+        <p:nvSpPr>
+          <p:cNvPr id="8" name="번호 1"/>
+          <p:cNvSpPr/>
+          <p:nvPr/>
+        </p:nvSpPr>
+        <p:spPr>
+          <a:xfrm>
+            <a:off x="822959" y="2057400"/>
             <a:ext cx="457200" cy="457200"/>
           </a:xfrm>
           <a:prstGeom prst="ellipse">
             <a:avLst/>
           </a:prstGeom>
           <a:solidFill>
-            <a:srgbClr val="3D26C5"/>
+            <a:srgbClr val="EF9FA1"/>
           </a:solidFill>
           <a:ln>
             <a:noFill/>
@@ -4849,7 +5161,7 @@
             <a:r>
               <a:rPr sz="1600" b="1" i="0">
                 <a:solidFill>
-                  <a:srgbClr val="FFFFFF"/>
+                  <a:srgbClr val="26231F"/>
                 </a:solidFill>
               </a:rPr>
               <a:t>1</a:t>
@@ -4859,13 +5171,13 @@
       </p:sp>
       <p:sp>
         <p:nvSpPr>
-          <p:cNvPr id="6" name="TextBox 5"/>
+          <p:cNvPr id="9" name="TextBox 8"/>
           <p:cNvSpPr txBox="1"/>
           <p:nvPr/>
         </p:nvSpPr>
         <p:spPr>
           <a:xfrm>
-            <a:off x="1600200" y="1645920"/>
+            <a:off x="1508760" y="1828800"/>
             <a:ext cx="2743200" cy="914400"/>
           </a:xfrm>
           <a:prstGeom prst="rect">
@@ -4887,7 +5199,7 @@
             <a:r>
               <a:rPr sz="1800" b="1" i="0">
                 <a:solidFill>
-                  <a:srgbClr val="1D115F"/>
+                  <a:srgbClr val="492738"/>
                 </a:solidFill>
               </a:rPr>
               <a:t>약속 1</a:t>
@@ -4897,14 +5209,14 @@
       </p:sp>
       <p:sp>
         <p:nvSpPr>
-          <p:cNvPr id="7" name="TextBox 6"/>
+          <p:cNvPr id="10" name="TextBox 9"/>
           <p:cNvSpPr txBox="1"/>
           <p:nvPr/>
         </p:nvSpPr>
         <p:spPr>
           <a:xfrm>
-            <a:off x="4389120" y="1645920"/>
-            <a:ext cx="6888175" cy="914400"/>
+            <a:off x="4297680" y="1828800"/>
+            <a:ext cx="7071055" cy="914400"/>
           </a:xfrm>
           <a:prstGeom prst="rect">
             <a:avLst/>
@@ -4925,7 +5237,7 @@
             <a:r>
               <a:rPr sz="1700" b="0" i="0">
                 <a:solidFill>
-                  <a:srgbClr val="2B2B2B"/>
+                  <a:srgbClr val="26231F"/>
                 </a:solidFill>
               </a:rPr>
               <a:t>산책은 하루도 거르지 않기</a:t>
@@ -4935,26 +5247,26 @@
       </p:sp>
       <p:sp>
         <p:nvSpPr>
-          <p:cNvPr id="8" name="줄 2"/>
+          <p:cNvPr id="11" name="줄 2"/>
           <p:cNvSpPr/>
           <p:nvPr/>
         </p:nvSpPr>
         <p:spPr>
           <a:xfrm>
-            <a:off x="731520" y="2743200"/>
-            <a:ext cx="10728655" cy="1005840"/>
+            <a:off x="640080" y="2926080"/>
+            <a:ext cx="10911535" cy="1005840"/>
           </a:xfrm>
           <a:prstGeom prst="roundRect">
             <a:avLst>
-              <a:gd name="adj" fmla="val 8000"/>
+              <a:gd name="adj" fmla="val 3000"/>
             </a:avLst>
           </a:prstGeom>
           <a:solidFill>
-            <a:srgbClr val="F0EEFC"/>
+            <a:srgbClr val="FFFFFF"/>
           </a:solidFill>
-          <a:ln w="12700">
+          <a:ln w="9525">
             <a:solidFill>
-              <a:srgbClr val="D7D1FA"/>
+              <a:srgbClr val="FAD1E6"/>
             </a:solidFill>
           </a:ln>
         </p:spPr>
@@ -4968,20 +5280,49 @@
       </p:sp>
       <p:sp>
         <p:nvSpPr>
-          <p:cNvPr id="9" name="번호 2"/>
+          <p:cNvPr id="12" name="위쪽 띠"/>
           <p:cNvSpPr/>
           <p:nvPr/>
         </p:nvSpPr>
         <p:spPr>
           <a:xfrm>
-            <a:off x="914400" y="3017520"/>
+            <a:off x="649224" y="2935224"/>
+            <a:ext cx="10893247" cy="82296"/>
+          </a:xfrm>
+          <a:prstGeom prst="rect">
+            <a:avLst/>
+          </a:prstGeom>
+          <a:solidFill>
+            <a:srgbClr val="EA7BB3"/>
+          </a:solidFill>
+          <a:ln>
+            <a:noFill/>
+          </a:ln>
+        </p:spPr>
+        <p:txBody>
+          <a:bodyPr rtlCol="0" anchor="ctr"/>
+          <a:lstStyle/>
+          <a:p>
+            <a:pPr algn="ctr"/>
+          </a:p>
+        </p:txBody>
+      </p:sp>
+      <p:sp>
+        <p:nvSpPr>
+          <p:cNvPr id="13" name="번호 2"/>
+          <p:cNvSpPr/>
+          <p:nvPr/>
+        </p:nvSpPr>
+        <p:spPr>
+          <a:xfrm>
+            <a:off x="822959" y="3200400"/>
             <a:ext cx="457200" cy="457200"/>
           </a:xfrm>
           <a:prstGeom prst="ellipse">
             <a:avLst/>
           </a:prstGeom>
           <a:solidFill>
-            <a:srgbClr val="3D26C5"/>
+            <a:srgbClr val="EF9FA1"/>
           </a:solidFill>
           <a:ln>
             <a:noFill/>
@@ -5001,7 +5342,7 @@
             <a:r>
               <a:rPr sz="1600" b="1" i="0">
                 <a:solidFill>
-                  <a:srgbClr val="FFFFFF"/>
+                  <a:srgbClr val="26231F"/>
                 </a:solidFill>
               </a:rPr>
               <a:t>2</a:t>
@@ -5011,13 +5352,13 @@
       </p:sp>
       <p:sp>
         <p:nvSpPr>
-          <p:cNvPr id="10" name="TextBox 9"/>
+          <p:cNvPr id="14" name="TextBox 13"/>
           <p:cNvSpPr txBox="1"/>
           <p:nvPr/>
         </p:nvSpPr>
         <p:spPr>
           <a:xfrm>
-            <a:off x="1600200" y="2788920"/>
+            <a:off x="1508760" y="2971800"/>
             <a:ext cx="2743200" cy="914400"/>
           </a:xfrm>
           <a:prstGeom prst="rect">
@@ -5039,7 +5380,7 @@
             <a:r>
               <a:rPr sz="1800" b="1" i="0">
                 <a:solidFill>
-                  <a:srgbClr val="1D115F"/>
+                  <a:srgbClr val="492738"/>
                 </a:solidFill>
               </a:rPr>
               <a:t>약속 2</a:t>
@@ -5049,14 +5390,14 @@
       </p:sp>
       <p:sp>
         <p:nvSpPr>
-          <p:cNvPr id="11" name="TextBox 10"/>
+          <p:cNvPr id="15" name="TextBox 14"/>
           <p:cNvSpPr txBox="1"/>
           <p:nvPr/>
         </p:nvSpPr>
         <p:spPr>
           <a:xfrm>
-            <a:off x="4389120" y="2788920"/>
-            <a:ext cx="6888175" cy="914400"/>
+            <a:off x="4297680" y="2971800"/>
+            <a:ext cx="7071055" cy="914400"/>
           </a:xfrm>
           <a:prstGeom prst="rect">
             <a:avLst/>
@@ -5077,7 +5418,7 @@
             <a:r>
               <a:rPr sz="1700" b="0" i="0">
                 <a:solidFill>
-                  <a:srgbClr val="2B2B2B"/>
+                  <a:srgbClr val="26231F"/>
                 </a:solidFill>
               </a:rPr>
               <a:t>건강 검진 날짜 챙기기</a:t>
@@ -5087,26 +5428,26 @@
       </p:sp>
       <p:sp>
         <p:nvSpPr>
-          <p:cNvPr id="12" name="줄 3"/>
+          <p:cNvPr id="16" name="줄 3"/>
           <p:cNvSpPr/>
           <p:nvPr/>
         </p:nvSpPr>
         <p:spPr>
           <a:xfrm>
-            <a:off x="731520" y="3886200"/>
-            <a:ext cx="10728655" cy="1005840"/>
+            <a:off x="640080" y="4069080"/>
+            <a:ext cx="10911535" cy="1005840"/>
           </a:xfrm>
           <a:prstGeom prst="roundRect">
             <a:avLst>
-              <a:gd name="adj" fmla="val 8000"/>
+              <a:gd name="adj" fmla="val 3000"/>
             </a:avLst>
           </a:prstGeom>
           <a:solidFill>
-            <a:srgbClr val="F0EEFC"/>
+            <a:srgbClr val="FFFFFF"/>
           </a:solidFill>
-          <a:ln w="12700">
+          <a:ln w="9525">
             <a:solidFill>
-              <a:srgbClr val="D7D1FA"/>
+              <a:srgbClr val="FAD1E6"/>
             </a:solidFill>
           </a:ln>
         </p:spPr>
@@ -5120,20 +5461,49 @@
       </p:sp>
       <p:sp>
         <p:nvSpPr>
-          <p:cNvPr id="13" name="번호 3"/>
+          <p:cNvPr id="17" name="위쪽 띠"/>
           <p:cNvSpPr/>
           <p:nvPr/>
         </p:nvSpPr>
         <p:spPr>
           <a:xfrm>
-            <a:off x="914400" y="4160520"/>
+            <a:off x="649224" y="4078224"/>
+            <a:ext cx="10893247" cy="82296"/>
+          </a:xfrm>
+          <a:prstGeom prst="rect">
+            <a:avLst/>
+          </a:prstGeom>
+          <a:solidFill>
+            <a:srgbClr val="EA7BB3"/>
+          </a:solidFill>
+          <a:ln>
+            <a:noFill/>
+          </a:ln>
+        </p:spPr>
+        <p:txBody>
+          <a:bodyPr rtlCol="0" anchor="ctr"/>
+          <a:lstStyle/>
+          <a:p>
+            <a:pPr algn="ctr"/>
+          </a:p>
+        </p:txBody>
+      </p:sp>
+      <p:sp>
+        <p:nvSpPr>
+          <p:cNvPr id="18" name="번호 3"/>
+          <p:cNvSpPr/>
+          <p:nvPr/>
+        </p:nvSpPr>
+        <p:spPr>
+          <a:xfrm>
+            <a:off x="822959" y="4343400"/>
             <a:ext cx="457200" cy="457200"/>
           </a:xfrm>
           <a:prstGeom prst="ellipse">
             <a:avLst/>
           </a:prstGeom>
           <a:solidFill>
-            <a:srgbClr val="3D26C5"/>
+            <a:srgbClr val="EF9FA1"/>
           </a:solidFill>
           <a:ln>
             <a:noFill/>
@@ -5153,7 +5523,7 @@
             <a:r>
               <a:rPr sz="1600" b="1" i="0">
                 <a:solidFill>
-                  <a:srgbClr val="FFFFFF"/>
+                  <a:srgbClr val="26231F"/>
                 </a:solidFill>
               </a:rPr>
               <a:t>3</a:t>
@@ -5163,13 +5533,13 @@
       </p:sp>
       <p:sp>
         <p:nvSpPr>
-          <p:cNvPr id="14" name="TextBox 13"/>
+          <p:cNvPr id="19" name="TextBox 18"/>
           <p:cNvSpPr txBox="1"/>
           <p:nvPr/>
         </p:nvSpPr>
         <p:spPr>
           <a:xfrm>
-            <a:off x="1600200" y="3931920"/>
+            <a:off x="1508760" y="4114800"/>
             <a:ext cx="2743200" cy="914400"/>
           </a:xfrm>
           <a:prstGeom prst="rect">
@@ -5191,7 +5561,7 @@
             <a:r>
               <a:rPr sz="1800" b="1" i="0">
                 <a:solidFill>
-                  <a:srgbClr val="1D115F"/>
+                  <a:srgbClr val="492738"/>
                 </a:solidFill>
               </a:rPr>
               <a:t>약속 3</a:t>
@@ -5201,14 +5571,14 @@
       </p:sp>
       <p:sp>
         <p:nvSpPr>
-          <p:cNvPr id="15" name="TextBox 14"/>
+          <p:cNvPr id="20" name="TextBox 19"/>
           <p:cNvSpPr txBox="1"/>
           <p:nvPr/>
         </p:nvSpPr>
         <p:spPr>
           <a:xfrm>
-            <a:off x="4389120" y="3931920"/>
-            <a:ext cx="6888175" cy="914400"/>
+            <a:off x="4297680" y="4114800"/>
+            <a:ext cx="7071055" cy="914400"/>
           </a:xfrm>
           <a:prstGeom prst="rect">
             <a:avLst/>
@@ -5229,7 +5599,7 @@
             <a:r>
               <a:rPr sz="1700" b="0" i="0">
                 <a:solidFill>
-                  <a:srgbClr val="2B2B2B"/>
+                  <a:srgbClr val="26231F"/>
                 </a:solidFill>
               </a:rPr>
               <a:t>많이 안아 주고 많이 칭찬하기</a:t>
@@ -5251,7 +5621,7 @@
     <p:bg>
       <p:bgPr>
         <a:solidFill>
-          <a:srgbClr val="3D26C5"/>
+          <a:srgbClr val="FDEAF4"/>
         </a:solidFill>
         <a:effectLst/>
       </p:bgPr>
@@ -5271,13 +5641,78 @@
         </p:nvSpPr>
         <p:spPr>
           <a:xfrm>
-            <a:off x="274320" y="274320"/>
-            <a:ext cx="11643055" cy="6309360"/>
-          </a:xfrm>
-          <a:prstGeom prst="roundRect">
-            <a:avLst>
-              <a:gd name="adj" fmla="val 3500"/>
-            </a:avLst>
+            <a:off x="10180015" y="-1645920"/>
+            <a:ext cx="3474720" cy="3474720"/>
+          </a:xfrm>
+          <a:prstGeom prst="ellipse">
+            <a:avLst/>
+          </a:prstGeom>
+          <a:solidFill>
+            <a:srgbClr val="F3A5CC"/>
+          </a:solidFill>
+          <a:ln>
+            <a:noFill/>
+          </a:ln>
+        </p:spPr>
+        <p:txBody>
+          <a:bodyPr rtlCol="0" anchor="ctr"/>
+          <a:lstStyle/>
+          <a:p>
+            <a:pPr algn="ctr"/>
+          </a:p>
+        </p:txBody>
+      </p:sp>
+      <p:sp>
+        <p:nvSpPr>
+          <p:cNvPr id="4" name="상단 라벨"/>
+          <p:cNvSpPr txBox="1"/>
+          <p:nvPr/>
+        </p:nvSpPr>
+        <p:spPr>
+          <a:xfrm>
+            <a:off x="640080" y="274320"/>
+            <a:ext cx="5486400" cy="274320"/>
+          </a:xfrm>
+          <a:prstGeom prst="rect">
+            <a:avLst/>
+          </a:prstGeom>
+          <a:noFill/>
+        </p:spPr>
+        <p:txBody>
+          <a:bodyPr wrap="square" lIns="54864" rIns="54864" tIns="27432" bIns="27432" anchor="ctr">
+            <a:noAutofit/>
+          </a:bodyPr>
+          <a:lstStyle/>
+          <a:p>
+            <a:pPr algn="l">
+              <a:lnSpc>
+                <a:spcPct val="115000"/>
+              </a:lnSpc>
+            </a:pPr>
+            <a:r>
+              <a:rPr sz="900" b="1" i="0" spc="250">
+                <a:solidFill>
+                  <a:srgbClr val="26231F"/>
+                </a:solidFill>
+              </a:rPr>
+              <a:t>FAMILY ALBUM</a:t>
+            </a:r>
+          </a:p>
+        </p:txBody>
+      </p:sp>
+      <p:sp>
+        <p:nvSpPr>
+          <p:cNvPr id="5" name="포인트"/>
+          <p:cNvSpPr/>
+          <p:nvPr/>
+        </p:nvSpPr>
+        <p:spPr>
+          <a:xfrm>
+            <a:off x="11048695" y="502919"/>
+            <a:ext cx="274320" cy="274320"/>
+          </a:xfrm>
+          <a:prstGeom prst="heart">
+            <a:avLst/>
           </a:prstGeom>
           <a:solidFill>
             <a:srgbClr val="FFFFFF"/>
@@ -5306,8 +5741,8 @@
         </p:nvSpPr>
         <p:spPr>
           <a:xfrm>
-            <a:off x="731520" y="548640"/>
-            <a:ext cx="9448495" cy="868680"/>
+            <a:off x="640080" y="658368"/>
+            <a:ext cx="9082735" cy="868680"/>
           </a:xfrm>
         </p:spPr>
         <p:txBody>
@@ -5324,7 +5759,7 @@
             <a:r>
               <a:rPr sz="3000" b="1" i="0">
                 <a:solidFill>
-                  <a:srgbClr val="1D115F"/>
+                  <a:srgbClr val="26231F"/>
                 </a:solidFill>
               </a:rPr>
               <a:t>가족 사진</a:t>
@@ -5334,14 +5769,14 @@
       </p:sp>
       <p:sp>
         <p:nvSpPr>
-          <p:cNvPr id="4" name="사진 자리"/>
+          <p:cNvPr id="6" name="사진 자리"/>
           <p:cNvSpPr/>
           <p:nvPr/>
         </p:nvSpPr>
         <p:spPr>
           <a:xfrm>
-            <a:off x="731520" y="1600200"/>
-            <a:ext cx="3454298" cy="2217420"/>
+            <a:off x="640080" y="1783080"/>
+            <a:ext cx="3515258" cy="2194560"/>
           </a:xfrm>
           <a:prstGeom prst="roundRect">
             <a:avLst>
@@ -5349,12 +5784,10 @@
             </a:avLst>
           </a:prstGeom>
           <a:solidFill>
-            <a:srgbClr val="D7D1FA"/>
+            <a:srgbClr val="FAD1E6"/>
           </a:solidFill>
           <a:ln w="19050">
-            <a:solidFill>
-              <a:srgbClr val="3D26C5"/>
-            </a:solidFill>
+            <a:noFill/>
             <a:prstDash val="dash"/>
           </a:ln>
         </p:spPr>
@@ -5372,7 +5805,7 @@
             <a:r>
               <a:rPr sz="1200" b="0" i="0">
                 <a:solidFill>
-                  <a:srgbClr val="1D115F"/>
+                  <a:srgbClr val="8E8780"/>
                 </a:solidFill>
               </a:rPr>
               <a:t>사진 1</a:t>
@@ -5382,14 +5815,14 @@
       </p:sp>
       <p:sp>
         <p:nvSpPr>
-          <p:cNvPr id="5" name="사진 자리"/>
+          <p:cNvPr id="7" name="사진 자리"/>
           <p:cNvSpPr/>
           <p:nvPr/>
         </p:nvSpPr>
         <p:spPr>
           <a:xfrm>
-            <a:off x="4368698" y="1600200"/>
-            <a:ext cx="3454298" cy="2217420"/>
+            <a:off x="4338218" y="1783080"/>
+            <a:ext cx="3515258" cy="2194560"/>
           </a:xfrm>
           <a:prstGeom prst="roundRect">
             <a:avLst>
@@ -5397,12 +5830,10 @@
             </a:avLst>
           </a:prstGeom>
           <a:solidFill>
-            <a:srgbClr val="D7D1FA"/>
+            <a:srgbClr val="FAD1E6"/>
           </a:solidFill>
           <a:ln w="19050">
-            <a:solidFill>
-              <a:srgbClr val="3D26C5"/>
-            </a:solidFill>
+            <a:noFill/>
             <a:prstDash val="dash"/>
           </a:ln>
         </p:spPr>
@@ -5420,7 +5851,7 @@
             <a:r>
               <a:rPr sz="1200" b="0" i="0">
                 <a:solidFill>
-                  <a:srgbClr val="1D115F"/>
+                  <a:srgbClr val="8E8780"/>
                 </a:solidFill>
               </a:rPr>
               <a:t>사진 2</a:t>
@@ -5430,14 +5861,14 @@
       </p:sp>
       <p:sp>
         <p:nvSpPr>
-          <p:cNvPr id="6" name="사진 자리"/>
+          <p:cNvPr id="8" name="사진 자리"/>
           <p:cNvSpPr/>
           <p:nvPr/>
         </p:nvSpPr>
         <p:spPr>
           <a:xfrm>
-            <a:off x="8005876" y="1600200"/>
-            <a:ext cx="3454298" cy="2217420"/>
+            <a:off x="8036356" y="1783080"/>
+            <a:ext cx="3515258" cy="2194560"/>
           </a:xfrm>
           <a:prstGeom prst="roundRect">
             <a:avLst>
@@ -5445,12 +5876,10 @@
             </a:avLst>
           </a:prstGeom>
           <a:solidFill>
-            <a:srgbClr val="D7D1FA"/>
+            <a:srgbClr val="FAD1E6"/>
           </a:solidFill>
           <a:ln w="19050">
-            <a:solidFill>
-              <a:srgbClr val="3D26C5"/>
-            </a:solidFill>
+            <a:noFill/>
             <a:prstDash val="dash"/>
           </a:ln>
         </p:spPr>
@@ -5468,7 +5897,7 @@
             <a:r>
               <a:rPr sz="1200" b="0" i="0">
                 <a:solidFill>
-                  <a:srgbClr val="1D115F"/>
+                  <a:srgbClr val="8E8780"/>
                 </a:solidFill>
               </a:rPr>
               <a:t>사진 3</a:t>
@@ -5478,14 +5907,14 @@
       </p:sp>
       <p:sp>
         <p:nvSpPr>
-          <p:cNvPr id="7" name="사진 자리"/>
+          <p:cNvPr id="9" name="사진 자리"/>
           <p:cNvSpPr/>
           <p:nvPr/>
         </p:nvSpPr>
         <p:spPr>
           <a:xfrm>
-            <a:off x="731520" y="4000500"/>
-            <a:ext cx="3454298" cy="2217420"/>
+            <a:off x="640080" y="4160520"/>
+            <a:ext cx="3515258" cy="2194560"/>
           </a:xfrm>
           <a:prstGeom prst="roundRect">
             <a:avLst>
@@ -5493,12 +5922,10 @@
             </a:avLst>
           </a:prstGeom>
           <a:solidFill>
-            <a:srgbClr val="D7D1FA"/>
+            <a:srgbClr val="FAD1E6"/>
           </a:solidFill>
           <a:ln w="19050">
-            <a:solidFill>
-              <a:srgbClr val="3D26C5"/>
-            </a:solidFill>
+            <a:noFill/>
             <a:prstDash val="dash"/>
           </a:ln>
         </p:spPr>
@@ -5516,7 +5943,7 @@
             <a:r>
               <a:rPr sz="1200" b="0" i="0">
                 <a:solidFill>
-                  <a:srgbClr val="1D115F"/>
+                  <a:srgbClr val="8E8780"/>
                 </a:solidFill>
               </a:rPr>
               <a:t>사진 4</a:t>
@@ -5526,14 +5953,14 @@
       </p:sp>
       <p:sp>
         <p:nvSpPr>
-          <p:cNvPr id="8" name="사진 자리"/>
+          <p:cNvPr id="10" name="사진 자리"/>
           <p:cNvSpPr/>
           <p:nvPr/>
         </p:nvSpPr>
         <p:spPr>
           <a:xfrm>
-            <a:off x="4368698" y="4000500"/>
-            <a:ext cx="3454298" cy="2217420"/>
+            <a:off x="4338218" y="4160520"/>
+            <a:ext cx="3515258" cy="2194560"/>
           </a:xfrm>
           <a:prstGeom prst="roundRect">
             <a:avLst>
@@ -5541,12 +5968,10 @@
             </a:avLst>
           </a:prstGeom>
           <a:solidFill>
-            <a:srgbClr val="D7D1FA"/>
+            <a:srgbClr val="FAD1E6"/>
           </a:solidFill>
           <a:ln w="19050">
-            <a:solidFill>
-              <a:srgbClr val="3D26C5"/>
-            </a:solidFill>
+            <a:noFill/>
             <a:prstDash val="dash"/>
           </a:ln>
         </p:spPr>
@@ -5564,7 +5989,7 @@
             <a:r>
               <a:rPr sz="1200" b="0" i="0">
                 <a:solidFill>
-                  <a:srgbClr val="1D115F"/>
+                  <a:srgbClr val="8E8780"/>
                 </a:solidFill>
               </a:rPr>
               <a:t>사진 5</a:t>
@@ -5574,14 +5999,14 @@
       </p:sp>
       <p:sp>
         <p:nvSpPr>
-          <p:cNvPr id="9" name="사진 자리"/>
+          <p:cNvPr id="11" name="사진 자리"/>
           <p:cNvSpPr/>
           <p:nvPr/>
         </p:nvSpPr>
         <p:spPr>
           <a:xfrm>
-            <a:off x="8005876" y="4000500"/>
-            <a:ext cx="3454298" cy="2217420"/>
+            <a:off x="8036356" y="4160520"/>
+            <a:ext cx="3515258" cy="2194560"/>
           </a:xfrm>
           <a:prstGeom prst="roundRect">
             <a:avLst>
@@ -5589,12 +6014,10 @@
             </a:avLst>
           </a:prstGeom>
           <a:solidFill>
-            <a:srgbClr val="D7D1FA"/>
+            <a:srgbClr val="FAD1E6"/>
           </a:solidFill>
           <a:ln w="19050">
-            <a:solidFill>
-              <a:srgbClr val="3D26C5"/>
-            </a:solidFill>
+            <a:noFill/>
             <a:prstDash val="dash"/>
           </a:ln>
         </p:spPr>
@@ -5612,7 +6035,7 @@
             <a:r>
               <a:rPr sz="1200" b="0" i="0">
                 <a:solidFill>
-                  <a:srgbClr val="1D115F"/>
+                  <a:srgbClr val="8E8780"/>
                 </a:solidFill>
               </a:rPr>
               <a:t>사진 6</a:t>
@@ -5631,6 +6054,14 @@
 <file path=ppt/slides/slide6.xml><?xml version="1.0" encoding="utf-8"?>
 <p:sld xmlns:a="http://schemas.openxmlformats.org/drawingml/2006/main" xmlns:p="http://schemas.openxmlformats.org/presentationml/2006/main" xmlns:r="http://schemas.openxmlformats.org/officeDocument/2006/relationships">
   <p:cSld>
+    <p:bg>
+      <p:bgPr>
+        <a:solidFill>
+          <a:srgbClr val="FDEAF4"/>
+        </a:solidFill>
+        <a:effectLst/>
+      </p:bgPr>
+    </p:bg>
     <p:spTree>
       <p:nvGrpSpPr>
         <p:cNvPr id="1" name=""/>
@@ -5638,30 +6069,116 @@
         <p:nvPr/>
       </p:nvGrpSpPr>
       <p:grpSpPr/>
-      <p:pic>
-        <p:nvPicPr>
-          <p:cNvPr id="3" name="표지 그림" descr="family-25.jpg"/>
-          <p:cNvPicPr>
-            <a:picLocks noChangeAspect="1"/>
-          </p:cNvPicPr>
-          <p:nvPr/>
-        </p:nvPicPr>
-        <p:blipFill>
-          <a:blip r:embed="rId2"/>
-          <a:stretch>
-            <a:fillRect/>
-          </a:stretch>
-        </p:blipFill>
-        <p:spPr>
-          <a:xfrm>
-            <a:off x="0" y="0"/>
-            <a:ext cx="12191695" cy="6858000"/>
+      <p:sp>
+        <p:nvSpPr>
+          <p:cNvPr id="3" name="사진 자리"/>
+          <p:cNvSpPr/>
+          <p:nvPr/>
+        </p:nvSpPr>
+        <p:spPr>
+          <a:xfrm>
+            <a:off x="7802684" y="0"/>
+            <a:ext cx="4389010" cy="6858000"/>
           </a:xfrm>
           <a:prstGeom prst="rect">
             <a:avLst/>
           </a:prstGeom>
-        </p:spPr>
-      </p:pic>
+          <a:solidFill>
+            <a:srgbClr val="F3A5CC"/>
+          </a:solidFill>
+          <a:ln>
+            <a:noFill/>
+          </a:ln>
+        </p:spPr>
+        <p:txBody>
+          <a:bodyPr rtlCol="0" anchor="ctr" wrap="square" lIns="54864" rIns="54864" tIns="27432" bIns="27432">
+            <a:noAutofit/>
+          </a:bodyPr>
+          <a:lstStyle/>
+          <a:p>
+            <a:pPr algn="ctr">
+              <a:lnSpc>
+                <a:spcPct val="100000"/>
+              </a:lnSpc>
+            </a:pPr>
+            <a:r>
+              <a:rPr sz="1400" b="0" i="0">
+                <a:solidFill>
+                  <a:srgbClr val="492738"/>
+                </a:solidFill>
+              </a:rPr>
+              <a:t>사진을 넣어 주세요</a:t>
+            </a:r>
+          </a:p>
+        </p:txBody>
+      </p:sp>
+      <p:sp>
+        <p:nvSpPr>
+          <p:cNvPr id="4" name="장식"/>
+          <p:cNvSpPr/>
+          <p:nvPr/>
+        </p:nvSpPr>
+        <p:spPr>
+          <a:xfrm>
+            <a:off x="8168435" y="365760"/>
+            <a:ext cx="3657508" cy="6126480"/>
+          </a:xfrm>
+          <a:prstGeom prst="rect">
+            <a:avLst/>
+          </a:prstGeom>
+          <a:noFill/>
+          <a:ln w="9525">
+            <a:solidFill>
+              <a:srgbClr val="26231F"/>
+            </a:solidFill>
+          </a:ln>
+        </p:spPr>
+        <p:txBody>
+          <a:bodyPr rtlCol="0" anchor="ctr"/>
+          <a:lstStyle/>
+          <a:p>
+            <a:pPr algn="ctr"/>
+          </a:p>
+        </p:txBody>
+      </p:sp>
+      <p:sp>
+        <p:nvSpPr>
+          <p:cNvPr id="5" name="라벨"/>
+          <p:cNvSpPr txBox="1"/>
+          <p:nvPr/>
+        </p:nvSpPr>
+        <p:spPr>
+          <a:xfrm>
+            <a:off x="822960" y="2148840"/>
+            <a:ext cx="5608179" cy="274320"/>
+          </a:xfrm>
+          <a:prstGeom prst="rect">
+            <a:avLst/>
+          </a:prstGeom>
+          <a:noFill/>
+        </p:spPr>
+        <p:txBody>
+          <a:bodyPr wrap="square" lIns="54864" rIns="54864" tIns="27432" bIns="27432" anchor="t">
+            <a:noAutofit/>
+          </a:bodyPr>
+          <a:lstStyle/>
+          <a:p>
+            <a:pPr algn="l">
+              <a:lnSpc>
+                <a:spcPct val="115000"/>
+              </a:lnSpc>
+            </a:pPr>
+            <a:r>
+              <a:rPr sz="1000" b="1" i="0" spc="250">
+                <a:solidFill>
+                  <a:srgbClr val="26231F"/>
+                </a:solidFill>
+              </a:rPr>
+              <a:t>FAMILY ALBUM</a:t>
+            </a:r>
+          </a:p>
+        </p:txBody>
+      </p:sp>
       <p:sp>
         <p:nvSpPr>
           <p:cNvPr id="2" name="Title 1"/>
@@ -5674,8 +6191,8 @@
         </p:nvSpPr>
         <p:spPr>
           <a:xfrm>
-            <a:off x="853418" y="2057400"/>
-            <a:ext cx="6095847" cy="1554480"/>
+            <a:off x="822960" y="2606040"/>
+            <a:ext cx="5608179" cy="1188720"/>
           </a:xfrm>
         </p:spPr>
         <p:txBody>
@@ -5690,9 +6207,9 @@
               </a:lnSpc>
             </a:pPr>
             <a:r>
-              <a:rPr sz="3600" b="1" i="0">
-                <a:solidFill>
-                  <a:srgbClr val="1D115F"/>
+              <a:rPr sz="4000" b="1" i="0">
+                <a:solidFill>
+                  <a:srgbClr val="26231F"/>
                 </a:solidFill>
               </a:rPr>
               <a:t>우리 가족 소개를 마칩니다</a:t>
@@ -5702,14 +6219,14 @@
       </p:sp>
       <p:sp>
         <p:nvSpPr>
-          <p:cNvPr id="4" name="한 줄 문구"/>
+          <p:cNvPr id="6" name="한 줄 문구"/>
           <p:cNvSpPr txBox="1"/>
           <p:nvPr/>
         </p:nvSpPr>
         <p:spPr>
           <a:xfrm>
-            <a:off x="853418" y="3749039"/>
-            <a:ext cx="6095847" cy="822960"/>
+            <a:off x="822960" y="3886200"/>
+            <a:ext cx="5608179" cy="822960"/>
           </a:xfrm>
           <a:prstGeom prst="rect">
             <a:avLst/>
@@ -5728,9 +6245,9 @@
               </a:lnSpc>
             </a:pPr>
             <a:r>
-              <a:rPr sz="1700" b="0" i="1">
-                <a:solidFill>
-                  <a:srgbClr val="1D115F"/>
+              <a:rPr sz="1700" b="0" i="0">
+                <a:solidFill>
+                  <a:srgbClr val="26231F"/>
                 </a:solidFill>
               </a:rPr>
               <a:t>읽어 주셔서 고맙습니다</a:t>
@@ -5740,14 +6257,14 @@
       </p:sp>
       <p:sp>
         <p:nvSpPr>
-          <p:cNvPr id="5" name="안내 문구"/>
+          <p:cNvPr id="7" name="안내 문구"/>
           <p:cNvSpPr txBox="1"/>
           <p:nvPr/>
         </p:nvSpPr>
         <p:spPr>
           <a:xfrm>
-            <a:off x="853418" y="4617720"/>
-            <a:ext cx="6095847" cy="914400"/>
+            <a:off x="822960" y="4754880"/>
+            <a:ext cx="5608179" cy="914400"/>
           </a:xfrm>
           <a:prstGeom prst="rect">
             <a:avLst/>
@@ -5768,7 +6285,7 @@
             <a:r>
               <a:rPr sz="1400" b="0" i="0">
                 <a:solidFill>
-                  <a:srgbClr val="666666"/>
+                  <a:srgbClr val="26231F"/>
                 </a:solidFill>
               </a:rPr>
               <a:t>고맙습니다 · 가족 이름</a:t>
@@ -5795,34 +6312,34 @@
         <a:sysClr val="window" lastClr="FFFFFF"/>
       </a:lt1>
       <a:dk2>
-        <a:srgbClr val="1D115F"/>
+        <a:srgbClr val="492738"/>
       </a:dk2>
       <a:lt2>
-        <a:srgbClr val="F0EEFC"/>
+        <a:srgbClr val="FDEAF4"/>
       </a:lt2>
       <a:accent1>
-        <a:srgbClr val="3D26C5"/>
+        <a:srgbClr val="EA7BB3"/>
       </a:accent1>
       <a:accent2>
-        <a:srgbClr val="209DB6"/>
+        <a:srgbClr val="EF9FA1"/>
       </a:accent2>
       <a:accent3>
-        <a:srgbClr val="1D115F"/>
+        <a:srgbClr val="492738"/>
       </a:accent3>
       <a:accent4>
-        <a:srgbClr val="D7D1FA"/>
+        <a:srgbClr val="FAD1E6"/>
       </a:accent4>
       <a:accent5>
-        <a:srgbClr val="2E62BE"/>
+        <a:srgbClr val="EC8DAA"/>
       </a:accent5>
       <a:accent6>
-        <a:srgbClr val="77709F"/>
+        <a:srgbClr val="927D88"/>
       </a:accent6>
       <a:hlink>
-        <a:srgbClr val="3D26C5"/>
+        <a:srgbClr val="EA7BB3"/>
       </a:hlink>
       <a:folHlink>
-        <a:srgbClr val="1D115F"/>
+        <a:srgbClr val="492738"/>
       </a:folHlink>
     </a:clrScheme>
     <a:fontScheme name="Office">
